--- a/Fase 2/Evidencias Proyecto/ServiHos Presentación.pptx
+++ b/Fase 2/Evidencias Proyecto/ServiHos Presentación.pptx
@@ -330,7 +330,7 @@
             <a:fld id="{1D8BD707-D9CF-40AE-B4C6-C98DA3205C09}" type="datetimeFigureOut">
               <a:rPr lang="en-US" smtClean="0"/>
               <a:pPr/>
-              <a:t>6/16/2025</a:t>
+              <a:t>6/17/2025</a:t>
             </a:fld>
             <a:endParaRPr lang="en-US"/>
           </a:p>
@@ -495,7 +495,7 @@
             <a:fld id="{1D8BD707-D9CF-40AE-B4C6-C98DA3205C09}" type="datetimeFigureOut">
               <a:rPr lang="en-US" smtClean="0"/>
               <a:pPr/>
-              <a:t>6/16/2025</a:t>
+              <a:t>6/17/2025</a:t>
             </a:fld>
             <a:endParaRPr lang="en-US"/>
           </a:p>
@@ -670,7 +670,7 @@
             <a:fld id="{1D8BD707-D9CF-40AE-B4C6-C98DA3205C09}" type="datetimeFigureOut">
               <a:rPr lang="en-US" smtClean="0"/>
               <a:pPr/>
-              <a:t>6/16/2025</a:t>
+              <a:t>6/17/2025</a:t>
             </a:fld>
             <a:endParaRPr lang="en-US"/>
           </a:p>
@@ -835,7 +835,7 @@
             <a:fld id="{1D8BD707-D9CF-40AE-B4C6-C98DA3205C09}" type="datetimeFigureOut">
               <a:rPr lang="en-US" smtClean="0"/>
               <a:pPr/>
-              <a:t>6/16/2025</a:t>
+              <a:t>6/17/2025</a:t>
             </a:fld>
             <a:endParaRPr lang="en-US"/>
           </a:p>
@@ -1077,7 +1077,7 @@
             <a:fld id="{1D8BD707-D9CF-40AE-B4C6-C98DA3205C09}" type="datetimeFigureOut">
               <a:rPr lang="en-US" smtClean="0"/>
               <a:pPr/>
-              <a:t>6/16/2025</a:t>
+              <a:t>6/17/2025</a:t>
             </a:fld>
             <a:endParaRPr lang="en-US"/>
           </a:p>
@@ -1359,7 +1359,7 @@
             <a:fld id="{1D8BD707-D9CF-40AE-B4C6-C98DA3205C09}" type="datetimeFigureOut">
               <a:rPr lang="en-US" smtClean="0"/>
               <a:pPr/>
-              <a:t>6/16/2025</a:t>
+              <a:t>6/17/2025</a:t>
             </a:fld>
             <a:endParaRPr lang="en-US"/>
           </a:p>
@@ -1775,7 +1775,7 @@
             <a:fld id="{1D8BD707-D9CF-40AE-B4C6-C98DA3205C09}" type="datetimeFigureOut">
               <a:rPr lang="en-US" smtClean="0"/>
               <a:pPr/>
-              <a:t>6/16/2025</a:t>
+              <a:t>6/17/2025</a:t>
             </a:fld>
             <a:endParaRPr lang="en-US"/>
           </a:p>
@@ -1889,7 +1889,7 @@
             <a:fld id="{1D8BD707-D9CF-40AE-B4C6-C98DA3205C09}" type="datetimeFigureOut">
               <a:rPr lang="en-US" smtClean="0"/>
               <a:pPr/>
-              <a:t>6/16/2025</a:t>
+              <a:t>6/17/2025</a:t>
             </a:fld>
             <a:endParaRPr lang="en-US"/>
           </a:p>
@@ -1981,7 +1981,7 @@
             <a:fld id="{1D8BD707-D9CF-40AE-B4C6-C98DA3205C09}" type="datetimeFigureOut">
               <a:rPr lang="en-US" smtClean="0"/>
               <a:pPr/>
-              <a:t>6/16/2025</a:t>
+              <a:t>6/17/2025</a:t>
             </a:fld>
             <a:endParaRPr lang="en-US"/>
           </a:p>
@@ -2253,7 +2253,7 @@
             <a:fld id="{1D8BD707-D9CF-40AE-B4C6-C98DA3205C09}" type="datetimeFigureOut">
               <a:rPr lang="en-US" smtClean="0"/>
               <a:pPr/>
-              <a:t>6/16/2025</a:t>
+              <a:t>6/17/2025</a:t>
             </a:fld>
             <a:endParaRPr lang="en-US"/>
           </a:p>
@@ -2502,7 +2502,7 @@
             <a:fld id="{1D8BD707-D9CF-40AE-B4C6-C98DA3205C09}" type="datetimeFigureOut">
               <a:rPr lang="en-US" smtClean="0"/>
               <a:pPr/>
-              <a:t>6/16/2025</a:t>
+              <a:t>6/17/2025</a:t>
             </a:fld>
             <a:endParaRPr lang="en-US"/>
           </a:p>
@@ -2710,7 +2710,7 @@
             <a:fld id="{1D8BD707-D9CF-40AE-B4C6-C98DA3205C09}" type="datetimeFigureOut">
               <a:rPr lang="en-US" smtClean="0"/>
               <a:pPr/>
-              <a:t>6/16/2025</a:t>
+              <a:t>6/17/2025</a:t>
             </a:fld>
             <a:endParaRPr lang="en-US"/>
           </a:p>
@@ -3638,18 +3638,6 @@
   <p:clrMapOvr>
     <a:masterClrMapping/>
   </p:clrMapOvr>
-  <mc:AlternateContent xmlns:mc="http://schemas.openxmlformats.org/markup-compatibility/2006">
-    <mc:Choice xmlns:p14="http://schemas.microsoft.com/office/powerpoint/2010/main" Requires="p14">
-      <p:transition spd="med" p14:dur="700">
-        <p:fade/>
-      </p:transition>
-    </mc:Choice>
-    <mc:Fallback>
-      <p:transition spd="med">
-        <p:fade/>
-      </p:transition>
-    </mc:Fallback>
-  </mc:AlternateContent>
 </p:sld>
 </file>
 
@@ -4351,18 +4339,6 @@
   <p:clrMapOvr>
     <a:masterClrMapping/>
   </p:clrMapOvr>
-  <mc:AlternateContent xmlns:mc="http://schemas.openxmlformats.org/markup-compatibility/2006">
-    <mc:Choice xmlns:p14="http://schemas.microsoft.com/office/powerpoint/2010/main" Requires="p14">
-      <p:transition spd="med" p14:dur="700">
-        <p:fade/>
-      </p:transition>
-    </mc:Choice>
-    <mc:Fallback>
-      <p:transition spd="med">
-        <p:fade/>
-      </p:transition>
-    </mc:Fallback>
-  </mc:AlternateContent>
 </p:sld>
 </file>
 
@@ -5259,18 +5235,6 @@
   <p:clrMapOvr>
     <a:masterClrMapping/>
   </p:clrMapOvr>
-  <mc:AlternateContent xmlns:mc="http://schemas.openxmlformats.org/markup-compatibility/2006">
-    <mc:Choice xmlns:p14="http://schemas.microsoft.com/office/powerpoint/2010/main" Requires="p14">
-      <p:transition spd="med" p14:dur="700">
-        <p:fade/>
-      </p:transition>
-    </mc:Choice>
-    <mc:Fallback>
-      <p:transition spd="med">
-        <p:fade/>
-      </p:transition>
-    </mc:Fallback>
-  </mc:AlternateContent>
 </p:sld>
 </file>
 
@@ -5695,18 +5659,6 @@
   <p:clrMapOvr>
     <a:masterClrMapping/>
   </p:clrMapOvr>
-  <mc:AlternateContent xmlns:mc="http://schemas.openxmlformats.org/markup-compatibility/2006">
-    <mc:Choice xmlns:p14="http://schemas.microsoft.com/office/powerpoint/2010/main" Requires="p14">
-      <p:transition spd="med" p14:dur="700">
-        <p:fade/>
-      </p:transition>
-    </mc:Choice>
-    <mc:Fallback>
-      <p:transition spd="med">
-        <p:fade/>
-      </p:transition>
-    </mc:Fallback>
-  </mc:AlternateContent>
 </p:sld>
 </file>
 
@@ -6175,18 +6127,6 @@
   <p:clrMapOvr>
     <a:masterClrMapping/>
   </p:clrMapOvr>
-  <mc:AlternateContent xmlns:mc="http://schemas.openxmlformats.org/markup-compatibility/2006">
-    <mc:Choice xmlns:p14="http://schemas.microsoft.com/office/powerpoint/2010/main" Requires="p14">
-      <p:transition spd="med" p14:dur="700">
-        <p:fade/>
-      </p:transition>
-    </mc:Choice>
-    <mc:Fallback>
-      <p:transition spd="med">
-        <p:fade/>
-      </p:transition>
-    </mc:Fallback>
-  </mc:AlternateContent>
 </p:sld>
 </file>
 
@@ -6450,18 +6390,6 @@
   <p:clrMapOvr>
     <a:masterClrMapping/>
   </p:clrMapOvr>
-  <mc:AlternateContent xmlns:mc="http://schemas.openxmlformats.org/markup-compatibility/2006">
-    <mc:Choice xmlns:p14="http://schemas.microsoft.com/office/powerpoint/2010/main" Requires="p14">
-      <p:transition spd="med" p14:dur="700">
-        <p:fade/>
-      </p:transition>
-    </mc:Choice>
-    <mc:Fallback>
-      <p:transition spd="med">
-        <p:fade/>
-      </p:transition>
-    </mc:Fallback>
-  </mc:AlternateContent>
 </p:sld>
 </file>
 
@@ -6889,8 +6817,8 @@
         </p:nvSpPr>
         <p:spPr>
           <a:xfrm>
-            <a:off x="4495800" y="4453232"/>
-            <a:ext cx="9063819" cy="994136"/>
+            <a:off x="5334000" y="4661721"/>
+            <a:ext cx="8225619" cy="994136"/>
           </a:xfrm>
           <a:prstGeom prst="rect">
             <a:avLst/>
@@ -6932,8 +6860,8 @@
         </p:nvSpPr>
         <p:spPr>
           <a:xfrm>
-            <a:off x="4354193" y="3122473"/>
-            <a:ext cx="9063818" cy="994136"/>
+            <a:off x="5455844" y="3187758"/>
+            <a:ext cx="7703626" cy="994136"/>
           </a:xfrm>
           <a:prstGeom prst="rect">
             <a:avLst/>
@@ -6975,7 +6903,7 @@
         </p:nvSpPr>
         <p:spPr>
           <a:xfrm>
-            <a:off x="7100804" y="5261778"/>
+            <a:off x="6603706" y="5516425"/>
             <a:ext cx="7978706" cy="679450"/>
           </a:xfrm>
           <a:prstGeom prst="rect">
@@ -7005,7 +6933,7 @@
                 <a:cs typeface="Open Sans Bold"/>
                 <a:sym typeface="Open Sans Bold"/>
               </a:rPr>
-              <a:t>Desarollador</a:t>
+              <a:t>Desarrollador</a:t>
             </a:r>
             <a:endParaRPr lang="en-US" sz="3999" b="1" dirty="0">
               <a:solidFill>
@@ -7027,7 +6955,7 @@
         </p:nvSpPr>
         <p:spPr>
           <a:xfrm>
-            <a:off x="7100804" y="4006048"/>
+            <a:off x="6544506" y="4088003"/>
             <a:ext cx="7978706" cy="679450"/>
           </a:xfrm>
           <a:prstGeom prst="rect">
@@ -7067,18 +6995,6 @@
   <p:clrMapOvr>
     <a:masterClrMapping/>
   </p:clrMapOvr>
-  <mc:AlternateContent xmlns:mc="http://schemas.openxmlformats.org/markup-compatibility/2006">
-    <mc:Choice xmlns:p14="http://schemas.microsoft.com/office/powerpoint/2010/main" Requires="p14">
-      <p:transition spd="med" p14:dur="700">
-        <p:fade/>
-      </p:transition>
-    </mc:Choice>
-    <mc:Fallback>
-      <p:transition spd="med">
-        <p:fade/>
-      </p:transition>
-    </mc:Fallback>
-  </mc:AlternateContent>
 </p:sld>
 </file>
 
@@ -8210,18 +8126,6 @@
   <p:clrMapOvr>
     <a:masterClrMapping/>
   </p:clrMapOvr>
-  <mc:AlternateContent xmlns:mc="http://schemas.openxmlformats.org/markup-compatibility/2006">
-    <mc:Choice xmlns:p14="http://schemas.microsoft.com/office/powerpoint/2010/main" Requires="p14">
-      <p:transition spd="med" p14:dur="700">
-        <p:fade/>
-      </p:transition>
-    </mc:Choice>
-    <mc:Fallback>
-      <p:transition spd="med">
-        <p:fade/>
-      </p:transition>
-    </mc:Fallback>
-  </mc:AlternateContent>
 </p:sld>
 </file>
 
@@ -9336,18 +9240,6 @@
   <p:clrMapOvr>
     <a:masterClrMapping/>
   </p:clrMapOvr>
-  <mc:AlternateContent xmlns:mc="http://schemas.openxmlformats.org/markup-compatibility/2006">
-    <mc:Choice xmlns:p14="http://schemas.microsoft.com/office/powerpoint/2010/main" Requires="p14">
-      <p:transition spd="med" p14:dur="700">
-        <p:fade/>
-      </p:transition>
-    </mc:Choice>
-    <mc:Fallback>
-      <p:transition spd="med">
-        <p:fade/>
-      </p:transition>
-    </mc:Fallback>
-  </mc:AlternateContent>
 </p:sld>
 </file>
 
@@ -9670,7 +9562,7 @@
                 <a:cs typeface="Glacial Indifference"/>
                 <a:sym typeface="Glacial Indifference"/>
               </a:rPr>
-              <a:t>REQUERIMIENTOS</a:t>
+              <a:t>ALCANCE</a:t>
             </a:r>
           </a:p>
         </p:txBody>
@@ -10671,7 +10563,7 @@
                 <a:cs typeface="Glacial Indifference"/>
                 <a:sym typeface="Glacial Indifference"/>
               </a:rPr>
-              <a:t>Inscripción de usurio hospedería</a:t>
+              <a:t>Inscripción de usuario hospedería</a:t>
             </a:r>
           </a:p>
           <a:p>
@@ -10755,7 +10647,7 @@
                 <a:cs typeface="Glacial Indifference"/>
                 <a:sym typeface="Glacial Indifference"/>
               </a:rPr>
-              <a:t>Editar datos</a:t>
+              <a:t>Editar datos de usuario hospedería</a:t>
             </a:r>
           </a:p>
           <a:p>
@@ -10776,7 +10668,7 @@
                 <a:cs typeface="Glacial Indifference"/>
                 <a:sym typeface="Glacial Indifference"/>
               </a:rPr>
-              <a:t>Eliminar usuario</a:t>
+              <a:t>Eliminar usuario hospedería y encargado</a:t>
             </a:r>
           </a:p>
           <a:p>
@@ -10807,18 +10699,6 @@
   <p:clrMapOvr>
     <a:masterClrMapping/>
   </p:clrMapOvr>
-  <mc:AlternateContent xmlns:mc="http://schemas.openxmlformats.org/markup-compatibility/2006">
-    <mc:Choice xmlns:p14="http://schemas.microsoft.com/office/powerpoint/2010/main" Requires="p14">
-      <p:transition spd="med" p14:dur="700">
-        <p:fade/>
-      </p:transition>
-    </mc:Choice>
-    <mc:Fallback>
-      <p:transition spd="med">
-        <p:fade/>
-      </p:transition>
-    </mc:Fallback>
-  </mc:AlternateContent>
 </p:sld>
 </file>
 
@@ -12065,18 +11945,6 @@
   <p:clrMapOvr>
     <a:masterClrMapping/>
   </p:clrMapOvr>
-  <mc:AlternateContent xmlns:mc="http://schemas.openxmlformats.org/markup-compatibility/2006">
-    <mc:Choice xmlns:p14="http://schemas.microsoft.com/office/powerpoint/2010/main" Requires="p14">
-      <p:transition spd="med" p14:dur="700">
-        <p:fade/>
-      </p:transition>
-    </mc:Choice>
-    <mc:Fallback>
-      <p:transition spd="med">
-        <p:fade/>
-      </p:transition>
-    </mc:Fallback>
-  </mc:AlternateContent>
 </p:sld>
 </file>
 
@@ -12726,18 +12594,6 @@
   <p:clrMapOvr>
     <a:masterClrMapping/>
   </p:clrMapOvr>
-  <mc:AlternateContent xmlns:mc="http://schemas.openxmlformats.org/markup-compatibility/2006">
-    <mc:Choice xmlns:p14="http://schemas.microsoft.com/office/powerpoint/2010/main" Requires="p14">
-      <p:transition spd="med" p14:dur="700">
-        <p:fade/>
-      </p:transition>
-    </mc:Choice>
-    <mc:Fallback>
-      <p:transition spd="med">
-        <p:fade/>
-      </p:transition>
-    </mc:Fallback>
-  </mc:AlternateContent>
 </p:sld>
 </file>
 
@@ -13553,7 +13409,7 @@
           <a:blipFill>
             <a:blip r:embed="rId10"/>
             <a:stretch>
-              <a:fillRect/>
+              <a:fillRect l="-1181" r="-1181"/>
             </a:stretch>
           </a:blipFill>
         </p:spPr>
@@ -13652,18 +13508,6 @@
   <p:clrMapOvr>
     <a:masterClrMapping/>
   </p:clrMapOvr>
-  <mc:AlternateContent xmlns:mc="http://schemas.openxmlformats.org/markup-compatibility/2006">
-    <mc:Choice xmlns:p14="http://schemas.microsoft.com/office/powerpoint/2010/main" Requires="p14">
-      <p:transition spd="med" p14:dur="700">
-        <p:fade/>
-      </p:transition>
-    </mc:Choice>
-    <mc:Fallback>
-      <p:transition spd="med">
-        <p:fade/>
-      </p:transition>
-    </mc:Fallback>
-  </mc:AlternateContent>
 </p:sld>
 </file>
 
@@ -14313,18 +14157,6 @@
   <p:clrMapOvr>
     <a:masterClrMapping/>
   </p:clrMapOvr>
-  <mc:AlternateContent xmlns:mc="http://schemas.openxmlformats.org/markup-compatibility/2006">
-    <mc:Choice xmlns:p14="http://schemas.microsoft.com/office/powerpoint/2010/main" Requires="p14">
-      <p:transition spd="med" p14:dur="700">
-        <p:fade/>
-      </p:transition>
-    </mc:Choice>
-    <mc:Fallback>
-      <p:transition spd="med">
-        <p:fade/>
-      </p:transition>
-    </mc:Fallback>
-  </mc:AlternateContent>
 </p:sld>
 </file>
 

--- a/Fase 2/Evidencias Proyecto/ServiHos Presentación.pptx
+++ b/Fase 2/Evidencias Proyecto/ServiHos Presentación.pptx
@@ -18,22 +18,21 @@
     <p:sldId id="266" r:id="rId12"/>
     <p:sldId id="267" r:id="rId13"/>
     <p:sldId id="268" r:id="rId14"/>
-    <p:sldId id="269" r:id="rId15"/>
   </p:sldIdLst>
   <p:sldSz cx="18288000" cy="10287000"/>
   <p:notesSz cx="6858000" cy="9144000"/>
   <p:embeddedFontLst>
     <p:embeddedFont>
       <p:font typeface="Glacial Indifference" panose="020B0604020202020204" charset="0"/>
+      <p:regular r:id="rId15"/>
+    </p:embeddedFont>
+    <p:embeddedFont>
+      <p:font typeface="Glacial Indifference Bold" panose="020B0604020202020204" charset="0"/>
       <p:regular r:id="rId16"/>
     </p:embeddedFont>
     <p:embeddedFont>
-      <p:font typeface="Glacial Indifference Bold" panose="020B0604020202020204" charset="0"/>
+      <p:font typeface="Open Sans Bold" panose="020B0604020202020204" charset="0"/>
       <p:regular r:id="rId17"/>
-    </p:embeddedFont>
-    <p:embeddedFont>
-      <p:font typeface="Open Sans Bold" panose="020B0604020202020204" charset="0"/>
-      <p:regular r:id="rId18"/>
     </p:embeddedFont>
   </p:embeddedFontLst>
   <p:defaultTextStyle>
@@ -330,7 +329,7 @@
             <a:fld id="{1D8BD707-D9CF-40AE-B4C6-C98DA3205C09}" type="datetimeFigureOut">
               <a:rPr lang="en-US" smtClean="0"/>
               <a:pPr/>
-              <a:t>6/17/2025</a:t>
+              <a:t>7/5/2025</a:t>
             </a:fld>
             <a:endParaRPr lang="en-US"/>
           </a:p>
@@ -495,7 +494,7 @@
             <a:fld id="{1D8BD707-D9CF-40AE-B4C6-C98DA3205C09}" type="datetimeFigureOut">
               <a:rPr lang="en-US" smtClean="0"/>
               <a:pPr/>
-              <a:t>6/17/2025</a:t>
+              <a:t>7/5/2025</a:t>
             </a:fld>
             <a:endParaRPr lang="en-US"/>
           </a:p>
@@ -670,7 +669,7 @@
             <a:fld id="{1D8BD707-D9CF-40AE-B4C6-C98DA3205C09}" type="datetimeFigureOut">
               <a:rPr lang="en-US" smtClean="0"/>
               <a:pPr/>
-              <a:t>6/17/2025</a:t>
+              <a:t>7/5/2025</a:t>
             </a:fld>
             <a:endParaRPr lang="en-US"/>
           </a:p>
@@ -835,7 +834,7 @@
             <a:fld id="{1D8BD707-D9CF-40AE-B4C6-C98DA3205C09}" type="datetimeFigureOut">
               <a:rPr lang="en-US" smtClean="0"/>
               <a:pPr/>
-              <a:t>6/17/2025</a:t>
+              <a:t>7/5/2025</a:t>
             </a:fld>
             <a:endParaRPr lang="en-US"/>
           </a:p>
@@ -1077,7 +1076,7 @@
             <a:fld id="{1D8BD707-D9CF-40AE-B4C6-C98DA3205C09}" type="datetimeFigureOut">
               <a:rPr lang="en-US" smtClean="0"/>
               <a:pPr/>
-              <a:t>6/17/2025</a:t>
+              <a:t>7/5/2025</a:t>
             </a:fld>
             <a:endParaRPr lang="en-US"/>
           </a:p>
@@ -1359,7 +1358,7 @@
             <a:fld id="{1D8BD707-D9CF-40AE-B4C6-C98DA3205C09}" type="datetimeFigureOut">
               <a:rPr lang="en-US" smtClean="0"/>
               <a:pPr/>
-              <a:t>6/17/2025</a:t>
+              <a:t>7/5/2025</a:t>
             </a:fld>
             <a:endParaRPr lang="en-US"/>
           </a:p>
@@ -1775,7 +1774,7 @@
             <a:fld id="{1D8BD707-D9CF-40AE-B4C6-C98DA3205C09}" type="datetimeFigureOut">
               <a:rPr lang="en-US" smtClean="0"/>
               <a:pPr/>
-              <a:t>6/17/2025</a:t>
+              <a:t>7/5/2025</a:t>
             </a:fld>
             <a:endParaRPr lang="en-US"/>
           </a:p>
@@ -1889,7 +1888,7 @@
             <a:fld id="{1D8BD707-D9CF-40AE-B4C6-C98DA3205C09}" type="datetimeFigureOut">
               <a:rPr lang="en-US" smtClean="0"/>
               <a:pPr/>
-              <a:t>6/17/2025</a:t>
+              <a:t>7/5/2025</a:t>
             </a:fld>
             <a:endParaRPr lang="en-US"/>
           </a:p>
@@ -1981,7 +1980,7 @@
             <a:fld id="{1D8BD707-D9CF-40AE-B4C6-C98DA3205C09}" type="datetimeFigureOut">
               <a:rPr lang="en-US" smtClean="0"/>
               <a:pPr/>
-              <a:t>6/17/2025</a:t>
+              <a:t>7/5/2025</a:t>
             </a:fld>
             <a:endParaRPr lang="en-US"/>
           </a:p>
@@ -2253,7 +2252,7 @@
             <a:fld id="{1D8BD707-D9CF-40AE-B4C6-C98DA3205C09}" type="datetimeFigureOut">
               <a:rPr lang="en-US" smtClean="0"/>
               <a:pPr/>
-              <a:t>6/17/2025</a:t>
+              <a:t>7/5/2025</a:t>
             </a:fld>
             <a:endParaRPr lang="en-US"/>
           </a:p>
@@ -2502,7 +2501,7 @@
             <a:fld id="{1D8BD707-D9CF-40AE-B4C6-C98DA3205C09}" type="datetimeFigureOut">
               <a:rPr lang="en-US" smtClean="0"/>
               <a:pPr/>
-              <a:t>6/17/2025</a:t>
+              <a:t>7/5/2025</a:t>
             </a:fld>
             <a:endParaRPr lang="en-US"/>
           </a:p>
@@ -2710,7 +2709,7 @@
             <a:fld id="{1D8BD707-D9CF-40AE-B4C6-C98DA3205C09}" type="datetimeFigureOut">
               <a:rPr lang="en-US" smtClean="0"/>
               <a:pPr/>
-              <a:t>6/17/2025</a:t>
+              <a:t>7/5/2025</a:t>
             </a:fld>
             <a:endParaRPr lang="en-US"/>
           </a:p>
@@ -3638,6 +3637,18 @@
   <p:clrMapOvr>
     <a:masterClrMapping/>
   </p:clrMapOvr>
+  <mc:AlternateContent xmlns:mc="http://schemas.openxmlformats.org/markup-compatibility/2006">
+    <mc:Choice xmlns:p14="http://schemas.microsoft.com/office/powerpoint/2010/main" Requires="p14">
+      <p:transition spd="med" p14:dur="700">
+        <p:fade/>
+      </p:transition>
+    </mc:Choice>
+    <mc:Fallback>
+      <p:transition spd="med">
+        <p:fade/>
+      </p:transition>
+    </mc:Fallback>
+  </mc:AlternateContent>
 </p:sld>
 </file>
 
@@ -4339,1330 +4350,22 @@
   <p:clrMapOvr>
     <a:masterClrMapping/>
   </p:clrMapOvr>
+  <mc:AlternateContent xmlns:mc="http://schemas.openxmlformats.org/markup-compatibility/2006">
+    <mc:Choice xmlns:p14="http://schemas.microsoft.com/office/powerpoint/2010/main" Requires="p14">
+      <p:transition spd="med" p14:dur="700">
+        <p:fade/>
+      </p:transition>
+    </mc:Choice>
+    <mc:Fallback>
+      <p:transition spd="med">
+        <p:fade/>
+      </p:transition>
+    </mc:Fallback>
+  </mc:AlternateContent>
 </p:sld>
 </file>
 
 <file path=ppt/slides/slide11.xml><?xml version="1.0" encoding="utf-8"?>
-<p:sld xmlns:a="http://schemas.openxmlformats.org/drawingml/2006/main" xmlns:r="http://schemas.openxmlformats.org/officeDocument/2006/relationships" xmlns:p="http://schemas.openxmlformats.org/presentationml/2006/main">
-  <p:cSld>
-    <p:bg>
-      <p:bgPr>
-        <a:solidFill>
-          <a:srgbClr val="F6FFEC"/>
-        </a:solidFill>
-        <a:effectLst/>
-      </p:bgPr>
-    </p:bg>
-    <p:spTree>
-      <p:nvGrpSpPr>
-        <p:cNvPr id="1" name=""/>
-        <p:cNvGrpSpPr/>
-        <p:nvPr/>
-      </p:nvGrpSpPr>
-      <p:grpSpPr>
-        <a:xfrm>
-          <a:off x="0" y="0"/>
-          <a:ext cx="0" cy="0"/>
-          <a:chOff x="0" y="0"/>
-          <a:chExt cx="0" cy="0"/>
-        </a:xfrm>
-      </p:grpSpPr>
-      <p:grpSp>
-        <p:nvGrpSpPr>
-          <p:cNvPr id="2" name="Group 2"/>
-          <p:cNvGrpSpPr/>
-          <p:nvPr/>
-        </p:nvGrpSpPr>
-        <p:grpSpPr>
-          <a:xfrm>
-            <a:off x="855664" y="2716929"/>
-            <a:ext cx="7337311" cy="3657156"/>
-            <a:chOff x="0" y="0"/>
-            <a:chExt cx="1932460" cy="963202"/>
-          </a:xfrm>
-        </p:grpSpPr>
-        <p:sp>
-          <p:nvSpPr>
-            <p:cNvPr id="3" name="Freeform 3"/>
-            <p:cNvSpPr/>
-            <p:nvPr/>
-          </p:nvSpPr>
-          <p:spPr>
-            <a:xfrm>
-              <a:off x="0" y="0"/>
-              <a:ext cx="1932460" cy="963202"/>
-            </a:xfrm>
-            <a:custGeom>
-              <a:avLst/>
-              <a:gdLst/>
-              <a:ahLst/>
-              <a:cxnLst/>
-              <a:rect l="l" t="t" r="r" b="b"/>
-              <a:pathLst>
-                <a:path w="1932460" h="963202">
-                  <a:moveTo>
-                    <a:pt x="53812" y="0"/>
-                  </a:moveTo>
-                  <a:lnTo>
-                    <a:pt x="1878648" y="0"/>
-                  </a:lnTo>
-                  <a:cubicBezTo>
-                    <a:pt x="1892920" y="0"/>
-                    <a:pt x="1906607" y="5669"/>
-                    <a:pt x="1916699" y="15761"/>
-                  </a:cubicBezTo>
-                  <a:cubicBezTo>
-                    <a:pt x="1926791" y="25853"/>
-                    <a:pt x="1932460" y="39540"/>
-                    <a:pt x="1932460" y="53812"/>
-                  </a:cubicBezTo>
-                  <a:lnTo>
-                    <a:pt x="1932460" y="909389"/>
-                  </a:lnTo>
-                  <a:cubicBezTo>
-                    <a:pt x="1932460" y="939109"/>
-                    <a:pt x="1908368" y="963202"/>
-                    <a:pt x="1878648" y="963202"/>
-                  </a:cubicBezTo>
-                  <a:lnTo>
-                    <a:pt x="53812" y="963202"/>
-                  </a:lnTo>
-                  <a:cubicBezTo>
-                    <a:pt x="24093" y="963202"/>
-                    <a:pt x="0" y="939109"/>
-                    <a:pt x="0" y="909389"/>
-                  </a:cubicBezTo>
-                  <a:lnTo>
-                    <a:pt x="0" y="53812"/>
-                  </a:lnTo>
-                  <a:cubicBezTo>
-                    <a:pt x="0" y="24093"/>
-                    <a:pt x="24093" y="0"/>
-                    <a:pt x="53812" y="0"/>
-                  </a:cubicBezTo>
-                  <a:close/>
-                </a:path>
-              </a:pathLst>
-            </a:custGeom>
-            <a:solidFill>
-              <a:srgbClr val="FF7178"/>
-            </a:solidFill>
-          </p:spPr>
-          <p:txBody>
-            <a:bodyPr/>
-            <a:lstStyle/>
-            <a:p>
-              <a:endParaRPr lang="es-CL"/>
-            </a:p>
-          </p:txBody>
-        </p:sp>
-        <p:sp>
-          <p:nvSpPr>
-            <p:cNvPr id="4" name="TextBox 4"/>
-            <p:cNvSpPr txBox="1"/>
-            <p:nvPr/>
-          </p:nvSpPr>
-          <p:spPr>
-            <a:xfrm>
-              <a:off x="0" y="9525"/>
-              <a:ext cx="1932460" cy="953677"/>
-            </a:xfrm>
-            <a:prstGeom prst="rect">
-              <a:avLst/>
-            </a:prstGeom>
-          </p:spPr>
-          <p:txBody>
-            <a:bodyPr lIns="50800" tIns="50800" rIns="50800" bIns="50800" rtlCol="0" anchor="ctr"/>
-            <a:lstStyle/>
-            <a:p>
-              <a:pPr algn="ctr">
-                <a:lnSpc>
-                  <a:spcPts val="2121"/>
-                </a:lnSpc>
-              </a:pPr>
-              <a:endParaRPr/>
-            </a:p>
-          </p:txBody>
-        </p:sp>
-      </p:grpSp>
-      <p:sp>
-        <p:nvSpPr>
-          <p:cNvPr id="5" name="TextBox 5"/>
-          <p:cNvSpPr txBox="1"/>
-          <p:nvPr/>
-        </p:nvSpPr>
-        <p:spPr>
-          <a:xfrm>
-            <a:off x="3830455" y="418952"/>
-            <a:ext cx="9817265" cy="2045461"/>
-          </a:xfrm>
-          <a:prstGeom prst="rect">
-            <a:avLst/>
-          </a:prstGeom>
-        </p:spPr>
-        <p:txBody>
-          <a:bodyPr lIns="0" tIns="0" rIns="0" bIns="0" rtlCol="0" anchor="t">
-            <a:spAutoFit/>
-          </a:bodyPr>
-          <a:lstStyle/>
-          <a:p>
-            <a:pPr marL="0" lvl="0" indent="0" algn="ctr">
-              <a:lnSpc>
-                <a:spcPts val="7986"/>
-              </a:lnSpc>
-            </a:pPr>
-            <a:r>
-              <a:rPr lang="en-US" sz="7327" b="1" spc="688">
-                <a:solidFill>
-                  <a:srgbClr val="152540"/>
-                </a:solidFill>
-                <a:latin typeface="Glacial Indifference Bold"/>
-                <a:ea typeface="Glacial Indifference Bold"/>
-                <a:cs typeface="Glacial Indifference Bold"/>
-                <a:sym typeface="Glacial Indifference Bold"/>
-              </a:rPr>
-              <a:t>RESULTADOS OBTENIDOS</a:t>
-            </a:r>
-          </a:p>
-        </p:txBody>
-      </p:sp>
-      <p:sp>
-        <p:nvSpPr>
-          <p:cNvPr id="6" name="Freeform 6"/>
-          <p:cNvSpPr/>
-          <p:nvPr/>
-        </p:nvSpPr>
-        <p:spPr>
-          <a:xfrm>
-            <a:off x="-290950" y="-2033784"/>
-            <a:ext cx="5544196" cy="5181303"/>
-          </a:xfrm>
-          <a:custGeom>
-            <a:avLst/>
-            <a:gdLst/>
-            <a:ahLst/>
-            <a:cxnLst/>
-            <a:rect l="l" t="t" r="r" b="b"/>
-            <a:pathLst>
-              <a:path w="5544196" h="5181303">
-                <a:moveTo>
-                  <a:pt x="0" y="0"/>
-                </a:moveTo>
-                <a:lnTo>
-                  <a:pt x="5544196" y="0"/>
-                </a:lnTo>
-                <a:lnTo>
-                  <a:pt x="5544196" y="5181303"/>
-                </a:lnTo>
-                <a:lnTo>
-                  <a:pt x="0" y="5181303"/>
-                </a:lnTo>
-                <a:lnTo>
-                  <a:pt x="0" y="0"/>
-                </a:lnTo>
-                <a:close/>
-              </a:path>
-            </a:pathLst>
-          </a:custGeom>
-          <a:blipFill>
-            <a:blip r:embed="rId2">
-              <a:extLst>
-                <a:ext uri="{96DAC541-7B7A-43D3-8B79-37D633B846F1}">
-                  <asvg:svgBlip xmlns:asvg="http://schemas.microsoft.com/office/drawing/2016/SVG/main" r:embed="rId3"/>
-                </a:ext>
-              </a:extLst>
-            </a:blip>
-            <a:stretch>
-              <a:fillRect/>
-            </a:stretch>
-          </a:blipFill>
-          <a:ln cap="sq">
-            <a:noFill/>
-            <a:prstDash val="solid"/>
-            <a:miter/>
-          </a:ln>
-        </p:spPr>
-        <p:txBody>
-          <a:bodyPr/>
-          <a:lstStyle/>
-          <a:p>
-            <a:endParaRPr lang="es-CL"/>
-          </a:p>
-        </p:txBody>
-      </p:sp>
-      <p:sp>
-        <p:nvSpPr>
-          <p:cNvPr id="7" name="Freeform 7"/>
-          <p:cNvSpPr/>
-          <p:nvPr/>
-        </p:nvSpPr>
-        <p:spPr>
-          <a:xfrm rot="-9354559">
-            <a:off x="12207201" y="5475509"/>
-            <a:ext cx="8367389" cy="7819705"/>
-          </a:xfrm>
-          <a:custGeom>
-            <a:avLst/>
-            <a:gdLst/>
-            <a:ahLst/>
-            <a:cxnLst/>
-            <a:rect l="l" t="t" r="r" b="b"/>
-            <a:pathLst>
-              <a:path w="8367389" h="7819705">
-                <a:moveTo>
-                  <a:pt x="0" y="0"/>
-                </a:moveTo>
-                <a:lnTo>
-                  <a:pt x="8367389" y="0"/>
-                </a:lnTo>
-                <a:lnTo>
-                  <a:pt x="8367389" y="7819705"/>
-                </a:lnTo>
-                <a:lnTo>
-                  <a:pt x="0" y="7819705"/>
-                </a:lnTo>
-                <a:lnTo>
-                  <a:pt x="0" y="0"/>
-                </a:lnTo>
-                <a:close/>
-              </a:path>
-            </a:pathLst>
-          </a:custGeom>
-          <a:blipFill>
-            <a:blip r:embed="rId2">
-              <a:extLst>
-                <a:ext uri="{96DAC541-7B7A-43D3-8B79-37D633B846F1}">
-                  <asvg:svgBlip xmlns:asvg="http://schemas.microsoft.com/office/drawing/2016/SVG/main" r:embed="rId3"/>
-                </a:ext>
-              </a:extLst>
-            </a:blip>
-            <a:stretch>
-              <a:fillRect/>
-            </a:stretch>
-          </a:blipFill>
-          <a:ln cap="sq">
-            <a:noFill/>
-            <a:prstDash val="solid"/>
-            <a:miter/>
-          </a:ln>
-        </p:spPr>
-        <p:txBody>
-          <a:bodyPr/>
-          <a:lstStyle/>
-          <a:p>
-            <a:endParaRPr lang="es-CL"/>
-          </a:p>
-        </p:txBody>
-      </p:sp>
-      <p:sp>
-        <p:nvSpPr>
-          <p:cNvPr id="8" name="Freeform 8"/>
-          <p:cNvSpPr/>
-          <p:nvPr/>
-        </p:nvSpPr>
-        <p:spPr>
-          <a:xfrm rot="5400000">
-            <a:off x="13112837" y="-1659911"/>
-            <a:ext cx="6556116" cy="6126988"/>
-          </a:xfrm>
-          <a:custGeom>
-            <a:avLst/>
-            <a:gdLst/>
-            <a:ahLst/>
-            <a:cxnLst/>
-            <a:rect l="l" t="t" r="r" b="b"/>
-            <a:pathLst>
-              <a:path w="6556116" h="6126988">
-                <a:moveTo>
-                  <a:pt x="0" y="0"/>
-                </a:moveTo>
-                <a:lnTo>
-                  <a:pt x="6556116" y="0"/>
-                </a:lnTo>
-                <a:lnTo>
-                  <a:pt x="6556116" y="6126988"/>
-                </a:lnTo>
-                <a:lnTo>
-                  <a:pt x="0" y="6126988"/>
-                </a:lnTo>
-                <a:lnTo>
-                  <a:pt x="0" y="0"/>
-                </a:lnTo>
-                <a:close/>
-              </a:path>
-            </a:pathLst>
-          </a:custGeom>
-          <a:blipFill>
-            <a:blip r:embed="rId4">
-              <a:extLst>
-                <a:ext uri="{96DAC541-7B7A-43D3-8B79-37D633B846F1}">
-                  <asvg:svgBlip xmlns:asvg="http://schemas.microsoft.com/office/drawing/2016/SVG/main" r:embed="rId5"/>
-                </a:ext>
-              </a:extLst>
-            </a:blip>
-            <a:stretch>
-              <a:fillRect/>
-            </a:stretch>
-          </a:blipFill>
-          <a:ln cap="sq">
-            <a:noFill/>
-            <a:prstDash val="solid"/>
-            <a:miter/>
-          </a:ln>
-        </p:spPr>
-        <p:txBody>
-          <a:bodyPr/>
-          <a:lstStyle/>
-          <a:p>
-            <a:endParaRPr lang="es-CL"/>
-          </a:p>
-        </p:txBody>
-      </p:sp>
-      <p:sp>
-        <p:nvSpPr>
-          <p:cNvPr id="9" name="Freeform 9"/>
-          <p:cNvSpPr/>
-          <p:nvPr/>
-        </p:nvSpPr>
-        <p:spPr>
-          <a:xfrm rot="-5521968">
-            <a:off x="-1614569" y="6194806"/>
-            <a:ext cx="6556116" cy="6126988"/>
-          </a:xfrm>
-          <a:custGeom>
-            <a:avLst/>
-            <a:gdLst/>
-            <a:ahLst/>
-            <a:cxnLst/>
-            <a:rect l="l" t="t" r="r" b="b"/>
-            <a:pathLst>
-              <a:path w="6556116" h="6126988">
-                <a:moveTo>
-                  <a:pt x="0" y="0"/>
-                </a:moveTo>
-                <a:lnTo>
-                  <a:pt x="6556116" y="0"/>
-                </a:lnTo>
-                <a:lnTo>
-                  <a:pt x="6556116" y="6126988"/>
-                </a:lnTo>
-                <a:lnTo>
-                  <a:pt x="0" y="6126988"/>
-                </a:lnTo>
-                <a:lnTo>
-                  <a:pt x="0" y="0"/>
-                </a:lnTo>
-                <a:close/>
-              </a:path>
-            </a:pathLst>
-          </a:custGeom>
-          <a:blipFill>
-            <a:blip r:embed="rId4">
-              <a:extLst>
-                <a:ext uri="{96DAC541-7B7A-43D3-8B79-37D633B846F1}">
-                  <asvg:svgBlip xmlns:asvg="http://schemas.microsoft.com/office/drawing/2016/SVG/main" r:embed="rId5"/>
-                </a:ext>
-              </a:extLst>
-            </a:blip>
-            <a:stretch>
-              <a:fillRect/>
-            </a:stretch>
-          </a:blipFill>
-          <a:ln cap="sq">
-            <a:noFill/>
-            <a:prstDash val="solid"/>
-            <a:miter/>
-          </a:ln>
-        </p:spPr>
-        <p:txBody>
-          <a:bodyPr/>
-          <a:lstStyle/>
-          <a:p>
-            <a:endParaRPr lang="es-CL"/>
-          </a:p>
-        </p:txBody>
-      </p:sp>
-      <p:sp>
-        <p:nvSpPr>
-          <p:cNvPr id="10" name="Freeform 10"/>
-          <p:cNvSpPr/>
-          <p:nvPr/>
-        </p:nvSpPr>
-        <p:spPr>
-          <a:xfrm>
-            <a:off x="0" y="48586"/>
-            <a:ext cx="3279385" cy="806182"/>
-          </a:xfrm>
-          <a:custGeom>
-            <a:avLst/>
-            <a:gdLst/>
-            <a:ahLst/>
-            <a:cxnLst/>
-            <a:rect l="l" t="t" r="r" b="b"/>
-            <a:pathLst>
-              <a:path w="3279385" h="806182">
-                <a:moveTo>
-                  <a:pt x="0" y="0"/>
-                </a:moveTo>
-                <a:lnTo>
-                  <a:pt x="3279385" y="0"/>
-                </a:lnTo>
-                <a:lnTo>
-                  <a:pt x="3279385" y="806182"/>
-                </a:lnTo>
-                <a:lnTo>
-                  <a:pt x="0" y="806182"/>
-                </a:lnTo>
-                <a:lnTo>
-                  <a:pt x="0" y="0"/>
-                </a:lnTo>
-                <a:close/>
-              </a:path>
-            </a:pathLst>
-          </a:custGeom>
-          <a:blipFill>
-            <a:blip r:embed="rId6"/>
-            <a:stretch>
-              <a:fillRect/>
-            </a:stretch>
-          </a:blipFill>
-        </p:spPr>
-        <p:txBody>
-          <a:bodyPr/>
-          <a:lstStyle/>
-          <a:p>
-            <a:endParaRPr lang="es-CL"/>
-          </a:p>
-        </p:txBody>
-      </p:sp>
-      <p:sp>
-        <p:nvSpPr>
-          <p:cNvPr id="11" name="Freeform 11"/>
-          <p:cNvSpPr/>
-          <p:nvPr/>
-        </p:nvSpPr>
-        <p:spPr>
-          <a:xfrm>
-            <a:off x="1028700" y="2883708"/>
-            <a:ext cx="6991781" cy="3321096"/>
-          </a:xfrm>
-          <a:custGeom>
-            <a:avLst/>
-            <a:gdLst/>
-            <a:ahLst/>
-            <a:cxnLst/>
-            <a:rect l="l" t="t" r="r" b="b"/>
-            <a:pathLst>
-              <a:path w="6991781" h="3321096">
-                <a:moveTo>
-                  <a:pt x="0" y="0"/>
-                </a:moveTo>
-                <a:lnTo>
-                  <a:pt x="6991781" y="0"/>
-                </a:lnTo>
-                <a:lnTo>
-                  <a:pt x="6991781" y="3321096"/>
-                </a:lnTo>
-                <a:lnTo>
-                  <a:pt x="0" y="3321096"/>
-                </a:lnTo>
-                <a:lnTo>
-                  <a:pt x="0" y="0"/>
-                </a:lnTo>
-                <a:close/>
-              </a:path>
-            </a:pathLst>
-          </a:custGeom>
-          <a:blipFill>
-            <a:blip r:embed="rId7"/>
-            <a:stretch>
-              <a:fillRect/>
-            </a:stretch>
-          </a:blipFill>
-        </p:spPr>
-        <p:txBody>
-          <a:bodyPr/>
-          <a:lstStyle/>
-          <a:p>
-            <a:endParaRPr lang="es-CL"/>
-          </a:p>
-        </p:txBody>
-      </p:sp>
-      <p:grpSp>
-        <p:nvGrpSpPr>
-          <p:cNvPr id="12" name="Group 12"/>
-          <p:cNvGrpSpPr/>
-          <p:nvPr/>
-        </p:nvGrpSpPr>
-        <p:grpSpPr>
-          <a:xfrm>
-            <a:off x="9397956" y="2867008"/>
-            <a:ext cx="7337311" cy="6675593"/>
-            <a:chOff x="0" y="0"/>
-            <a:chExt cx="1932460" cy="1758181"/>
-          </a:xfrm>
-        </p:grpSpPr>
-        <p:sp>
-          <p:nvSpPr>
-            <p:cNvPr id="13" name="Freeform 13"/>
-            <p:cNvSpPr/>
-            <p:nvPr/>
-          </p:nvSpPr>
-          <p:spPr>
-            <a:xfrm>
-              <a:off x="0" y="0"/>
-              <a:ext cx="1932460" cy="1758181"/>
-            </a:xfrm>
-            <a:custGeom>
-              <a:avLst/>
-              <a:gdLst/>
-              <a:ahLst/>
-              <a:cxnLst/>
-              <a:rect l="l" t="t" r="r" b="b"/>
-              <a:pathLst>
-                <a:path w="1932460" h="1758181">
-                  <a:moveTo>
-                    <a:pt x="53812" y="0"/>
-                  </a:moveTo>
-                  <a:lnTo>
-                    <a:pt x="1878648" y="0"/>
-                  </a:lnTo>
-                  <a:cubicBezTo>
-                    <a:pt x="1892920" y="0"/>
-                    <a:pt x="1906607" y="5669"/>
-                    <a:pt x="1916699" y="15761"/>
-                  </a:cubicBezTo>
-                  <a:cubicBezTo>
-                    <a:pt x="1926791" y="25853"/>
-                    <a:pt x="1932460" y="39540"/>
-                    <a:pt x="1932460" y="53812"/>
-                  </a:cubicBezTo>
-                  <a:lnTo>
-                    <a:pt x="1932460" y="1704368"/>
-                  </a:lnTo>
-                  <a:cubicBezTo>
-                    <a:pt x="1932460" y="1734088"/>
-                    <a:pt x="1908368" y="1758181"/>
-                    <a:pt x="1878648" y="1758181"/>
-                  </a:cubicBezTo>
-                  <a:lnTo>
-                    <a:pt x="53812" y="1758181"/>
-                  </a:lnTo>
-                  <a:cubicBezTo>
-                    <a:pt x="24093" y="1758181"/>
-                    <a:pt x="0" y="1734088"/>
-                    <a:pt x="0" y="1704368"/>
-                  </a:cubicBezTo>
-                  <a:lnTo>
-                    <a:pt x="0" y="53812"/>
-                  </a:lnTo>
-                  <a:cubicBezTo>
-                    <a:pt x="0" y="24093"/>
-                    <a:pt x="24093" y="0"/>
-                    <a:pt x="53812" y="0"/>
-                  </a:cubicBezTo>
-                  <a:close/>
-                </a:path>
-              </a:pathLst>
-            </a:custGeom>
-            <a:solidFill>
-              <a:srgbClr val="FF7178"/>
-            </a:solidFill>
-          </p:spPr>
-          <p:txBody>
-            <a:bodyPr/>
-            <a:lstStyle/>
-            <a:p>
-              <a:endParaRPr lang="es-CL"/>
-            </a:p>
-          </p:txBody>
-        </p:sp>
-        <p:sp>
-          <p:nvSpPr>
-            <p:cNvPr id="14" name="TextBox 14"/>
-            <p:cNvSpPr txBox="1"/>
-            <p:nvPr/>
-          </p:nvSpPr>
-          <p:spPr>
-            <a:xfrm>
-              <a:off x="0" y="9525"/>
-              <a:ext cx="1932460" cy="1748656"/>
-            </a:xfrm>
-            <a:prstGeom prst="rect">
-              <a:avLst/>
-            </a:prstGeom>
-          </p:spPr>
-          <p:txBody>
-            <a:bodyPr lIns="50800" tIns="50800" rIns="50800" bIns="50800" rtlCol="0" anchor="ctr"/>
-            <a:lstStyle/>
-            <a:p>
-              <a:pPr algn="ctr">
-                <a:lnSpc>
-                  <a:spcPts val="2121"/>
-                </a:lnSpc>
-              </a:pPr>
-              <a:endParaRPr/>
-            </a:p>
-          </p:txBody>
-        </p:sp>
-      </p:grpSp>
-      <p:sp>
-        <p:nvSpPr>
-          <p:cNvPr id="15" name="Freeform 15"/>
-          <p:cNvSpPr/>
-          <p:nvPr/>
-        </p:nvSpPr>
-        <p:spPr>
-          <a:xfrm>
-            <a:off x="9585722" y="3115052"/>
-            <a:ext cx="6961777" cy="6126548"/>
-          </a:xfrm>
-          <a:custGeom>
-            <a:avLst/>
-            <a:gdLst/>
-            <a:ahLst/>
-            <a:cxnLst/>
-            <a:rect l="l" t="t" r="r" b="b"/>
-            <a:pathLst>
-              <a:path w="6961777" h="6126548">
-                <a:moveTo>
-                  <a:pt x="0" y="0"/>
-                </a:moveTo>
-                <a:lnTo>
-                  <a:pt x="6961778" y="0"/>
-                </a:lnTo>
-                <a:lnTo>
-                  <a:pt x="6961778" y="6126548"/>
-                </a:lnTo>
-                <a:lnTo>
-                  <a:pt x="0" y="6126548"/>
-                </a:lnTo>
-                <a:lnTo>
-                  <a:pt x="0" y="0"/>
-                </a:lnTo>
-                <a:close/>
-              </a:path>
-            </a:pathLst>
-          </a:custGeom>
-          <a:blipFill>
-            <a:blip r:embed="rId8"/>
-            <a:stretch>
-              <a:fillRect r="-430"/>
-            </a:stretch>
-          </a:blipFill>
-        </p:spPr>
-        <p:txBody>
-          <a:bodyPr/>
-          <a:lstStyle/>
-          <a:p>
-            <a:endParaRPr lang="es-CL"/>
-          </a:p>
-        </p:txBody>
-      </p:sp>
-      <p:grpSp>
-        <p:nvGrpSpPr>
-          <p:cNvPr id="16" name="Group 16"/>
-          <p:cNvGrpSpPr/>
-          <p:nvPr/>
-        </p:nvGrpSpPr>
-        <p:grpSpPr>
-          <a:xfrm>
-            <a:off x="855664" y="6374085"/>
-            <a:ext cx="7337311" cy="3657156"/>
-            <a:chOff x="0" y="0"/>
-            <a:chExt cx="1932460" cy="963202"/>
-          </a:xfrm>
-        </p:grpSpPr>
-        <p:sp>
-          <p:nvSpPr>
-            <p:cNvPr id="17" name="Freeform 17"/>
-            <p:cNvSpPr/>
-            <p:nvPr/>
-          </p:nvSpPr>
-          <p:spPr>
-            <a:xfrm>
-              <a:off x="0" y="0"/>
-              <a:ext cx="1932460" cy="963202"/>
-            </a:xfrm>
-            <a:custGeom>
-              <a:avLst/>
-              <a:gdLst/>
-              <a:ahLst/>
-              <a:cxnLst/>
-              <a:rect l="l" t="t" r="r" b="b"/>
-              <a:pathLst>
-                <a:path w="1932460" h="963202">
-                  <a:moveTo>
-                    <a:pt x="53812" y="0"/>
-                  </a:moveTo>
-                  <a:lnTo>
-                    <a:pt x="1878648" y="0"/>
-                  </a:lnTo>
-                  <a:cubicBezTo>
-                    <a:pt x="1892920" y="0"/>
-                    <a:pt x="1906607" y="5669"/>
-                    <a:pt x="1916699" y="15761"/>
-                  </a:cubicBezTo>
-                  <a:cubicBezTo>
-                    <a:pt x="1926791" y="25853"/>
-                    <a:pt x="1932460" y="39540"/>
-                    <a:pt x="1932460" y="53812"/>
-                  </a:cubicBezTo>
-                  <a:lnTo>
-                    <a:pt x="1932460" y="909389"/>
-                  </a:lnTo>
-                  <a:cubicBezTo>
-                    <a:pt x="1932460" y="939109"/>
-                    <a:pt x="1908368" y="963202"/>
-                    <a:pt x="1878648" y="963202"/>
-                  </a:cubicBezTo>
-                  <a:lnTo>
-                    <a:pt x="53812" y="963202"/>
-                  </a:lnTo>
-                  <a:cubicBezTo>
-                    <a:pt x="24093" y="963202"/>
-                    <a:pt x="0" y="939109"/>
-                    <a:pt x="0" y="909389"/>
-                  </a:cubicBezTo>
-                  <a:lnTo>
-                    <a:pt x="0" y="53812"/>
-                  </a:lnTo>
-                  <a:cubicBezTo>
-                    <a:pt x="0" y="24093"/>
-                    <a:pt x="24093" y="0"/>
-                    <a:pt x="53812" y="0"/>
-                  </a:cubicBezTo>
-                  <a:close/>
-                </a:path>
-              </a:pathLst>
-            </a:custGeom>
-            <a:solidFill>
-              <a:srgbClr val="FF7178"/>
-            </a:solidFill>
-          </p:spPr>
-          <p:txBody>
-            <a:bodyPr/>
-            <a:lstStyle/>
-            <a:p>
-              <a:endParaRPr lang="es-CL"/>
-            </a:p>
-          </p:txBody>
-        </p:sp>
-        <p:sp>
-          <p:nvSpPr>
-            <p:cNvPr id="18" name="TextBox 18"/>
-            <p:cNvSpPr txBox="1"/>
-            <p:nvPr/>
-          </p:nvSpPr>
-          <p:spPr>
-            <a:xfrm>
-              <a:off x="0" y="9525"/>
-              <a:ext cx="1932460" cy="953677"/>
-            </a:xfrm>
-            <a:prstGeom prst="rect">
-              <a:avLst/>
-            </a:prstGeom>
-          </p:spPr>
-          <p:txBody>
-            <a:bodyPr lIns="50800" tIns="50800" rIns="50800" bIns="50800" rtlCol="0" anchor="ctr"/>
-            <a:lstStyle/>
-            <a:p>
-              <a:pPr algn="ctr">
-                <a:lnSpc>
-                  <a:spcPts val="2121"/>
-                </a:lnSpc>
-              </a:pPr>
-              <a:endParaRPr/>
-            </a:p>
-          </p:txBody>
-        </p:sp>
-      </p:grpSp>
-      <p:sp>
-        <p:nvSpPr>
-          <p:cNvPr id="19" name="Freeform 19"/>
-          <p:cNvSpPr/>
-          <p:nvPr/>
-        </p:nvSpPr>
-        <p:spPr>
-          <a:xfrm>
-            <a:off x="1028700" y="6540864"/>
-            <a:ext cx="6991781" cy="3321096"/>
-          </a:xfrm>
-          <a:custGeom>
-            <a:avLst/>
-            <a:gdLst/>
-            <a:ahLst/>
-            <a:cxnLst/>
-            <a:rect l="l" t="t" r="r" b="b"/>
-            <a:pathLst>
-              <a:path w="6991781" h="3321096">
-                <a:moveTo>
-                  <a:pt x="0" y="0"/>
-                </a:moveTo>
-                <a:lnTo>
-                  <a:pt x="6991781" y="0"/>
-                </a:lnTo>
-                <a:lnTo>
-                  <a:pt x="6991781" y="3321096"/>
-                </a:lnTo>
-                <a:lnTo>
-                  <a:pt x="0" y="3321096"/>
-                </a:lnTo>
-                <a:lnTo>
-                  <a:pt x="0" y="0"/>
-                </a:lnTo>
-                <a:close/>
-              </a:path>
-            </a:pathLst>
-          </a:custGeom>
-          <a:blipFill>
-            <a:blip r:embed="rId9"/>
-            <a:stretch>
-              <a:fillRect t="-131" b="-131"/>
-            </a:stretch>
-          </a:blipFill>
-        </p:spPr>
-        <p:txBody>
-          <a:bodyPr/>
-          <a:lstStyle/>
-          <a:p>
-            <a:endParaRPr lang="es-CL"/>
-          </a:p>
-        </p:txBody>
-      </p:sp>
-    </p:spTree>
-  </p:cSld>
-  <p:clrMapOvr>
-    <a:masterClrMapping/>
-  </p:clrMapOvr>
-</p:sld>
-</file>
-
-<file path=ppt/slides/slide12.xml><?xml version="1.0" encoding="utf-8"?>
-<p:sld xmlns:a="http://schemas.openxmlformats.org/drawingml/2006/main" xmlns:r="http://schemas.openxmlformats.org/officeDocument/2006/relationships" xmlns:p="http://schemas.openxmlformats.org/presentationml/2006/main">
-  <p:cSld>
-    <p:bg>
-      <p:bgPr>
-        <a:solidFill>
-          <a:srgbClr val="293239"/>
-        </a:solidFill>
-        <a:effectLst/>
-      </p:bgPr>
-    </p:bg>
-    <p:spTree>
-      <p:nvGrpSpPr>
-        <p:cNvPr id="1" name=""/>
-        <p:cNvGrpSpPr/>
-        <p:nvPr/>
-      </p:nvGrpSpPr>
-      <p:grpSpPr>
-        <a:xfrm>
-          <a:off x="0" y="0"/>
-          <a:ext cx="0" cy="0"/>
-          <a:chOff x="0" y="0"/>
-          <a:chExt cx="0" cy="0"/>
-        </a:xfrm>
-      </p:grpSpPr>
-      <p:sp>
-        <p:nvSpPr>
-          <p:cNvPr id="2" name="Freeform 2"/>
-          <p:cNvSpPr/>
-          <p:nvPr/>
-        </p:nvSpPr>
-        <p:spPr>
-          <a:xfrm>
-            <a:off x="-290950" y="-2033784"/>
-            <a:ext cx="8535602" cy="7976908"/>
-          </a:xfrm>
-          <a:custGeom>
-            <a:avLst/>
-            <a:gdLst/>
-            <a:ahLst/>
-            <a:cxnLst/>
-            <a:rect l="l" t="t" r="r" b="b"/>
-            <a:pathLst>
-              <a:path w="8535602" h="7976908">
-                <a:moveTo>
-                  <a:pt x="0" y="0"/>
-                </a:moveTo>
-                <a:lnTo>
-                  <a:pt x="8535602" y="0"/>
-                </a:lnTo>
-                <a:lnTo>
-                  <a:pt x="8535602" y="7976908"/>
-                </a:lnTo>
-                <a:lnTo>
-                  <a:pt x="0" y="7976908"/>
-                </a:lnTo>
-                <a:lnTo>
-                  <a:pt x="0" y="0"/>
-                </a:lnTo>
-                <a:close/>
-              </a:path>
-            </a:pathLst>
-          </a:custGeom>
-          <a:blipFill>
-            <a:blip r:embed="rId2">
-              <a:extLst>
-                <a:ext uri="{96DAC541-7B7A-43D3-8B79-37D633B846F1}">
-                  <asvg:svgBlip xmlns:asvg="http://schemas.microsoft.com/office/drawing/2016/SVG/main" r:embed="rId3"/>
-                </a:ext>
-              </a:extLst>
-            </a:blip>
-            <a:stretch>
-              <a:fillRect/>
-            </a:stretch>
-          </a:blipFill>
-          <a:ln cap="sq">
-            <a:noFill/>
-            <a:prstDash val="solid"/>
-            <a:miter/>
-          </a:ln>
-        </p:spPr>
-        <p:txBody>
-          <a:bodyPr/>
-          <a:lstStyle/>
-          <a:p>
-            <a:endParaRPr lang="es-CL"/>
-          </a:p>
-        </p:txBody>
-      </p:sp>
-      <p:sp>
-        <p:nvSpPr>
-          <p:cNvPr id="3" name="Freeform 3"/>
-          <p:cNvSpPr/>
-          <p:nvPr/>
-        </p:nvSpPr>
-        <p:spPr>
-          <a:xfrm rot="-10151301">
-            <a:off x="11164674" y="6546853"/>
-            <a:ext cx="8535602" cy="7976908"/>
-          </a:xfrm>
-          <a:custGeom>
-            <a:avLst/>
-            <a:gdLst/>
-            <a:ahLst/>
-            <a:cxnLst/>
-            <a:rect l="l" t="t" r="r" b="b"/>
-            <a:pathLst>
-              <a:path w="8535602" h="7976908">
-                <a:moveTo>
-                  <a:pt x="0" y="0"/>
-                </a:moveTo>
-                <a:lnTo>
-                  <a:pt x="8535602" y="0"/>
-                </a:lnTo>
-                <a:lnTo>
-                  <a:pt x="8535602" y="7976908"/>
-                </a:lnTo>
-                <a:lnTo>
-                  <a:pt x="0" y="7976908"/>
-                </a:lnTo>
-                <a:lnTo>
-                  <a:pt x="0" y="0"/>
-                </a:lnTo>
-                <a:close/>
-              </a:path>
-            </a:pathLst>
-          </a:custGeom>
-          <a:blipFill>
-            <a:blip r:embed="rId2">
-              <a:extLst>
-                <a:ext uri="{96DAC541-7B7A-43D3-8B79-37D633B846F1}">
-                  <asvg:svgBlip xmlns:asvg="http://schemas.microsoft.com/office/drawing/2016/SVG/main" r:embed="rId3"/>
-                </a:ext>
-              </a:extLst>
-            </a:blip>
-            <a:stretch>
-              <a:fillRect/>
-            </a:stretch>
-          </a:blipFill>
-          <a:ln cap="sq">
-            <a:noFill/>
-            <a:prstDash val="solid"/>
-            <a:miter/>
-          </a:ln>
-        </p:spPr>
-        <p:txBody>
-          <a:bodyPr/>
-          <a:lstStyle/>
-          <a:p>
-            <a:endParaRPr lang="es-CL"/>
-          </a:p>
-        </p:txBody>
-      </p:sp>
-      <p:sp>
-        <p:nvSpPr>
-          <p:cNvPr id="4" name="TextBox 4"/>
-          <p:cNvSpPr txBox="1"/>
-          <p:nvPr/>
-        </p:nvSpPr>
-        <p:spPr>
-          <a:xfrm>
-            <a:off x="2888174" y="4327609"/>
-            <a:ext cx="12635250" cy="1211565"/>
-          </a:xfrm>
-          <a:prstGeom prst="rect">
-            <a:avLst/>
-          </a:prstGeom>
-        </p:spPr>
-        <p:txBody>
-          <a:bodyPr lIns="0" tIns="0" rIns="0" bIns="0" rtlCol="0" anchor="t">
-            <a:spAutoFit/>
-          </a:bodyPr>
-          <a:lstStyle/>
-          <a:p>
-            <a:pPr algn="r">
-              <a:lnSpc>
-                <a:spcPts val="9841"/>
-              </a:lnSpc>
-            </a:pPr>
-            <a:r>
-              <a:rPr lang="en-US" sz="7029" spc="660">
-                <a:solidFill>
-                  <a:srgbClr val="EDE8E4"/>
-                </a:solidFill>
-                <a:latin typeface="Glacial Indifference"/>
-                <a:ea typeface="Glacial Indifference"/>
-                <a:cs typeface="Glacial Indifference"/>
-                <a:sym typeface="Glacial Indifference"/>
-              </a:rPr>
-              <a:t>OBSTACULOS PRESENTES</a:t>
-            </a:r>
-          </a:p>
-        </p:txBody>
-      </p:sp>
-      <p:sp>
-        <p:nvSpPr>
-          <p:cNvPr id="5" name="Freeform 5"/>
-          <p:cNvSpPr/>
-          <p:nvPr/>
-        </p:nvSpPr>
-        <p:spPr>
-          <a:xfrm>
-            <a:off x="-1446812" y="7841762"/>
-            <a:ext cx="5482705" cy="4884592"/>
-          </a:xfrm>
-          <a:custGeom>
-            <a:avLst/>
-            <a:gdLst/>
-            <a:ahLst/>
-            <a:cxnLst/>
-            <a:rect l="l" t="t" r="r" b="b"/>
-            <a:pathLst>
-              <a:path w="5482705" h="4884592">
-                <a:moveTo>
-                  <a:pt x="0" y="0"/>
-                </a:moveTo>
-                <a:lnTo>
-                  <a:pt x="5482705" y="0"/>
-                </a:lnTo>
-                <a:lnTo>
-                  <a:pt x="5482705" y="4884591"/>
-                </a:lnTo>
-                <a:lnTo>
-                  <a:pt x="0" y="4884591"/>
-                </a:lnTo>
-                <a:lnTo>
-                  <a:pt x="0" y="0"/>
-                </a:lnTo>
-                <a:close/>
-              </a:path>
-            </a:pathLst>
-          </a:custGeom>
-          <a:blipFill>
-            <a:blip r:embed="rId4">
-              <a:extLst>
-                <a:ext uri="{96DAC541-7B7A-43D3-8B79-37D633B846F1}">
-                  <asvg:svgBlip xmlns:asvg="http://schemas.microsoft.com/office/drawing/2016/SVG/main" r:embed="rId5"/>
-                </a:ext>
-              </a:extLst>
-            </a:blip>
-            <a:stretch>
-              <a:fillRect/>
-            </a:stretch>
-          </a:blipFill>
-          <a:ln cap="sq">
-            <a:noFill/>
-            <a:prstDash val="solid"/>
-            <a:miter/>
-          </a:ln>
-        </p:spPr>
-        <p:txBody>
-          <a:bodyPr/>
-          <a:lstStyle/>
-          <a:p>
-            <a:endParaRPr lang="es-CL"/>
-          </a:p>
-        </p:txBody>
-      </p:sp>
-      <p:sp>
-        <p:nvSpPr>
-          <p:cNvPr id="6" name="Freeform 6"/>
-          <p:cNvSpPr/>
-          <p:nvPr/>
-        </p:nvSpPr>
-        <p:spPr>
-          <a:xfrm rot="10452176">
-            <a:off x="15012576" y="-2759682"/>
-            <a:ext cx="5482705" cy="4884592"/>
-          </a:xfrm>
-          <a:custGeom>
-            <a:avLst/>
-            <a:gdLst/>
-            <a:ahLst/>
-            <a:cxnLst/>
-            <a:rect l="l" t="t" r="r" b="b"/>
-            <a:pathLst>
-              <a:path w="5482705" h="4884592">
-                <a:moveTo>
-                  <a:pt x="0" y="0"/>
-                </a:moveTo>
-                <a:lnTo>
-                  <a:pt x="5482705" y="0"/>
-                </a:lnTo>
-                <a:lnTo>
-                  <a:pt x="5482705" y="4884591"/>
-                </a:lnTo>
-                <a:lnTo>
-                  <a:pt x="0" y="4884591"/>
-                </a:lnTo>
-                <a:lnTo>
-                  <a:pt x="0" y="0"/>
-                </a:lnTo>
-                <a:close/>
-              </a:path>
-            </a:pathLst>
-          </a:custGeom>
-          <a:blipFill>
-            <a:blip r:embed="rId4">
-              <a:extLst>
-                <a:ext uri="{96DAC541-7B7A-43D3-8B79-37D633B846F1}">
-                  <asvg:svgBlip xmlns:asvg="http://schemas.microsoft.com/office/drawing/2016/SVG/main" r:embed="rId5"/>
-                </a:ext>
-              </a:extLst>
-            </a:blip>
-            <a:stretch>
-              <a:fillRect/>
-            </a:stretch>
-          </a:blipFill>
-          <a:ln cap="sq">
-            <a:noFill/>
-            <a:prstDash val="solid"/>
-            <a:miter/>
-          </a:ln>
-        </p:spPr>
-        <p:txBody>
-          <a:bodyPr/>
-          <a:lstStyle/>
-          <a:p>
-            <a:endParaRPr lang="es-CL"/>
-          </a:p>
-        </p:txBody>
-      </p:sp>
-      <p:sp>
-        <p:nvSpPr>
-          <p:cNvPr id="7" name="TextBox 7"/>
-          <p:cNvSpPr txBox="1"/>
-          <p:nvPr/>
-        </p:nvSpPr>
-        <p:spPr>
-          <a:xfrm>
-            <a:off x="2709630" y="5402621"/>
-            <a:ext cx="12868741" cy="1226820"/>
-          </a:xfrm>
-          <a:prstGeom prst="rect">
-            <a:avLst/>
-          </a:prstGeom>
-        </p:spPr>
-        <p:txBody>
-          <a:bodyPr lIns="0" tIns="0" rIns="0" bIns="0" rtlCol="0" anchor="t">
-            <a:spAutoFit/>
-          </a:bodyPr>
-          <a:lstStyle/>
-          <a:p>
-            <a:pPr algn="r">
-              <a:lnSpc>
-                <a:spcPts val="10080"/>
-              </a:lnSpc>
-            </a:pPr>
-            <a:r>
-              <a:rPr lang="en-US" sz="7200" b="1" spc="676">
-                <a:solidFill>
-                  <a:srgbClr val="EDE8E4"/>
-                </a:solidFill>
-                <a:latin typeface="Glacial Indifference Bold"/>
-                <a:ea typeface="Glacial Indifference Bold"/>
-                <a:cs typeface="Glacial Indifference Bold"/>
-                <a:sym typeface="Glacial Indifference Bold"/>
-              </a:rPr>
-              <a:t>DURANTE EL DESARROLLO</a:t>
-            </a:r>
-          </a:p>
-        </p:txBody>
-      </p:sp>
-      <p:sp>
-        <p:nvSpPr>
-          <p:cNvPr id="8" name="Freeform 8"/>
-          <p:cNvSpPr/>
-          <p:nvPr/>
-        </p:nvSpPr>
-        <p:spPr>
-          <a:xfrm>
-            <a:off x="0" y="48586"/>
-            <a:ext cx="3279385" cy="806182"/>
-          </a:xfrm>
-          <a:custGeom>
-            <a:avLst/>
-            <a:gdLst/>
-            <a:ahLst/>
-            <a:cxnLst/>
-            <a:rect l="l" t="t" r="r" b="b"/>
-            <a:pathLst>
-              <a:path w="3279385" h="806182">
-                <a:moveTo>
-                  <a:pt x="0" y="0"/>
-                </a:moveTo>
-                <a:lnTo>
-                  <a:pt x="3279385" y="0"/>
-                </a:lnTo>
-                <a:lnTo>
-                  <a:pt x="3279385" y="806182"/>
-                </a:lnTo>
-                <a:lnTo>
-                  <a:pt x="0" y="806182"/>
-                </a:lnTo>
-                <a:lnTo>
-                  <a:pt x="0" y="0"/>
-                </a:lnTo>
-                <a:close/>
-              </a:path>
-            </a:pathLst>
-          </a:custGeom>
-          <a:blipFill>
-            <a:blip r:embed="rId6"/>
-            <a:stretch>
-              <a:fillRect/>
-            </a:stretch>
-          </a:blipFill>
-        </p:spPr>
-        <p:txBody>
-          <a:bodyPr/>
-          <a:lstStyle/>
-          <a:p>
-            <a:endParaRPr lang="es-CL"/>
-          </a:p>
-        </p:txBody>
-      </p:sp>
-    </p:spTree>
-  </p:cSld>
-  <p:clrMapOvr>
-    <a:masterClrMapping/>
-  </p:clrMapOvr>
-</p:sld>
-</file>
-
-<file path=ppt/slides/slide13.xml><?xml version="1.0" encoding="utf-8"?>
 <p:sld xmlns:a="http://schemas.openxmlformats.org/drawingml/2006/main" xmlns:r="http://schemas.openxmlformats.org/officeDocument/2006/relationships" xmlns:p="http://schemas.openxmlformats.org/presentationml/2006/main">
   <p:cSld>
     <p:bg>
@@ -6127,10 +4830,22 @@
   <p:clrMapOvr>
     <a:masterClrMapping/>
   </p:clrMapOvr>
+  <mc:AlternateContent xmlns:mc="http://schemas.openxmlformats.org/markup-compatibility/2006">
+    <mc:Choice xmlns:p14="http://schemas.microsoft.com/office/powerpoint/2010/main" Requires="p14">
+      <p:transition spd="med" p14:dur="700">
+        <p:fade/>
+      </p:transition>
+    </mc:Choice>
+    <mc:Fallback>
+      <p:transition spd="med">
+        <p:fade/>
+      </p:transition>
+    </mc:Fallback>
+  </mc:AlternateContent>
 </p:sld>
 </file>
 
-<file path=ppt/slides/slide14.xml><?xml version="1.0" encoding="utf-8"?>
+<file path=ppt/slides/slide12.xml><?xml version="1.0" encoding="utf-8"?>
 <p:sld xmlns:a="http://schemas.openxmlformats.org/drawingml/2006/main" xmlns:r="http://schemas.openxmlformats.org/officeDocument/2006/relationships" xmlns:p="http://schemas.openxmlformats.org/presentationml/2006/main">
   <p:cSld>
     <p:bg>
@@ -6157,127 +4872,14 @@
       </p:grpSpPr>
       <p:sp>
         <p:nvSpPr>
-          <p:cNvPr id="2" name="TextBox 2"/>
-          <p:cNvSpPr txBox="1"/>
+          <p:cNvPr id="2" name="Freeform 2"/>
+          <p:cNvSpPr/>
           <p:nvPr/>
         </p:nvSpPr>
         <p:spPr>
           <a:xfrm>
-            <a:off x="1954302" y="2932240"/>
-            <a:ext cx="5127156" cy="2547564"/>
-          </a:xfrm>
-          <a:prstGeom prst="rect">
-            <a:avLst/>
-          </a:prstGeom>
-        </p:spPr>
-        <p:txBody>
-          <a:bodyPr lIns="0" tIns="0" rIns="0" bIns="0" rtlCol="0" anchor="t">
-            <a:spAutoFit/>
-          </a:bodyPr>
-          <a:lstStyle/>
-          <a:p>
-            <a:pPr algn="l">
-              <a:lnSpc>
-                <a:spcPts val="10258"/>
-              </a:lnSpc>
-            </a:pPr>
-            <a:r>
-              <a:rPr lang="en-US" sz="7327" b="1" spc="688">
-                <a:solidFill>
-                  <a:srgbClr val="EDE8E4"/>
-                </a:solidFill>
-                <a:latin typeface="Glacial Indifference Bold"/>
-                <a:ea typeface="Glacial Indifference Bold"/>
-                <a:cs typeface="Glacial Indifference Bold"/>
-                <a:sym typeface="Glacial Indifference Bold"/>
-              </a:rPr>
-              <a:t>MUCHAS GRACIAS</a:t>
-            </a:r>
-          </a:p>
-        </p:txBody>
-      </p:sp>
-      <p:sp>
-        <p:nvSpPr>
-          <p:cNvPr id="3" name="AutoShape 3"/>
-          <p:cNvSpPr/>
-          <p:nvPr/>
-        </p:nvSpPr>
-        <p:spPr>
-          <a:xfrm flipV="1">
-            <a:off x="1478627" y="1685723"/>
-            <a:ext cx="0" cy="6915554"/>
-          </a:xfrm>
-          <a:prstGeom prst="line">
-            <a:avLst/>
-          </a:prstGeom>
-          <a:ln w="66675" cap="flat">
-            <a:solidFill>
-              <a:srgbClr val="D2E5E9"/>
-            </a:solidFill>
-            <a:prstDash val="solid"/>
-            <a:headEnd type="none" w="sm" len="sm"/>
-            <a:tailEnd type="none" w="sm" len="sm"/>
-          </a:ln>
-        </p:spPr>
-        <p:txBody>
-          <a:bodyPr/>
-          <a:lstStyle/>
-          <a:p>
-            <a:endParaRPr lang="es-CL"/>
-          </a:p>
-        </p:txBody>
-      </p:sp>
-      <p:sp>
-        <p:nvSpPr>
-          <p:cNvPr id="4" name="TextBox 4"/>
-          <p:cNvSpPr txBox="1"/>
-          <p:nvPr/>
-        </p:nvSpPr>
-        <p:spPr>
-          <a:xfrm>
-            <a:off x="1904222" y="5560340"/>
-            <a:ext cx="9034884" cy="1104265"/>
-          </a:xfrm>
-          <a:prstGeom prst="rect">
-            <a:avLst/>
-          </a:prstGeom>
-        </p:spPr>
-        <p:txBody>
-          <a:bodyPr lIns="0" tIns="0" rIns="0" bIns="0" rtlCol="0" anchor="t">
-            <a:spAutoFit/>
-          </a:bodyPr>
-          <a:lstStyle/>
-          <a:p>
-            <a:pPr algn="l">
-              <a:lnSpc>
-                <a:spcPts val="8959"/>
-              </a:lnSpc>
-            </a:pPr>
-            <a:r>
-              <a:rPr lang="en-US" sz="6399" spc="140">
-                <a:solidFill>
-                  <a:srgbClr val="EDE8E4"/>
-                </a:solidFill>
-                <a:latin typeface="Glacial Indifference"/>
-                <a:ea typeface="Glacial Indifference"/>
-                <a:cs typeface="Glacial Indifference"/>
-                <a:sym typeface="Glacial Indifference"/>
-              </a:rPr>
-              <a:t>¿Preguntas?</a:t>
-            </a:r>
-          </a:p>
-        </p:txBody>
-      </p:sp>
-      <p:sp>
-        <p:nvSpPr>
-          <p:cNvPr id="5" name="Freeform 5"/>
-          <p:cNvSpPr/>
-          <p:nvPr/>
-        </p:nvSpPr>
-        <p:spPr>
-          <a:xfrm rot="5400000">
-            <a:off x="9533486" y="55002"/>
-            <a:ext cx="10116277" cy="9454121"/>
+            <a:off x="-290950" y="-2033784"/>
+            <a:ext cx="8535602" cy="7976908"/>
           </a:xfrm>
           <a:custGeom>
             <a:avLst/>
@@ -6286,18 +4888,18 @@
             <a:cxnLst/>
             <a:rect l="l" t="t" r="r" b="b"/>
             <a:pathLst>
-              <a:path w="10116277" h="9454121">
+              <a:path w="8535602" h="7976908">
                 <a:moveTo>
                   <a:pt x="0" y="0"/>
                 </a:moveTo>
                 <a:lnTo>
-                  <a:pt x="10116278" y="0"/>
-                </a:lnTo>
-                <a:lnTo>
-                  <a:pt x="10116278" y="9454121"/>
-                </a:lnTo>
-                <a:lnTo>
-                  <a:pt x="0" y="9454121"/>
+                  <a:pt x="8535602" y="0"/>
+                </a:lnTo>
+                <a:lnTo>
+                  <a:pt x="8535602" y="7976908"/>
+                </a:lnTo>
+                <a:lnTo>
+                  <a:pt x="0" y="7976908"/>
                 </a:lnTo>
                 <a:lnTo>
                   <a:pt x="0" y="0"/>
@@ -6334,7 +4936,474 @@
       </p:sp>
       <p:sp>
         <p:nvSpPr>
+          <p:cNvPr id="3" name="Freeform 3"/>
+          <p:cNvSpPr/>
+          <p:nvPr/>
+        </p:nvSpPr>
+        <p:spPr>
+          <a:xfrm rot="-10151301">
+            <a:off x="11164674" y="6546853"/>
+            <a:ext cx="8535602" cy="7976908"/>
+          </a:xfrm>
+          <a:custGeom>
+            <a:avLst/>
+            <a:gdLst/>
+            <a:ahLst/>
+            <a:cxnLst/>
+            <a:rect l="l" t="t" r="r" b="b"/>
+            <a:pathLst>
+              <a:path w="8535602" h="7976908">
+                <a:moveTo>
+                  <a:pt x="0" y="0"/>
+                </a:moveTo>
+                <a:lnTo>
+                  <a:pt x="8535602" y="0"/>
+                </a:lnTo>
+                <a:lnTo>
+                  <a:pt x="8535602" y="7976908"/>
+                </a:lnTo>
+                <a:lnTo>
+                  <a:pt x="0" y="7976908"/>
+                </a:lnTo>
+                <a:lnTo>
+                  <a:pt x="0" y="0"/>
+                </a:lnTo>
+                <a:close/>
+              </a:path>
+            </a:pathLst>
+          </a:custGeom>
+          <a:blipFill>
+            <a:blip r:embed="rId2">
+              <a:extLst>
+                <a:ext uri="{96DAC541-7B7A-43D3-8B79-37D633B846F1}">
+                  <asvg:svgBlip xmlns:asvg="http://schemas.microsoft.com/office/drawing/2016/SVG/main" r:embed="rId3"/>
+                </a:ext>
+              </a:extLst>
+            </a:blip>
+            <a:stretch>
+              <a:fillRect/>
+            </a:stretch>
+          </a:blipFill>
+          <a:ln cap="sq">
+            <a:noFill/>
+            <a:prstDash val="solid"/>
+            <a:miter/>
+          </a:ln>
+        </p:spPr>
+        <p:txBody>
+          <a:bodyPr/>
+          <a:lstStyle/>
+          <a:p>
+            <a:endParaRPr lang="es-CL"/>
+          </a:p>
+        </p:txBody>
+      </p:sp>
+      <p:sp>
+        <p:nvSpPr>
+          <p:cNvPr id="4" name="TextBox 4"/>
+          <p:cNvSpPr txBox="1"/>
+          <p:nvPr/>
+        </p:nvSpPr>
+        <p:spPr>
+          <a:xfrm>
+            <a:off x="2888174" y="4327609"/>
+            <a:ext cx="12635250" cy="1211565"/>
+          </a:xfrm>
+          <a:prstGeom prst="rect">
+            <a:avLst/>
+          </a:prstGeom>
+        </p:spPr>
+        <p:txBody>
+          <a:bodyPr lIns="0" tIns="0" rIns="0" bIns="0" rtlCol="0" anchor="t">
+            <a:spAutoFit/>
+          </a:bodyPr>
+          <a:lstStyle/>
+          <a:p>
+            <a:pPr algn="r">
+              <a:lnSpc>
+                <a:spcPts val="9841"/>
+              </a:lnSpc>
+            </a:pPr>
+            <a:r>
+              <a:rPr lang="en-US" sz="7029" spc="660">
+                <a:solidFill>
+                  <a:srgbClr val="EDE8E4"/>
+                </a:solidFill>
+                <a:latin typeface="Glacial Indifference"/>
+                <a:ea typeface="Glacial Indifference"/>
+                <a:cs typeface="Glacial Indifference"/>
+                <a:sym typeface="Glacial Indifference"/>
+              </a:rPr>
+              <a:t>OBSTACULOS PRESENTES</a:t>
+            </a:r>
+          </a:p>
+        </p:txBody>
+      </p:sp>
+      <p:sp>
+        <p:nvSpPr>
+          <p:cNvPr id="5" name="Freeform 5"/>
+          <p:cNvSpPr/>
+          <p:nvPr/>
+        </p:nvSpPr>
+        <p:spPr>
+          <a:xfrm>
+            <a:off x="-1446812" y="7841762"/>
+            <a:ext cx="5482705" cy="4884592"/>
+          </a:xfrm>
+          <a:custGeom>
+            <a:avLst/>
+            <a:gdLst/>
+            <a:ahLst/>
+            <a:cxnLst/>
+            <a:rect l="l" t="t" r="r" b="b"/>
+            <a:pathLst>
+              <a:path w="5482705" h="4884592">
+                <a:moveTo>
+                  <a:pt x="0" y="0"/>
+                </a:moveTo>
+                <a:lnTo>
+                  <a:pt x="5482705" y="0"/>
+                </a:lnTo>
+                <a:lnTo>
+                  <a:pt x="5482705" y="4884591"/>
+                </a:lnTo>
+                <a:lnTo>
+                  <a:pt x="0" y="4884591"/>
+                </a:lnTo>
+                <a:lnTo>
+                  <a:pt x="0" y="0"/>
+                </a:lnTo>
+                <a:close/>
+              </a:path>
+            </a:pathLst>
+          </a:custGeom>
+          <a:blipFill>
+            <a:blip r:embed="rId4">
+              <a:extLst>
+                <a:ext uri="{96DAC541-7B7A-43D3-8B79-37D633B846F1}">
+                  <asvg:svgBlip xmlns:asvg="http://schemas.microsoft.com/office/drawing/2016/SVG/main" r:embed="rId5"/>
+                </a:ext>
+              </a:extLst>
+            </a:blip>
+            <a:stretch>
+              <a:fillRect/>
+            </a:stretch>
+          </a:blipFill>
+          <a:ln cap="sq">
+            <a:noFill/>
+            <a:prstDash val="solid"/>
+            <a:miter/>
+          </a:ln>
+        </p:spPr>
+        <p:txBody>
+          <a:bodyPr/>
+          <a:lstStyle/>
+          <a:p>
+            <a:endParaRPr lang="es-CL"/>
+          </a:p>
+        </p:txBody>
+      </p:sp>
+      <p:sp>
+        <p:nvSpPr>
           <p:cNvPr id="6" name="Freeform 6"/>
+          <p:cNvSpPr/>
+          <p:nvPr/>
+        </p:nvSpPr>
+        <p:spPr>
+          <a:xfrm rot="10452176">
+            <a:off x="15012576" y="-2759682"/>
+            <a:ext cx="5482705" cy="4884592"/>
+          </a:xfrm>
+          <a:custGeom>
+            <a:avLst/>
+            <a:gdLst/>
+            <a:ahLst/>
+            <a:cxnLst/>
+            <a:rect l="l" t="t" r="r" b="b"/>
+            <a:pathLst>
+              <a:path w="5482705" h="4884592">
+                <a:moveTo>
+                  <a:pt x="0" y="0"/>
+                </a:moveTo>
+                <a:lnTo>
+                  <a:pt x="5482705" y="0"/>
+                </a:lnTo>
+                <a:lnTo>
+                  <a:pt x="5482705" y="4884591"/>
+                </a:lnTo>
+                <a:lnTo>
+                  <a:pt x="0" y="4884591"/>
+                </a:lnTo>
+                <a:lnTo>
+                  <a:pt x="0" y="0"/>
+                </a:lnTo>
+                <a:close/>
+              </a:path>
+            </a:pathLst>
+          </a:custGeom>
+          <a:blipFill>
+            <a:blip r:embed="rId4">
+              <a:extLst>
+                <a:ext uri="{96DAC541-7B7A-43D3-8B79-37D633B846F1}">
+                  <asvg:svgBlip xmlns:asvg="http://schemas.microsoft.com/office/drawing/2016/SVG/main" r:embed="rId5"/>
+                </a:ext>
+              </a:extLst>
+            </a:blip>
+            <a:stretch>
+              <a:fillRect/>
+            </a:stretch>
+          </a:blipFill>
+          <a:ln cap="sq">
+            <a:noFill/>
+            <a:prstDash val="solid"/>
+            <a:miter/>
+          </a:ln>
+        </p:spPr>
+        <p:txBody>
+          <a:bodyPr/>
+          <a:lstStyle/>
+          <a:p>
+            <a:endParaRPr lang="es-CL"/>
+          </a:p>
+        </p:txBody>
+      </p:sp>
+      <p:sp>
+        <p:nvSpPr>
+          <p:cNvPr id="7" name="TextBox 7"/>
+          <p:cNvSpPr txBox="1"/>
+          <p:nvPr/>
+        </p:nvSpPr>
+        <p:spPr>
+          <a:xfrm>
+            <a:off x="2709630" y="5402621"/>
+            <a:ext cx="12868741" cy="1226820"/>
+          </a:xfrm>
+          <a:prstGeom prst="rect">
+            <a:avLst/>
+          </a:prstGeom>
+        </p:spPr>
+        <p:txBody>
+          <a:bodyPr lIns="0" tIns="0" rIns="0" bIns="0" rtlCol="0" anchor="t">
+            <a:spAutoFit/>
+          </a:bodyPr>
+          <a:lstStyle/>
+          <a:p>
+            <a:pPr algn="r">
+              <a:lnSpc>
+                <a:spcPts val="10080"/>
+              </a:lnSpc>
+            </a:pPr>
+            <a:r>
+              <a:rPr lang="en-US" sz="7200" b="1" spc="676">
+                <a:solidFill>
+                  <a:srgbClr val="EDE8E4"/>
+                </a:solidFill>
+                <a:latin typeface="Glacial Indifference Bold"/>
+                <a:ea typeface="Glacial Indifference Bold"/>
+                <a:cs typeface="Glacial Indifference Bold"/>
+                <a:sym typeface="Glacial Indifference Bold"/>
+              </a:rPr>
+              <a:t>DURANTE EL DESARROLLO</a:t>
+            </a:r>
+          </a:p>
+        </p:txBody>
+      </p:sp>
+      <p:sp>
+        <p:nvSpPr>
+          <p:cNvPr id="8" name="Freeform 8"/>
+          <p:cNvSpPr/>
+          <p:nvPr/>
+        </p:nvSpPr>
+        <p:spPr>
+          <a:xfrm>
+            <a:off x="0" y="48586"/>
+            <a:ext cx="3279385" cy="806182"/>
+          </a:xfrm>
+          <a:custGeom>
+            <a:avLst/>
+            <a:gdLst/>
+            <a:ahLst/>
+            <a:cxnLst/>
+            <a:rect l="l" t="t" r="r" b="b"/>
+            <a:pathLst>
+              <a:path w="3279385" h="806182">
+                <a:moveTo>
+                  <a:pt x="0" y="0"/>
+                </a:moveTo>
+                <a:lnTo>
+                  <a:pt x="3279385" y="0"/>
+                </a:lnTo>
+                <a:lnTo>
+                  <a:pt x="3279385" y="806182"/>
+                </a:lnTo>
+                <a:lnTo>
+                  <a:pt x="0" y="806182"/>
+                </a:lnTo>
+                <a:lnTo>
+                  <a:pt x="0" y="0"/>
+                </a:lnTo>
+                <a:close/>
+              </a:path>
+            </a:pathLst>
+          </a:custGeom>
+          <a:blipFill>
+            <a:blip r:embed="rId6"/>
+            <a:stretch>
+              <a:fillRect/>
+            </a:stretch>
+          </a:blipFill>
+        </p:spPr>
+        <p:txBody>
+          <a:bodyPr/>
+          <a:lstStyle/>
+          <a:p>
+            <a:endParaRPr lang="es-CL"/>
+          </a:p>
+        </p:txBody>
+      </p:sp>
+    </p:spTree>
+  </p:cSld>
+  <p:clrMapOvr>
+    <a:masterClrMapping/>
+  </p:clrMapOvr>
+  <mc:AlternateContent xmlns:mc="http://schemas.openxmlformats.org/markup-compatibility/2006">
+    <mc:Choice xmlns:p14="http://schemas.microsoft.com/office/powerpoint/2010/main" Requires="p14">
+      <p:transition spd="med" p14:dur="700">
+        <p:fade/>
+      </p:transition>
+    </mc:Choice>
+    <mc:Fallback>
+      <p:transition spd="med">
+        <p:fade/>
+      </p:transition>
+    </mc:Fallback>
+  </mc:AlternateContent>
+</p:sld>
+</file>
+
+<file path=ppt/slides/slide13.xml><?xml version="1.0" encoding="utf-8"?>
+<p:sld xmlns:a="http://schemas.openxmlformats.org/drawingml/2006/main" xmlns:r="http://schemas.openxmlformats.org/officeDocument/2006/relationships" xmlns:p="http://schemas.openxmlformats.org/presentationml/2006/main">
+  <p:cSld>
+    <p:bg>
+      <p:bgPr>
+        <a:solidFill>
+          <a:srgbClr val="293239"/>
+        </a:solidFill>
+        <a:effectLst/>
+      </p:bgPr>
+    </p:bg>
+    <p:spTree>
+      <p:nvGrpSpPr>
+        <p:cNvPr id="1" name=""/>
+        <p:cNvGrpSpPr/>
+        <p:nvPr/>
+      </p:nvGrpSpPr>
+      <p:grpSpPr>
+        <a:xfrm>
+          <a:off x="0" y="0"/>
+          <a:ext cx="0" cy="0"/>
+          <a:chOff x="0" y="0"/>
+          <a:chExt cx="0" cy="0"/>
+        </a:xfrm>
+      </p:grpSpPr>
+      <p:sp>
+        <p:nvSpPr>
+          <p:cNvPr id="2" name="AutoShape 2"/>
+          <p:cNvSpPr/>
+          <p:nvPr/>
+        </p:nvSpPr>
+        <p:spPr>
+          <a:xfrm flipV="1">
+            <a:off x="1478627" y="1685723"/>
+            <a:ext cx="0" cy="6915554"/>
+          </a:xfrm>
+          <a:prstGeom prst="line">
+            <a:avLst/>
+          </a:prstGeom>
+          <a:ln w="66675" cap="flat">
+            <a:solidFill>
+              <a:srgbClr val="D2E5E9"/>
+            </a:solidFill>
+            <a:prstDash val="solid"/>
+            <a:headEnd type="none" w="sm" len="sm"/>
+            <a:tailEnd type="none" w="sm" len="sm"/>
+          </a:ln>
+        </p:spPr>
+        <p:txBody>
+          <a:bodyPr/>
+          <a:lstStyle/>
+          <a:p>
+            <a:endParaRPr lang="es-CL"/>
+          </a:p>
+        </p:txBody>
+      </p:sp>
+      <p:sp>
+        <p:nvSpPr>
+          <p:cNvPr id="3" name="Freeform 3"/>
+          <p:cNvSpPr/>
+          <p:nvPr/>
+        </p:nvSpPr>
+        <p:spPr>
+          <a:xfrm rot="5400000">
+            <a:off x="9533486" y="55002"/>
+            <a:ext cx="10116277" cy="9454121"/>
+          </a:xfrm>
+          <a:custGeom>
+            <a:avLst/>
+            <a:gdLst/>
+            <a:ahLst/>
+            <a:cxnLst/>
+            <a:rect l="l" t="t" r="r" b="b"/>
+            <a:pathLst>
+              <a:path w="10116277" h="9454121">
+                <a:moveTo>
+                  <a:pt x="0" y="0"/>
+                </a:moveTo>
+                <a:lnTo>
+                  <a:pt x="10116278" y="0"/>
+                </a:lnTo>
+                <a:lnTo>
+                  <a:pt x="10116278" y="9454121"/>
+                </a:lnTo>
+                <a:lnTo>
+                  <a:pt x="0" y="9454121"/>
+                </a:lnTo>
+                <a:lnTo>
+                  <a:pt x="0" y="0"/>
+                </a:lnTo>
+                <a:close/>
+              </a:path>
+            </a:pathLst>
+          </a:custGeom>
+          <a:blipFill>
+            <a:blip r:embed="rId2">
+              <a:extLst>
+                <a:ext uri="{96DAC541-7B7A-43D3-8B79-37D633B846F1}">
+                  <asvg:svgBlip xmlns:asvg="http://schemas.microsoft.com/office/drawing/2016/SVG/main" r:embed="rId3"/>
+                </a:ext>
+              </a:extLst>
+            </a:blip>
+            <a:stretch>
+              <a:fillRect/>
+            </a:stretch>
+          </a:blipFill>
+          <a:ln cap="sq">
+            <a:noFill/>
+            <a:prstDash val="solid"/>
+            <a:miter/>
+          </a:ln>
+        </p:spPr>
+        <p:txBody>
+          <a:bodyPr/>
+          <a:lstStyle/>
+          <a:p>
+            <a:endParaRPr lang="es-CL"/>
+          </a:p>
+        </p:txBody>
+      </p:sp>
+      <p:sp>
+        <p:nvSpPr>
+          <p:cNvPr id="4" name="Freeform 4"/>
           <p:cNvSpPr/>
           <p:nvPr/>
         </p:nvSpPr>
@@ -6385,11 +5454,64 @@
           </a:p>
         </p:txBody>
       </p:sp>
+      <p:sp>
+        <p:nvSpPr>
+          <p:cNvPr id="5" name="TextBox 5"/>
+          <p:cNvSpPr txBox="1"/>
+          <p:nvPr/>
+        </p:nvSpPr>
+        <p:spPr>
+          <a:xfrm>
+            <a:off x="1771017" y="4445981"/>
+            <a:ext cx="7189698" cy="1252164"/>
+          </a:xfrm>
+          <a:prstGeom prst="rect">
+            <a:avLst/>
+          </a:prstGeom>
+        </p:spPr>
+        <p:txBody>
+          <a:bodyPr lIns="0" tIns="0" rIns="0" bIns="0" rtlCol="0" anchor="t">
+            <a:spAutoFit/>
+          </a:bodyPr>
+          <a:lstStyle/>
+          <a:p>
+            <a:pPr algn="l">
+              <a:lnSpc>
+                <a:spcPts val="10258"/>
+              </a:lnSpc>
+            </a:pPr>
+            <a:r>
+              <a:rPr lang="en-US" sz="7327" b="1" spc="688">
+                <a:solidFill>
+                  <a:srgbClr val="EDE8E4"/>
+                </a:solidFill>
+                <a:latin typeface="Glacial Indifference Bold"/>
+                <a:ea typeface="Glacial Indifference Bold"/>
+                <a:cs typeface="Glacial Indifference Bold"/>
+                <a:sym typeface="Glacial Indifference Bold"/>
+              </a:rPr>
+              <a:t>CONCLUSIÓN</a:t>
+            </a:r>
+          </a:p>
+        </p:txBody>
+      </p:sp>
     </p:spTree>
   </p:cSld>
   <p:clrMapOvr>
     <a:masterClrMapping/>
   </p:clrMapOvr>
+  <mc:AlternateContent xmlns:mc="http://schemas.openxmlformats.org/markup-compatibility/2006">
+    <mc:Choice xmlns:p14="http://schemas.microsoft.com/office/powerpoint/2010/main" Requires="p14">
+      <p:transition spd="med" p14:dur="700">
+        <p:fade/>
+      </p:transition>
+    </mc:Choice>
+    <mc:Fallback>
+      <p:transition spd="med">
+        <p:fade/>
+      </p:transition>
+    </mc:Fallback>
+  </mc:AlternateContent>
 </p:sld>
 </file>
 
@@ -6817,8 +5939,8 @@
         </p:nvSpPr>
         <p:spPr>
           <a:xfrm>
-            <a:off x="5334000" y="4661721"/>
-            <a:ext cx="8225619" cy="994136"/>
+            <a:off x="4343400" y="4650880"/>
+            <a:ext cx="8515310" cy="994136"/>
           </a:xfrm>
           <a:prstGeom prst="rect">
             <a:avLst/>
@@ -6860,8 +5982,8 @@
         </p:nvSpPr>
         <p:spPr>
           <a:xfrm>
-            <a:off x="5455844" y="3187758"/>
-            <a:ext cx="7703626" cy="994136"/>
+            <a:off x="4586612" y="3158269"/>
+            <a:ext cx="7978706" cy="994136"/>
           </a:xfrm>
           <a:prstGeom prst="rect">
             <a:avLst/>
@@ -6903,7 +6025,7 @@
         </p:nvSpPr>
         <p:spPr>
           <a:xfrm>
-            <a:off x="6603706" y="5516425"/>
+            <a:off x="6247495" y="5568816"/>
             <a:ext cx="7978706" cy="679450"/>
           </a:xfrm>
           <a:prstGeom prst="rect">
@@ -6924,7 +6046,7 @@
               <a:buChar char="•"/>
             </a:pPr>
             <a:r>
-              <a:rPr lang="en-US" sz="3999" b="1" dirty="0" err="1">
+              <a:rPr lang="en-US" sz="3999" b="1">
                 <a:solidFill>
                   <a:srgbClr val="152540"/>
                 </a:solidFill>
@@ -6935,15 +6057,6 @@
               </a:rPr>
               <a:t>Desarrollador</a:t>
             </a:r>
-            <a:endParaRPr lang="en-US" sz="3999" b="1" dirty="0">
-              <a:solidFill>
-                <a:srgbClr val="152540"/>
-              </a:solidFill>
-              <a:latin typeface="Open Sans Bold"/>
-              <a:ea typeface="Open Sans Bold"/>
-              <a:cs typeface="Open Sans Bold"/>
-              <a:sym typeface="Open Sans Bold"/>
-            </a:endParaRPr>
           </a:p>
         </p:txBody>
       </p:sp>
@@ -6955,7 +6068,7 @@
         </p:nvSpPr>
         <p:spPr>
           <a:xfrm>
-            <a:off x="6544506" y="4088003"/>
+            <a:off x="6247495" y="4076205"/>
             <a:ext cx="7978706" cy="679450"/>
           </a:xfrm>
           <a:prstGeom prst="rect">
@@ -6976,7 +6089,7 @@
               <a:buChar char="•"/>
             </a:pPr>
             <a:r>
-              <a:rPr lang="en-US" sz="3999" b="1" dirty="0">
+              <a:rPr lang="en-US" sz="3999" b="1">
                 <a:solidFill>
                   <a:srgbClr val="152540"/>
                 </a:solidFill>
@@ -6995,6 +6108,18 @@
   <p:clrMapOvr>
     <a:masterClrMapping/>
   </p:clrMapOvr>
+  <mc:AlternateContent xmlns:mc="http://schemas.openxmlformats.org/markup-compatibility/2006">
+    <mc:Choice xmlns:p14="http://schemas.microsoft.com/office/powerpoint/2010/main" Requires="p14">
+      <p:transition spd="med" p14:dur="700">
+        <p:fade/>
+      </p:transition>
+    </mc:Choice>
+    <mc:Fallback>
+      <p:transition spd="med">
+        <p:fade/>
+      </p:transition>
+    </mc:Fallback>
+  </mc:AlternateContent>
 </p:sld>
 </file>
 
@@ -8126,6 +7251,18 @@
   <p:clrMapOvr>
     <a:masterClrMapping/>
   </p:clrMapOvr>
+  <mc:AlternateContent xmlns:mc="http://schemas.openxmlformats.org/markup-compatibility/2006">
+    <mc:Choice xmlns:p14="http://schemas.microsoft.com/office/powerpoint/2010/main" Requires="p14">
+      <p:transition spd="med" p14:dur="700">
+        <p:fade/>
+      </p:transition>
+    </mc:Choice>
+    <mc:Fallback>
+      <p:transition spd="med">
+        <p:fade/>
+      </p:transition>
+    </mc:Fallback>
+  </mc:AlternateContent>
 </p:sld>
 </file>
 
@@ -9240,1469 +8377,22 @@
   <p:clrMapOvr>
     <a:masterClrMapping/>
   </p:clrMapOvr>
+  <mc:AlternateContent xmlns:mc="http://schemas.openxmlformats.org/markup-compatibility/2006">
+    <mc:Choice xmlns:p14="http://schemas.microsoft.com/office/powerpoint/2010/main" Requires="p14">
+      <p:transition spd="med" p14:dur="700">
+        <p:fade/>
+      </p:transition>
+    </mc:Choice>
+    <mc:Fallback>
+      <p:transition spd="med">
+        <p:fade/>
+      </p:transition>
+    </mc:Fallback>
+  </mc:AlternateContent>
 </p:sld>
 </file>
 
 <file path=ppt/slides/slide5.xml><?xml version="1.0" encoding="utf-8"?>
-<p:sld xmlns:a="http://schemas.openxmlformats.org/drawingml/2006/main" xmlns:r="http://schemas.openxmlformats.org/officeDocument/2006/relationships" xmlns:p="http://schemas.openxmlformats.org/presentationml/2006/main">
-  <p:cSld>
-    <p:bg>
-      <p:bgPr>
-        <a:solidFill>
-          <a:srgbClr val="293239"/>
-        </a:solidFill>
-        <a:effectLst/>
-      </p:bgPr>
-    </p:bg>
-    <p:spTree>
-      <p:nvGrpSpPr>
-        <p:cNvPr id="1" name=""/>
-        <p:cNvGrpSpPr/>
-        <p:nvPr/>
-      </p:nvGrpSpPr>
-      <p:grpSpPr>
-        <a:xfrm>
-          <a:off x="0" y="0"/>
-          <a:ext cx="0" cy="0"/>
-          <a:chOff x="0" y="0"/>
-          <a:chExt cx="0" cy="0"/>
-        </a:xfrm>
-      </p:grpSpPr>
-      <p:sp>
-        <p:nvSpPr>
-          <p:cNvPr id="2" name="Freeform 2"/>
-          <p:cNvSpPr/>
-          <p:nvPr/>
-        </p:nvSpPr>
-        <p:spPr>
-          <a:xfrm>
-            <a:off x="-290950" y="-2033784"/>
-            <a:ext cx="8535602" cy="7976908"/>
-          </a:xfrm>
-          <a:custGeom>
-            <a:avLst/>
-            <a:gdLst/>
-            <a:ahLst/>
-            <a:cxnLst/>
-            <a:rect l="l" t="t" r="r" b="b"/>
-            <a:pathLst>
-              <a:path w="8535602" h="7976908">
-                <a:moveTo>
-                  <a:pt x="0" y="0"/>
-                </a:moveTo>
-                <a:lnTo>
-                  <a:pt x="8535602" y="0"/>
-                </a:lnTo>
-                <a:lnTo>
-                  <a:pt x="8535602" y="7976908"/>
-                </a:lnTo>
-                <a:lnTo>
-                  <a:pt x="0" y="7976908"/>
-                </a:lnTo>
-                <a:lnTo>
-                  <a:pt x="0" y="0"/>
-                </a:lnTo>
-                <a:close/>
-              </a:path>
-            </a:pathLst>
-          </a:custGeom>
-          <a:blipFill>
-            <a:blip r:embed="rId2">
-              <a:extLst>
-                <a:ext uri="{96DAC541-7B7A-43D3-8B79-37D633B846F1}">
-                  <asvg:svgBlip xmlns:asvg="http://schemas.microsoft.com/office/drawing/2016/SVG/main" r:embed="rId3"/>
-                </a:ext>
-              </a:extLst>
-            </a:blip>
-            <a:stretch>
-              <a:fillRect/>
-            </a:stretch>
-          </a:blipFill>
-          <a:ln cap="sq">
-            <a:noFill/>
-            <a:prstDash val="solid"/>
-            <a:miter/>
-          </a:ln>
-        </p:spPr>
-        <p:txBody>
-          <a:bodyPr/>
-          <a:lstStyle/>
-          <a:p>
-            <a:endParaRPr lang="es-CL"/>
-          </a:p>
-        </p:txBody>
-      </p:sp>
-      <p:sp>
-        <p:nvSpPr>
-          <p:cNvPr id="3" name="Freeform 3"/>
-          <p:cNvSpPr/>
-          <p:nvPr/>
-        </p:nvSpPr>
-        <p:spPr>
-          <a:xfrm rot="-10151301">
-            <a:off x="11164674" y="6546853"/>
-            <a:ext cx="8535602" cy="7976908"/>
-          </a:xfrm>
-          <a:custGeom>
-            <a:avLst/>
-            <a:gdLst/>
-            <a:ahLst/>
-            <a:cxnLst/>
-            <a:rect l="l" t="t" r="r" b="b"/>
-            <a:pathLst>
-              <a:path w="8535602" h="7976908">
-                <a:moveTo>
-                  <a:pt x="0" y="0"/>
-                </a:moveTo>
-                <a:lnTo>
-                  <a:pt x="8535602" y="0"/>
-                </a:lnTo>
-                <a:lnTo>
-                  <a:pt x="8535602" y="7976908"/>
-                </a:lnTo>
-                <a:lnTo>
-                  <a:pt x="0" y="7976908"/>
-                </a:lnTo>
-                <a:lnTo>
-                  <a:pt x="0" y="0"/>
-                </a:lnTo>
-                <a:close/>
-              </a:path>
-            </a:pathLst>
-          </a:custGeom>
-          <a:blipFill>
-            <a:blip r:embed="rId2">
-              <a:extLst>
-                <a:ext uri="{96DAC541-7B7A-43D3-8B79-37D633B846F1}">
-                  <asvg:svgBlip xmlns:asvg="http://schemas.microsoft.com/office/drawing/2016/SVG/main" r:embed="rId3"/>
-                </a:ext>
-              </a:extLst>
-            </a:blip>
-            <a:stretch>
-              <a:fillRect/>
-            </a:stretch>
-          </a:blipFill>
-          <a:ln cap="sq">
-            <a:noFill/>
-            <a:prstDash val="solid"/>
-            <a:miter/>
-          </a:ln>
-        </p:spPr>
-        <p:txBody>
-          <a:bodyPr/>
-          <a:lstStyle/>
-          <a:p>
-            <a:endParaRPr lang="es-CL"/>
-          </a:p>
-        </p:txBody>
-      </p:sp>
-      <p:grpSp>
-        <p:nvGrpSpPr>
-          <p:cNvPr id="4" name="Group 4"/>
-          <p:cNvGrpSpPr/>
-          <p:nvPr/>
-        </p:nvGrpSpPr>
-        <p:grpSpPr>
-          <a:xfrm>
-            <a:off x="9932552" y="4019987"/>
-            <a:ext cx="7258358" cy="4186037"/>
-            <a:chOff x="0" y="0"/>
-            <a:chExt cx="1617741" cy="932983"/>
-          </a:xfrm>
-        </p:grpSpPr>
-        <p:sp>
-          <p:nvSpPr>
-            <p:cNvPr id="5" name="Freeform 5"/>
-            <p:cNvSpPr/>
-            <p:nvPr/>
-          </p:nvSpPr>
-          <p:spPr>
-            <a:xfrm>
-              <a:off x="0" y="0"/>
-              <a:ext cx="1617741" cy="932983"/>
-            </a:xfrm>
-            <a:custGeom>
-              <a:avLst/>
-              <a:gdLst/>
-              <a:ahLst/>
-              <a:cxnLst/>
-              <a:rect l="l" t="t" r="r" b="b"/>
-              <a:pathLst>
-                <a:path w="1617741" h="932983">
-                  <a:moveTo>
-                    <a:pt x="62931" y="0"/>
-                  </a:moveTo>
-                  <a:lnTo>
-                    <a:pt x="1554810" y="0"/>
-                  </a:lnTo>
-                  <a:cubicBezTo>
-                    <a:pt x="1589566" y="0"/>
-                    <a:pt x="1617741" y="28175"/>
-                    <a:pt x="1617741" y="62931"/>
-                  </a:cubicBezTo>
-                  <a:lnTo>
-                    <a:pt x="1617741" y="870052"/>
-                  </a:lnTo>
-                  <a:cubicBezTo>
-                    <a:pt x="1617741" y="904808"/>
-                    <a:pt x="1589566" y="932983"/>
-                    <a:pt x="1554810" y="932983"/>
-                  </a:cubicBezTo>
-                  <a:lnTo>
-                    <a:pt x="62931" y="932983"/>
-                  </a:lnTo>
-                  <a:cubicBezTo>
-                    <a:pt x="28175" y="932983"/>
-                    <a:pt x="0" y="904808"/>
-                    <a:pt x="0" y="870052"/>
-                  </a:cubicBezTo>
-                  <a:lnTo>
-                    <a:pt x="0" y="62931"/>
-                  </a:lnTo>
-                  <a:cubicBezTo>
-                    <a:pt x="0" y="28175"/>
-                    <a:pt x="28175" y="0"/>
-                    <a:pt x="62931" y="0"/>
-                  </a:cubicBezTo>
-                  <a:close/>
-                </a:path>
-              </a:pathLst>
-            </a:custGeom>
-            <a:solidFill>
-              <a:srgbClr val="000000">
-                <a:alpha val="0"/>
-              </a:srgbClr>
-            </a:solidFill>
-            <a:ln w="38100" cap="rnd">
-              <a:solidFill>
-                <a:srgbClr val="D2E5E9"/>
-              </a:solidFill>
-              <a:prstDash val="solid"/>
-              <a:round/>
-            </a:ln>
-          </p:spPr>
-          <p:txBody>
-            <a:bodyPr/>
-            <a:lstStyle/>
-            <a:p>
-              <a:endParaRPr lang="es-CL"/>
-            </a:p>
-          </p:txBody>
-        </p:sp>
-        <p:sp>
-          <p:nvSpPr>
-            <p:cNvPr id="6" name="TextBox 6"/>
-            <p:cNvSpPr txBox="1"/>
-            <p:nvPr/>
-          </p:nvSpPr>
-          <p:spPr>
-            <a:xfrm>
-              <a:off x="0" y="9525"/>
-              <a:ext cx="1617741" cy="923458"/>
-            </a:xfrm>
-            <a:prstGeom prst="rect">
-              <a:avLst/>
-            </a:prstGeom>
-          </p:spPr>
-          <p:txBody>
-            <a:bodyPr lIns="50800" tIns="50800" rIns="50800" bIns="50800" rtlCol="0" anchor="ctr"/>
-            <a:lstStyle/>
-            <a:p>
-              <a:pPr algn="ctr">
-                <a:lnSpc>
-                  <a:spcPts val="2121"/>
-                </a:lnSpc>
-              </a:pPr>
-              <a:endParaRPr/>
-            </a:p>
-            <a:p>
-              <a:pPr algn="ctr">
-                <a:lnSpc>
-                  <a:spcPts val="2121"/>
-                </a:lnSpc>
-              </a:pPr>
-              <a:endParaRPr/>
-            </a:p>
-          </p:txBody>
-        </p:sp>
-      </p:grpSp>
-      <p:sp>
-        <p:nvSpPr>
-          <p:cNvPr id="7" name="TextBox 7"/>
-          <p:cNvSpPr txBox="1"/>
-          <p:nvPr/>
-        </p:nvSpPr>
-        <p:spPr>
-          <a:xfrm>
-            <a:off x="9006545" y="1249819"/>
-            <a:ext cx="8184365" cy="1211565"/>
-          </a:xfrm>
-          <a:prstGeom prst="rect">
-            <a:avLst/>
-          </a:prstGeom>
-        </p:spPr>
-        <p:txBody>
-          <a:bodyPr lIns="0" tIns="0" rIns="0" bIns="0" rtlCol="0" anchor="t">
-            <a:spAutoFit/>
-          </a:bodyPr>
-          <a:lstStyle/>
-          <a:p>
-            <a:pPr algn="r">
-              <a:lnSpc>
-                <a:spcPts val="9841"/>
-              </a:lnSpc>
-            </a:pPr>
-            <a:r>
-              <a:rPr lang="en-US" sz="7029" spc="660">
-                <a:solidFill>
-                  <a:srgbClr val="EDE8E4"/>
-                </a:solidFill>
-                <a:latin typeface="Glacial Indifference"/>
-                <a:ea typeface="Glacial Indifference"/>
-                <a:cs typeface="Glacial Indifference"/>
-                <a:sym typeface="Glacial Indifference"/>
-              </a:rPr>
-              <a:t>ALCANCE</a:t>
-            </a:r>
-          </a:p>
-        </p:txBody>
-      </p:sp>
-      <p:sp>
-        <p:nvSpPr>
-          <p:cNvPr id="8" name="Freeform 8"/>
-          <p:cNvSpPr/>
-          <p:nvPr/>
-        </p:nvSpPr>
-        <p:spPr>
-          <a:xfrm rot="-10800000">
-            <a:off x="12716194" y="4019987"/>
-            <a:ext cx="4474715" cy="1033825"/>
-          </a:xfrm>
-          <a:custGeom>
-            <a:avLst/>
-            <a:gdLst/>
-            <a:ahLst/>
-            <a:cxnLst/>
-            <a:rect l="l" t="t" r="r" b="b"/>
-            <a:pathLst>
-              <a:path w="4474715" h="1033825">
-                <a:moveTo>
-                  <a:pt x="0" y="0"/>
-                </a:moveTo>
-                <a:lnTo>
-                  <a:pt x="4474715" y="0"/>
-                </a:lnTo>
-                <a:lnTo>
-                  <a:pt x="4474715" y="1033825"/>
-                </a:lnTo>
-                <a:lnTo>
-                  <a:pt x="0" y="1033825"/>
-                </a:lnTo>
-                <a:lnTo>
-                  <a:pt x="0" y="0"/>
-                </a:lnTo>
-                <a:close/>
-              </a:path>
-            </a:pathLst>
-          </a:custGeom>
-          <a:blipFill>
-            <a:blip r:embed="rId4">
-              <a:extLst>
-                <a:ext uri="{96DAC541-7B7A-43D3-8B79-37D633B846F1}">
-                  <asvg:svgBlip xmlns:asvg="http://schemas.microsoft.com/office/drawing/2016/SVG/main" r:embed="rId5"/>
-                </a:ext>
-              </a:extLst>
-            </a:blip>
-            <a:stretch>
-              <a:fillRect t="-473620"/>
-            </a:stretch>
-          </a:blipFill>
-        </p:spPr>
-        <p:txBody>
-          <a:bodyPr/>
-          <a:lstStyle/>
-          <a:p>
-            <a:endParaRPr lang="es-CL"/>
-          </a:p>
-        </p:txBody>
-      </p:sp>
-      <p:sp>
-        <p:nvSpPr>
-          <p:cNvPr id="9" name="Freeform 9"/>
-          <p:cNvSpPr/>
-          <p:nvPr/>
-        </p:nvSpPr>
-        <p:spPr>
-          <a:xfrm>
-            <a:off x="-1446812" y="7841762"/>
-            <a:ext cx="5482705" cy="4884592"/>
-          </a:xfrm>
-          <a:custGeom>
-            <a:avLst/>
-            <a:gdLst/>
-            <a:ahLst/>
-            <a:cxnLst/>
-            <a:rect l="l" t="t" r="r" b="b"/>
-            <a:pathLst>
-              <a:path w="5482705" h="4884592">
-                <a:moveTo>
-                  <a:pt x="0" y="0"/>
-                </a:moveTo>
-                <a:lnTo>
-                  <a:pt x="5482705" y="0"/>
-                </a:lnTo>
-                <a:lnTo>
-                  <a:pt x="5482705" y="4884591"/>
-                </a:lnTo>
-                <a:lnTo>
-                  <a:pt x="0" y="4884591"/>
-                </a:lnTo>
-                <a:lnTo>
-                  <a:pt x="0" y="0"/>
-                </a:lnTo>
-                <a:close/>
-              </a:path>
-            </a:pathLst>
-          </a:custGeom>
-          <a:blipFill>
-            <a:blip r:embed="rId6">
-              <a:extLst>
-                <a:ext uri="{96DAC541-7B7A-43D3-8B79-37D633B846F1}">
-                  <asvg:svgBlip xmlns:asvg="http://schemas.microsoft.com/office/drawing/2016/SVG/main" r:embed="rId7"/>
-                </a:ext>
-              </a:extLst>
-            </a:blip>
-            <a:stretch>
-              <a:fillRect/>
-            </a:stretch>
-          </a:blipFill>
-          <a:ln cap="sq">
-            <a:noFill/>
-            <a:prstDash val="solid"/>
-            <a:miter/>
-          </a:ln>
-        </p:spPr>
-        <p:txBody>
-          <a:bodyPr/>
-          <a:lstStyle/>
-          <a:p>
-            <a:endParaRPr lang="es-CL"/>
-          </a:p>
-        </p:txBody>
-      </p:sp>
-      <p:sp>
-        <p:nvSpPr>
-          <p:cNvPr id="10" name="Freeform 10"/>
-          <p:cNvSpPr/>
-          <p:nvPr/>
-        </p:nvSpPr>
-        <p:spPr>
-          <a:xfrm rot="10452176">
-            <a:off x="15012576" y="-2759682"/>
-            <a:ext cx="5482705" cy="4884592"/>
-          </a:xfrm>
-          <a:custGeom>
-            <a:avLst/>
-            <a:gdLst/>
-            <a:ahLst/>
-            <a:cxnLst/>
-            <a:rect l="l" t="t" r="r" b="b"/>
-            <a:pathLst>
-              <a:path w="5482705" h="4884592">
-                <a:moveTo>
-                  <a:pt x="0" y="0"/>
-                </a:moveTo>
-                <a:lnTo>
-                  <a:pt x="5482705" y="0"/>
-                </a:lnTo>
-                <a:lnTo>
-                  <a:pt x="5482705" y="4884591"/>
-                </a:lnTo>
-                <a:lnTo>
-                  <a:pt x="0" y="4884591"/>
-                </a:lnTo>
-                <a:lnTo>
-                  <a:pt x="0" y="0"/>
-                </a:lnTo>
-                <a:close/>
-              </a:path>
-            </a:pathLst>
-          </a:custGeom>
-          <a:blipFill>
-            <a:blip r:embed="rId6">
-              <a:extLst>
-                <a:ext uri="{96DAC541-7B7A-43D3-8B79-37D633B846F1}">
-                  <asvg:svgBlip xmlns:asvg="http://schemas.microsoft.com/office/drawing/2016/SVG/main" r:embed="rId7"/>
-                </a:ext>
-              </a:extLst>
-            </a:blip>
-            <a:stretch>
-              <a:fillRect/>
-            </a:stretch>
-          </a:blipFill>
-          <a:ln cap="sq">
-            <a:noFill/>
-            <a:prstDash val="solid"/>
-            <a:miter/>
-          </a:ln>
-        </p:spPr>
-        <p:txBody>
-          <a:bodyPr/>
-          <a:lstStyle/>
-          <a:p>
-            <a:endParaRPr lang="es-CL"/>
-          </a:p>
-        </p:txBody>
-      </p:sp>
-      <p:sp>
-        <p:nvSpPr>
-          <p:cNvPr id="11" name="TextBox 11"/>
-          <p:cNvSpPr txBox="1"/>
-          <p:nvPr/>
-        </p:nvSpPr>
-        <p:spPr>
-          <a:xfrm>
-            <a:off x="8730021" y="2259767"/>
-            <a:ext cx="8521969" cy="1226820"/>
-          </a:xfrm>
-          <a:prstGeom prst="rect">
-            <a:avLst/>
-          </a:prstGeom>
-        </p:spPr>
-        <p:txBody>
-          <a:bodyPr lIns="0" tIns="0" rIns="0" bIns="0" rtlCol="0" anchor="t">
-            <a:spAutoFit/>
-          </a:bodyPr>
-          <a:lstStyle/>
-          <a:p>
-            <a:pPr algn="r">
-              <a:lnSpc>
-                <a:spcPts val="10080"/>
-              </a:lnSpc>
-            </a:pPr>
-            <a:r>
-              <a:rPr lang="en-US" sz="7200" b="1" spc="676">
-                <a:solidFill>
-                  <a:srgbClr val="EDE8E4"/>
-                </a:solidFill>
-                <a:latin typeface="Glacial Indifference Bold"/>
-                <a:ea typeface="Glacial Indifference Bold"/>
-                <a:cs typeface="Glacial Indifference Bold"/>
-                <a:sym typeface="Glacial Indifference Bold"/>
-              </a:rPr>
-              <a:t>-LIMITACIONES</a:t>
-            </a:r>
-          </a:p>
-        </p:txBody>
-      </p:sp>
-      <p:sp>
-        <p:nvSpPr>
-          <p:cNvPr id="12" name="TextBox 12"/>
-          <p:cNvSpPr txBox="1"/>
-          <p:nvPr/>
-        </p:nvSpPr>
-        <p:spPr>
-          <a:xfrm>
-            <a:off x="10121213" y="5079700"/>
-            <a:ext cx="6875577" cy="2613447"/>
-          </a:xfrm>
-          <a:prstGeom prst="rect">
-            <a:avLst/>
-          </a:prstGeom>
-        </p:spPr>
-        <p:txBody>
-          <a:bodyPr lIns="0" tIns="0" rIns="0" bIns="0" rtlCol="0" anchor="t">
-            <a:spAutoFit/>
-          </a:bodyPr>
-          <a:lstStyle/>
-          <a:p>
-            <a:pPr marL="536161" lvl="1" indent="-268081" algn="just">
-              <a:lnSpc>
-                <a:spcPts val="3476"/>
-              </a:lnSpc>
-              <a:buFont typeface="Arial"/>
-              <a:buChar char="•"/>
-            </a:pPr>
-            <a:r>
-              <a:rPr lang="en-US" sz="2483" spc="54">
-                <a:solidFill>
-                  <a:srgbClr val="EDE8E4"/>
-                </a:solidFill>
-                <a:latin typeface="Glacial Indifference"/>
-                <a:ea typeface="Glacial Indifference"/>
-                <a:cs typeface="Glacial Indifference"/>
-                <a:sym typeface="Glacial Indifference"/>
-              </a:rPr>
-              <a:t>Presupuesto de la hospedería </a:t>
-            </a:r>
-          </a:p>
-          <a:p>
-            <a:pPr marL="536161" lvl="1" indent="-268081" algn="just">
-              <a:lnSpc>
-                <a:spcPts val="3476"/>
-              </a:lnSpc>
-              <a:buFont typeface="Arial"/>
-              <a:buChar char="•"/>
-            </a:pPr>
-            <a:r>
-              <a:rPr lang="en-US" sz="2483" u="none" strike="noStrike" spc="54">
-                <a:solidFill>
-                  <a:srgbClr val="EDE8E4"/>
-                </a:solidFill>
-                <a:latin typeface="Glacial Indifference"/>
-                <a:ea typeface="Glacial Indifference"/>
-                <a:cs typeface="Glacial Indifference"/>
-                <a:sym typeface="Glacial Indifference"/>
-              </a:rPr>
-              <a:t>Tiempo de desarrollo acotado</a:t>
-            </a:r>
-          </a:p>
-          <a:p>
-            <a:pPr marL="536161" lvl="1" indent="-268081" algn="just">
-              <a:lnSpc>
-                <a:spcPts val="3476"/>
-              </a:lnSpc>
-              <a:buFont typeface="Arial"/>
-              <a:buChar char="•"/>
-            </a:pPr>
-            <a:r>
-              <a:rPr lang="en-US" sz="2483" u="none" strike="noStrike" spc="54">
-                <a:solidFill>
-                  <a:srgbClr val="EDE8E4"/>
-                </a:solidFill>
-                <a:latin typeface="Glacial Indifference"/>
-                <a:ea typeface="Glacial Indifference"/>
-                <a:cs typeface="Glacial Indifference"/>
-                <a:sym typeface="Glacial Indifference"/>
-              </a:rPr>
-              <a:t>Perdida o corrupción de datos del archivo csv, durante la migración</a:t>
-            </a:r>
-          </a:p>
-          <a:p>
-            <a:pPr marL="536161" lvl="1" indent="-268081" algn="just">
-              <a:lnSpc>
-                <a:spcPts val="3476"/>
-              </a:lnSpc>
-              <a:buFont typeface="Arial"/>
-              <a:buChar char="•"/>
-            </a:pPr>
-            <a:r>
-              <a:rPr lang="en-US" sz="2483" u="none" strike="noStrike" spc="54">
-                <a:solidFill>
-                  <a:srgbClr val="EDE8E4"/>
-                </a:solidFill>
-                <a:latin typeface="Glacial Indifference"/>
-                <a:ea typeface="Glacial Indifference"/>
-                <a:cs typeface="Glacial Indifference"/>
-                <a:sym typeface="Glacial Indifference"/>
-              </a:rPr>
-              <a:t>Confidencialidad de los datos.</a:t>
-            </a:r>
-          </a:p>
-          <a:p>
-            <a:pPr marL="536161" lvl="1" indent="-268081" algn="just">
-              <a:lnSpc>
-                <a:spcPts val="3476"/>
-              </a:lnSpc>
-              <a:buFont typeface="Arial"/>
-              <a:buChar char="•"/>
-            </a:pPr>
-            <a:r>
-              <a:rPr lang="en-US" sz="2483" u="none" strike="noStrike" spc="54">
-                <a:solidFill>
-                  <a:srgbClr val="EDE8E4"/>
-                </a:solidFill>
-                <a:latin typeface="Glacial Indifference"/>
-                <a:ea typeface="Glacial Indifference"/>
-                <a:cs typeface="Glacial Indifference"/>
-                <a:sym typeface="Glacial Indifference"/>
-              </a:rPr>
-              <a:t>Conexión a internet. </a:t>
-            </a:r>
-          </a:p>
-        </p:txBody>
-      </p:sp>
-      <p:sp>
-        <p:nvSpPr>
-          <p:cNvPr id="13" name="Freeform 13"/>
-          <p:cNvSpPr/>
-          <p:nvPr/>
-        </p:nvSpPr>
-        <p:spPr>
-          <a:xfrm rot="-10800000">
-            <a:off x="10121213" y="4019987"/>
-            <a:ext cx="4474715" cy="1033825"/>
-          </a:xfrm>
-          <a:custGeom>
-            <a:avLst/>
-            <a:gdLst/>
-            <a:ahLst/>
-            <a:cxnLst/>
-            <a:rect l="l" t="t" r="r" b="b"/>
-            <a:pathLst>
-              <a:path w="4474715" h="1033825">
-                <a:moveTo>
-                  <a:pt x="0" y="0"/>
-                </a:moveTo>
-                <a:lnTo>
-                  <a:pt x="4474715" y="0"/>
-                </a:lnTo>
-                <a:lnTo>
-                  <a:pt x="4474715" y="1033825"/>
-                </a:lnTo>
-                <a:lnTo>
-                  <a:pt x="0" y="1033825"/>
-                </a:lnTo>
-                <a:lnTo>
-                  <a:pt x="0" y="0"/>
-                </a:lnTo>
-                <a:close/>
-              </a:path>
-            </a:pathLst>
-          </a:custGeom>
-          <a:blipFill>
-            <a:blip r:embed="rId4">
-              <a:extLst>
-                <a:ext uri="{96DAC541-7B7A-43D3-8B79-37D633B846F1}">
-                  <asvg:svgBlip xmlns:asvg="http://schemas.microsoft.com/office/drawing/2016/SVG/main" r:embed="rId5"/>
-                </a:ext>
-              </a:extLst>
-            </a:blip>
-            <a:stretch>
-              <a:fillRect t="-473620"/>
-            </a:stretch>
-          </a:blipFill>
-        </p:spPr>
-        <p:txBody>
-          <a:bodyPr/>
-          <a:lstStyle/>
-          <a:p>
-            <a:endParaRPr lang="es-CL"/>
-          </a:p>
-        </p:txBody>
-      </p:sp>
-      <p:sp>
-        <p:nvSpPr>
-          <p:cNvPr id="14" name="Freeform 14"/>
-          <p:cNvSpPr/>
-          <p:nvPr/>
-        </p:nvSpPr>
-        <p:spPr>
-          <a:xfrm rot="-10800000">
-            <a:off x="9932552" y="4019987"/>
-            <a:ext cx="4474715" cy="1033825"/>
-          </a:xfrm>
-          <a:custGeom>
-            <a:avLst/>
-            <a:gdLst/>
-            <a:ahLst/>
-            <a:cxnLst/>
-            <a:rect l="l" t="t" r="r" b="b"/>
-            <a:pathLst>
-              <a:path w="4474715" h="1033825">
-                <a:moveTo>
-                  <a:pt x="0" y="0"/>
-                </a:moveTo>
-                <a:lnTo>
-                  <a:pt x="4474714" y="0"/>
-                </a:lnTo>
-                <a:lnTo>
-                  <a:pt x="4474714" y="1033825"/>
-                </a:lnTo>
-                <a:lnTo>
-                  <a:pt x="0" y="1033825"/>
-                </a:lnTo>
-                <a:lnTo>
-                  <a:pt x="0" y="0"/>
-                </a:lnTo>
-                <a:close/>
-              </a:path>
-            </a:pathLst>
-          </a:custGeom>
-          <a:blipFill>
-            <a:blip r:embed="rId4">
-              <a:extLst>
-                <a:ext uri="{96DAC541-7B7A-43D3-8B79-37D633B846F1}">
-                  <asvg:svgBlip xmlns:asvg="http://schemas.microsoft.com/office/drawing/2016/SVG/main" r:embed="rId5"/>
-                </a:ext>
-              </a:extLst>
-            </a:blip>
-            <a:stretch>
-              <a:fillRect t="-473620"/>
-            </a:stretch>
-          </a:blipFill>
-        </p:spPr>
-        <p:txBody>
-          <a:bodyPr/>
-          <a:lstStyle/>
-          <a:p>
-            <a:endParaRPr lang="es-CL"/>
-          </a:p>
-        </p:txBody>
-      </p:sp>
-      <p:sp>
-        <p:nvSpPr>
-          <p:cNvPr id="15" name="TextBox 15"/>
-          <p:cNvSpPr txBox="1"/>
-          <p:nvPr/>
-        </p:nvSpPr>
-        <p:spPr>
-          <a:xfrm>
-            <a:off x="11659596" y="4182215"/>
-            <a:ext cx="3804269" cy="633169"/>
-          </a:xfrm>
-          <a:prstGeom prst="rect">
-            <a:avLst/>
-          </a:prstGeom>
-        </p:spPr>
-        <p:txBody>
-          <a:bodyPr lIns="0" tIns="0" rIns="0" bIns="0" rtlCol="0" anchor="t">
-            <a:spAutoFit/>
-          </a:bodyPr>
-          <a:lstStyle/>
-          <a:p>
-            <a:pPr algn="ctr">
-              <a:lnSpc>
-                <a:spcPts val="5120"/>
-              </a:lnSpc>
-            </a:pPr>
-            <a:r>
-              <a:rPr lang="en-US" sz="3657" b="1" spc="153">
-                <a:solidFill>
-                  <a:srgbClr val="253754"/>
-                </a:solidFill>
-                <a:latin typeface="Glacial Indifference Bold"/>
-                <a:ea typeface="Glacial Indifference Bold"/>
-                <a:cs typeface="Glacial Indifference Bold"/>
-                <a:sym typeface="Glacial Indifference Bold"/>
-              </a:rPr>
-              <a:t>Limitaciones</a:t>
-            </a:r>
-          </a:p>
-        </p:txBody>
-      </p:sp>
-      <p:sp>
-        <p:nvSpPr>
-          <p:cNvPr id="16" name="Freeform 16"/>
-          <p:cNvSpPr/>
-          <p:nvPr/>
-        </p:nvSpPr>
-        <p:spPr>
-          <a:xfrm>
-            <a:off x="0" y="48586"/>
-            <a:ext cx="3279385" cy="806182"/>
-          </a:xfrm>
-          <a:custGeom>
-            <a:avLst/>
-            <a:gdLst/>
-            <a:ahLst/>
-            <a:cxnLst/>
-            <a:rect l="l" t="t" r="r" b="b"/>
-            <a:pathLst>
-              <a:path w="3279385" h="806182">
-                <a:moveTo>
-                  <a:pt x="0" y="0"/>
-                </a:moveTo>
-                <a:lnTo>
-                  <a:pt x="3279385" y="0"/>
-                </a:lnTo>
-                <a:lnTo>
-                  <a:pt x="3279385" y="806182"/>
-                </a:lnTo>
-                <a:lnTo>
-                  <a:pt x="0" y="806182"/>
-                </a:lnTo>
-                <a:lnTo>
-                  <a:pt x="0" y="0"/>
-                </a:lnTo>
-                <a:close/>
-              </a:path>
-            </a:pathLst>
-          </a:custGeom>
-          <a:blipFill>
-            <a:blip r:embed="rId8"/>
-            <a:stretch>
-              <a:fillRect/>
-            </a:stretch>
-          </a:blipFill>
-        </p:spPr>
-        <p:txBody>
-          <a:bodyPr/>
-          <a:lstStyle/>
-          <a:p>
-            <a:endParaRPr lang="es-CL"/>
-          </a:p>
-        </p:txBody>
-      </p:sp>
-      <p:grpSp>
-        <p:nvGrpSpPr>
-          <p:cNvPr id="17" name="Group 17"/>
-          <p:cNvGrpSpPr/>
-          <p:nvPr/>
-        </p:nvGrpSpPr>
-        <p:grpSpPr>
-          <a:xfrm>
-            <a:off x="2260215" y="4019987"/>
-            <a:ext cx="7258358" cy="5106292"/>
-            <a:chOff x="0" y="0"/>
-            <a:chExt cx="1617741" cy="1138089"/>
-          </a:xfrm>
-        </p:grpSpPr>
-        <p:sp>
-          <p:nvSpPr>
-            <p:cNvPr id="18" name="Freeform 18"/>
-            <p:cNvSpPr/>
-            <p:nvPr/>
-          </p:nvSpPr>
-          <p:spPr>
-            <a:xfrm>
-              <a:off x="0" y="0"/>
-              <a:ext cx="1617741" cy="1138089"/>
-            </a:xfrm>
-            <a:custGeom>
-              <a:avLst/>
-              <a:gdLst/>
-              <a:ahLst/>
-              <a:cxnLst/>
-              <a:rect l="l" t="t" r="r" b="b"/>
-              <a:pathLst>
-                <a:path w="1617741" h="1138089">
-                  <a:moveTo>
-                    <a:pt x="62931" y="0"/>
-                  </a:moveTo>
-                  <a:lnTo>
-                    <a:pt x="1554810" y="0"/>
-                  </a:lnTo>
-                  <a:cubicBezTo>
-                    <a:pt x="1589566" y="0"/>
-                    <a:pt x="1617741" y="28175"/>
-                    <a:pt x="1617741" y="62931"/>
-                  </a:cubicBezTo>
-                  <a:lnTo>
-                    <a:pt x="1617741" y="1075158"/>
-                  </a:lnTo>
-                  <a:cubicBezTo>
-                    <a:pt x="1617741" y="1109914"/>
-                    <a:pt x="1589566" y="1138089"/>
-                    <a:pt x="1554810" y="1138089"/>
-                  </a:cubicBezTo>
-                  <a:lnTo>
-                    <a:pt x="62931" y="1138089"/>
-                  </a:lnTo>
-                  <a:cubicBezTo>
-                    <a:pt x="28175" y="1138089"/>
-                    <a:pt x="0" y="1109914"/>
-                    <a:pt x="0" y="1075158"/>
-                  </a:cubicBezTo>
-                  <a:lnTo>
-                    <a:pt x="0" y="62931"/>
-                  </a:lnTo>
-                  <a:cubicBezTo>
-                    <a:pt x="0" y="28175"/>
-                    <a:pt x="28175" y="0"/>
-                    <a:pt x="62931" y="0"/>
-                  </a:cubicBezTo>
-                  <a:close/>
-                </a:path>
-              </a:pathLst>
-            </a:custGeom>
-            <a:solidFill>
-              <a:srgbClr val="000000">
-                <a:alpha val="0"/>
-              </a:srgbClr>
-            </a:solidFill>
-            <a:ln w="38100" cap="rnd">
-              <a:solidFill>
-                <a:srgbClr val="D2E5E9"/>
-              </a:solidFill>
-              <a:prstDash val="solid"/>
-              <a:round/>
-            </a:ln>
-          </p:spPr>
-          <p:txBody>
-            <a:bodyPr/>
-            <a:lstStyle/>
-            <a:p>
-              <a:endParaRPr lang="es-CL"/>
-            </a:p>
-          </p:txBody>
-        </p:sp>
-        <p:sp>
-          <p:nvSpPr>
-            <p:cNvPr id="19" name="TextBox 19"/>
-            <p:cNvSpPr txBox="1"/>
-            <p:nvPr/>
-          </p:nvSpPr>
-          <p:spPr>
-            <a:xfrm>
-              <a:off x="0" y="9525"/>
-              <a:ext cx="1617741" cy="1128564"/>
-            </a:xfrm>
-            <a:prstGeom prst="rect">
-              <a:avLst/>
-            </a:prstGeom>
-          </p:spPr>
-          <p:txBody>
-            <a:bodyPr lIns="50800" tIns="50800" rIns="50800" bIns="50800" rtlCol="0" anchor="ctr"/>
-            <a:lstStyle/>
-            <a:p>
-              <a:pPr algn="ctr">
-                <a:lnSpc>
-                  <a:spcPts val="2121"/>
-                </a:lnSpc>
-              </a:pPr>
-              <a:endParaRPr/>
-            </a:p>
-            <a:p>
-              <a:pPr algn="ctr">
-                <a:lnSpc>
-                  <a:spcPts val="2121"/>
-                </a:lnSpc>
-              </a:pPr>
-              <a:endParaRPr/>
-            </a:p>
-          </p:txBody>
-        </p:sp>
-      </p:grpSp>
-      <p:sp>
-        <p:nvSpPr>
-          <p:cNvPr id="20" name="Freeform 20"/>
-          <p:cNvSpPr/>
-          <p:nvPr/>
-        </p:nvSpPr>
-        <p:spPr>
-          <a:xfrm rot="-10800000">
-            <a:off x="5043858" y="4019987"/>
-            <a:ext cx="4474715" cy="1033825"/>
-          </a:xfrm>
-          <a:custGeom>
-            <a:avLst/>
-            <a:gdLst/>
-            <a:ahLst/>
-            <a:cxnLst/>
-            <a:rect l="l" t="t" r="r" b="b"/>
-            <a:pathLst>
-              <a:path w="4474715" h="1033825">
-                <a:moveTo>
-                  <a:pt x="0" y="0"/>
-                </a:moveTo>
-                <a:lnTo>
-                  <a:pt x="4474715" y="0"/>
-                </a:lnTo>
-                <a:lnTo>
-                  <a:pt x="4474715" y="1033825"/>
-                </a:lnTo>
-                <a:lnTo>
-                  <a:pt x="0" y="1033825"/>
-                </a:lnTo>
-                <a:lnTo>
-                  <a:pt x="0" y="0"/>
-                </a:lnTo>
-                <a:close/>
-              </a:path>
-            </a:pathLst>
-          </a:custGeom>
-          <a:blipFill>
-            <a:blip r:embed="rId4">
-              <a:extLst>
-                <a:ext uri="{96DAC541-7B7A-43D3-8B79-37D633B846F1}">
-                  <asvg:svgBlip xmlns:asvg="http://schemas.microsoft.com/office/drawing/2016/SVG/main" r:embed="rId5"/>
-                </a:ext>
-              </a:extLst>
-            </a:blip>
-            <a:stretch>
-              <a:fillRect t="-473620"/>
-            </a:stretch>
-          </a:blipFill>
-        </p:spPr>
-        <p:txBody>
-          <a:bodyPr/>
-          <a:lstStyle/>
-          <a:p>
-            <a:endParaRPr lang="es-CL"/>
-          </a:p>
-        </p:txBody>
-      </p:sp>
-      <p:sp>
-        <p:nvSpPr>
-          <p:cNvPr id="21" name="TextBox 21"/>
-          <p:cNvSpPr txBox="1"/>
-          <p:nvPr/>
-        </p:nvSpPr>
-        <p:spPr>
-          <a:xfrm>
-            <a:off x="2448877" y="5079700"/>
-            <a:ext cx="6875577" cy="422697"/>
-          </a:xfrm>
-          <a:prstGeom prst="rect">
-            <a:avLst/>
-          </a:prstGeom>
-        </p:spPr>
-        <p:txBody>
-          <a:bodyPr lIns="0" tIns="0" rIns="0" bIns="0" rtlCol="0" anchor="t">
-            <a:spAutoFit/>
-          </a:bodyPr>
-          <a:lstStyle/>
-          <a:p>
-            <a:pPr marL="536161" lvl="1" indent="-268081" algn="just">
-              <a:lnSpc>
-                <a:spcPts val="3476"/>
-              </a:lnSpc>
-              <a:buFont typeface="Arial"/>
-              <a:buChar char="•"/>
-            </a:pPr>
-            <a:r>
-              <a:rPr lang="en-US" sz="2483" spc="54">
-                <a:solidFill>
-                  <a:srgbClr val="EDE8E4"/>
-                </a:solidFill>
-                <a:latin typeface="Glacial Indifference"/>
-                <a:ea typeface="Glacial Indifference"/>
-                <a:cs typeface="Glacial Indifference"/>
-                <a:sym typeface="Glacial Indifference"/>
-              </a:rPr>
-              <a:t>Gestión completa de registro de usuarios: </a:t>
-            </a:r>
-          </a:p>
-        </p:txBody>
-      </p:sp>
-      <p:sp>
-        <p:nvSpPr>
-          <p:cNvPr id="22" name="Freeform 22"/>
-          <p:cNvSpPr/>
-          <p:nvPr/>
-        </p:nvSpPr>
-        <p:spPr>
-          <a:xfrm rot="-10800000">
-            <a:off x="2448877" y="4019987"/>
-            <a:ext cx="4474715" cy="1033825"/>
-          </a:xfrm>
-          <a:custGeom>
-            <a:avLst/>
-            <a:gdLst/>
-            <a:ahLst/>
-            <a:cxnLst/>
-            <a:rect l="l" t="t" r="r" b="b"/>
-            <a:pathLst>
-              <a:path w="4474715" h="1033825">
-                <a:moveTo>
-                  <a:pt x="0" y="0"/>
-                </a:moveTo>
-                <a:lnTo>
-                  <a:pt x="4474714" y="0"/>
-                </a:lnTo>
-                <a:lnTo>
-                  <a:pt x="4474714" y="1033825"/>
-                </a:lnTo>
-                <a:lnTo>
-                  <a:pt x="0" y="1033825"/>
-                </a:lnTo>
-                <a:lnTo>
-                  <a:pt x="0" y="0"/>
-                </a:lnTo>
-                <a:close/>
-              </a:path>
-            </a:pathLst>
-          </a:custGeom>
-          <a:blipFill>
-            <a:blip r:embed="rId4">
-              <a:extLst>
-                <a:ext uri="{96DAC541-7B7A-43D3-8B79-37D633B846F1}">
-                  <asvg:svgBlip xmlns:asvg="http://schemas.microsoft.com/office/drawing/2016/SVG/main" r:embed="rId5"/>
-                </a:ext>
-              </a:extLst>
-            </a:blip>
-            <a:stretch>
-              <a:fillRect t="-473620"/>
-            </a:stretch>
-          </a:blipFill>
-        </p:spPr>
-        <p:txBody>
-          <a:bodyPr/>
-          <a:lstStyle/>
-          <a:p>
-            <a:endParaRPr lang="es-CL"/>
-          </a:p>
-        </p:txBody>
-      </p:sp>
-      <p:sp>
-        <p:nvSpPr>
-          <p:cNvPr id="23" name="Freeform 23"/>
-          <p:cNvSpPr/>
-          <p:nvPr/>
-        </p:nvSpPr>
-        <p:spPr>
-          <a:xfrm rot="-10800000">
-            <a:off x="2260215" y="4019987"/>
-            <a:ext cx="4474715" cy="1033825"/>
-          </a:xfrm>
-          <a:custGeom>
-            <a:avLst/>
-            <a:gdLst/>
-            <a:ahLst/>
-            <a:cxnLst/>
-            <a:rect l="l" t="t" r="r" b="b"/>
-            <a:pathLst>
-              <a:path w="4474715" h="1033825">
-                <a:moveTo>
-                  <a:pt x="0" y="0"/>
-                </a:moveTo>
-                <a:lnTo>
-                  <a:pt x="4474715" y="0"/>
-                </a:lnTo>
-                <a:lnTo>
-                  <a:pt x="4474715" y="1033825"/>
-                </a:lnTo>
-                <a:lnTo>
-                  <a:pt x="0" y="1033825"/>
-                </a:lnTo>
-                <a:lnTo>
-                  <a:pt x="0" y="0"/>
-                </a:lnTo>
-                <a:close/>
-              </a:path>
-            </a:pathLst>
-          </a:custGeom>
-          <a:blipFill>
-            <a:blip r:embed="rId4">
-              <a:extLst>
-                <a:ext uri="{96DAC541-7B7A-43D3-8B79-37D633B846F1}">
-                  <asvg:svgBlip xmlns:asvg="http://schemas.microsoft.com/office/drawing/2016/SVG/main" r:embed="rId5"/>
-                </a:ext>
-              </a:extLst>
-            </a:blip>
-            <a:stretch>
-              <a:fillRect t="-473620"/>
-            </a:stretch>
-          </a:blipFill>
-        </p:spPr>
-        <p:txBody>
-          <a:bodyPr/>
-          <a:lstStyle/>
-          <a:p>
-            <a:endParaRPr lang="es-CL"/>
-          </a:p>
-        </p:txBody>
-      </p:sp>
-      <p:sp>
-        <p:nvSpPr>
-          <p:cNvPr id="24" name="TextBox 24"/>
-          <p:cNvSpPr txBox="1"/>
-          <p:nvPr/>
-        </p:nvSpPr>
-        <p:spPr>
-          <a:xfrm>
-            <a:off x="3987259" y="4182215"/>
-            <a:ext cx="3804269" cy="633169"/>
-          </a:xfrm>
-          <a:prstGeom prst="rect">
-            <a:avLst/>
-          </a:prstGeom>
-        </p:spPr>
-        <p:txBody>
-          <a:bodyPr lIns="0" tIns="0" rIns="0" bIns="0" rtlCol="0" anchor="t">
-            <a:spAutoFit/>
-          </a:bodyPr>
-          <a:lstStyle/>
-          <a:p>
-            <a:pPr algn="ctr">
-              <a:lnSpc>
-                <a:spcPts val="5120"/>
-              </a:lnSpc>
-            </a:pPr>
-            <a:r>
-              <a:rPr lang="en-US" sz="3657" b="1" spc="153">
-                <a:solidFill>
-                  <a:srgbClr val="253754"/>
-                </a:solidFill>
-                <a:latin typeface="Glacial Indifference Bold"/>
-                <a:ea typeface="Glacial Indifference Bold"/>
-                <a:cs typeface="Glacial Indifference Bold"/>
-                <a:sym typeface="Glacial Indifference Bold"/>
-              </a:rPr>
-              <a:t>Alcance</a:t>
-            </a:r>
-          </a:p>
-        </p:txBody>
-      </p:sp>
-      <p:sp>
-        <p:nvSpPr>
-          <p:cNvPr id="25" name="TextBox 25"/>
-          <p:cNvSpPr txBox="1"/>
-          <p:nvPr/>
-        </p:nvSpPr>
-        <p:spPr>
-          <a:xfrm>
-            <a:off x="2448877" y="5454772"/>
-            <a:ext cx="6875577" cy="3489747"/>
-          </a:xfrm>
-          <a:prstGeom prst="rect">
-            <a:avLst/>
-          </a:prstGeom>
-        </p:spPr>
-        <p:txBody>
-          <a:bodyPr lIns="0" tIns="0" rIns="0" bIns="0" rtlCol="0" anchor="t">
-            <a:spAutoFit/>
-          </a:bodyPr>
-          <a:lstStyle/>
-          <a:p>
-            <a:pPr marL="1072322" lvl="2" indent="-357441" algn="just">
-              <a:lnSpc>
-                <a:spcPts val="3476"/>
-              </a:lnSpc>
-              <a:buFont typeface="Arial"/>
-              <a:buChar char="⚬"/>
-            </a:pPr>
-            <a:r>
-              <a:rPr lang="en-US" sz="2483" spc="54">
-                <a:solidFill>
-                  <a:srgbClr val="EDE8E4"/>
-                </a:solidFill>
-                <a:latin typeface="Glacial Indifference"/>
-                <a:ea typeface="Glacial Indifference"/>
-                <a:cs typeface="Glacial Indifference"/>
-                <a:sym typeface="Glacial Indifference"/>
-              </a:rPr>
-              <a:t>Inscripción de usuario hospedería</a:t>
-            </a:r>
-          </a:p>
-          <a:p>
-            <a:pPr marL="1072322" lvl="2" indent="-357441" algn="just">
-              <a:lnSpc>
-                <a:spcPts val="3476"/>
-              </a:lnSpc>
-              <a:buFont typeface="Arial"/>
-              <a:buChar char="⚬"/>
-            </a:pPr>
-            <a:r>
-              <a:rPr lang="en-US" sz="2483" spc="54">
-                <a:solidFill>
-                  <a:srgbClr val="EDE8E4"/>
-                </a:solidFill>
-                <a:latin typeface="Glacial Indifference"/>
-                <a:ea typeface="Glacial Indifference"/>
-                <a:cs typeface="Glacial Indifference"/>
-                <a:sym typeface="Glacial Indifference"/>
-              </a:rPr>
-              <a:t>Registro de servicios y/o sub servicios utilizados</a:t>
-            </a:r>
-          </a:p>
-          <a:p>
-            <a:pPr marL="1072322" lvl="2" indent="-357441" algn="just">
-              <a:lnSpc>
-                <a:spcPts val="3476"/>
-              </a:lnSpc>
-              <a:buFont typeface="Arial"/>
-              <a:buChar char="⚬"/>
-            </a:pPr>
-            <a:r>
-              <a:rPr lang="en-US" sz="2483" spc="54">
-                <a:solidFill>
-                  <a:srgbClr val="EDE8E4"/>
-                </a:solidFill>
-                <a:latin typeface="Glacial Indifference"/>
-                <a:ea typeface="Glacial Indifference"/>
-                <a:cs typeface="Glacial Indifference"/>
-                <a:sym typeface="Glacial Indifference"/>
-              </a:rPr>
-              <a:t>Actualización de servicios utilizados</a:t>
-            </a:r>
-          </a:p>
-          <a:p>
-            <a:pPr marL="1072322" lvl="2" indent="-357441" algn="just">
-              <a:lnSpc>
-                <a:spcPts val="3476"/>
-              </a:lnSpc>
-              <a:buFont typeface="Arial"/>
-              <a:buChar char="⚬"/>
-            </a:pPr>
-            <a:r>
-              <a:rPr lang="en-US" sz="2483" spc="54">
-                <a:solidFill>
-                  <a:srgbClr val="EDE8E4"/>
-                </a:solidFill>
-                <a:latin typeface="Glacial Indifference"/>
-                <a:ea typeface="Glacial Indifference"/>
-                <a:cs typeface="Glacial Indifference"/>
-                <a:sym typeface="Glacial Indifference"/>
-              </a:rPr>
-              <a:t>Entrada y salida</a:t>
-            </a:r>
-          </a:p>
-          <a:p>
-            <a:pPr marL="1072322" lvl="2" indent="-357441" algn="just">
-              <a:lnSpc>
-                <a:spcPts val="3476"/>
-              </a:lnSpc>
-              <a:buFont typeface="Arial"/>
-              <a:buChar char="⚬"/>
-            </a:pPr>
-            <a:r>
-              <a:rPr lang="en-US" sz="2483" spc="54">
-                <a:solidFill>
-                  <a:srgbClr val="EDE8E4"/>
-                </a:solidFill>
-                <a:latin typeface="Glacial Indifference"/>
-                <a:ea typeface="Glacial Indifference"/>
-                <a:cs typeface="Glacial Indifference"/>
-                <a:sym typeface="Glacial Indifference"/>
-              </a:rPr>
-              <a:t>Editar datos de usuario hospedería</a:t>
-            </a:r>
-          </a:p>
-          <a:p>
-            <a:pPr marL="1072322" lvl="2" indent="-357441" algn="just">
-              <a:lnSpc>
-                <a:spcPts val="3476"/>
-              </a:lnSpc>
-              <a:buFont typeface="Arial"/>
-              <a:buChar char="⚬"/>
-            </a:pPr>
-            <a:r>
-              <a:rPr lang="en-US" sz="2483" spc="54">
-                <a:solidFill>
-                  <a:srgbClr val="EDE8E4"/>
-                </a:solidFill>
-                <a:latin typeface="Glacial Indifference"/>
-                <a:ea typeface="Glacial Indifference"/>
-                <a:cs typeface="Glacial Indifference"/>
-                <a:sym typeface="Glacial Indifference"/>
-              </a:rPr>
-              <a:t>Eliminar usuario hospedería y encargado</a:t>
-            </a:r>
-          </a:p>
-          <a:p>
-            <a:pPr marL="1072322" lvl="2" indent="-357441" algn="just">
-              <a:lnSpc>
-                <a:spcPts val="3476"/>
-              </a:lnSpc>
-              <a:buFont typeface="Arial"/>
-              <a:buChar char="⚬"/>
-            </a:pPr>
-            <a:r>
-              <a:rPr lang="en-US" sz="2483" spc="54">
-                <a:solidFill>
-                  <a:srgbClr val="EDE8E4"/>
-                </a:solidFill>
-                <a:latin typeface="Glacial Indifference"/>
-                <a:ea typeface="Glacial Indifference"/>
-                <a:cs typeface="Glacial Indifference"/>
-                <a:sym typeface="Glacial Indifference"/>
-              </a:rPr>
-              <a:t>Generalización de reportes.</a:t>
-            </a:r>
-          </a:p>
-        </p:txBody>
-      </p:sp>
-    </p:spTree>
-  </p:cSld>
-  <p:clrMapOvr>
-    <a:masterClrMapping/>
-  </p:clrMapOvr>
-</p:sld>
-</file>
-
-<file path=ppt/slides/slide6.xml><?xml version="1.0" encoding="utf-8"?>
 <p:sld xmlns:a="http://schemas.openxmlformats.org/drawingml/2006/main" xmlns:r="http://schemas.openxmlformats.org/officeDocument/2006/relationships" xmlns:p="http://schemas.openxmlformats.org/presentationml/2006/main">
   <p:cSld>
     <p:bg>
@@ -11945,10 +9635,22 @@
   <p:clrMapOvr>
     <a:masterClrMapping/>
   </p:clrMapOvr>
+  <mc:AlternateContent xmlns:mc="http://schemas.openxmlformats.org/markup-compatibility/2006">
+    <mc:Choice xmlns:p14="http://schemas.microsoft.com/office/powerpoint/2010/main" Requires="p14">
+      <p:transition spd="med" p14:dur="700">
+        <p:fade/>
+      </p:transition>
+    </mc:Choice>
+    <mc:Fallback>
+      <p:transition spd="med">
+        <p:fade/>
+      </p:transition>
+    </mc:Fallback>
+  </mc:AlternateContent>
 </p:sld>
 </file>
 
-<file path=ppt/slides/slide7.xml><?xml version="1.0" encoding="utf-8"?>
+<file path=ppt/slides/slide6.xml><?xml version="1.0" encoding="utf-8"?>
 <p:sld xmlns:a="http://schemas.openxmlformats.org/drawingml/2006/main" xmlns:r="http://schemas.openxmlformats.org/officeDocument/2006/relationships" xmlns:p="http://schemas.openxmlformats.org/presentationml/2006/main">
   <p:cSld>
     <p:bg>
@@ -12594,6 +10296,466 @@
   <p:clrMapOvr>
     <a:masterClrMapping/>
   </p:clrMapOvr>
+  <mc:AlternateContent xmlns:mc="http://schemas.openxmlformats.org/markup-compatibility/2006">
+    <mc:Choice xmlns:p14="http://schemas.microsoft.com/office/powerpoint/2010/main" Requires="p14">
+      <p:transition spd="med" p14:dur="700">
+        <p:fade/>
+      </p:transition>
+    </mc:Choice>
+    <mc:Fallback>
+      <p:transition spd="med">
+        <p:fade/>
+      </p:transition>
+    </mc:Fallback>
+  </mc:AlternateContent>
+</p:sld>
+</file>
+
+<file path=ppt/slides/slide7.xml><?xml version="1.0" encoding="utf-8"?>
+<p:sld xmlns:a="http://schemas.openxmlformats.org/drawingml/2006/main" xmlns:r="http://schemas.openxmlformats.org/officeDocument/2006/relationships" xmlns:p="http://schemas.openxmlformats.org/presentationml/2006/main">
+  <p:cSld>
+    <p:bg>
+      <p:bgPr>
+        <a:solidFill>
+          <a:srgbClr val="293239"/>
+        </a:solidFill>
+        <a:effectLst/>
+      </p:bgPr>
+    </p:bg>
+    <p:spTree>
+      <p:nvGrpSpPr>
+        <p:cNvPr id="1" name=""/>
+        <p:cNvGrpSpPr/>
+        <p:nvPr/>
+      </p:nvGrpSpPr>
+      <p:grpSpPr>
+        <a:xfrm>
+          <a:off x="0" y="0"/>
+          <a:ext cx="0" cy="0"/>
+          <a:chOff x="0" y="0"/>
+          <a:chExt cx="0" cy="0"/>
+        </a:xfrm>
+      </p:grpSpPr>
+      <p:sp>
+        <p:nvSpPr>
+          <p:cNvPr id="2" name="Freeform 2"/>
+          <p:cNvSpPr/>
+          <p:nvPr/>
+        </p:nvSpPr>
+        <p:spPr>
+          <a:xfrm>
+            <a:off x="-290950" y="-2033784"/>
+            <a:ext cx="8535602" cy="7976908"/>
+          </a:xfrm>
+          <a:custGeom>
+            <a:avLst/>
+            <a:gdLst/>
+            <a:ahLst/>
+            <a:cxnLst/>
+            <a:rect l="l" t="t" r="r" b="b"/>
+            <a:pathLst>
+              <a:path w="8535602" h="7976908">
+                <a:moveTo>
+                  <a:pt x="0" y="0"/>
+                </a:moveTo>
+                <a:lnTo>
+                  <a:pt x="8535602" y="0"/>
+                </a:lnTo>
+                <a:lnTo>
+                  <a:pt x="8535602" y="7976908"/>
+                </a:lnTo>
+                <a:lnTo>
+                  <a:pt x="0" y="7976908"/>
+                </a:lnTo>
+                <a:lnTo>
+                  <a:pt x="0" y="0"/>
+                </a:lnTo>
+                <a:close/>
+              </a:path>
+            </a:pathLst>
+          </a:custGeom>
+          <a:blipFill>
+            <a:blip r:embed="rId2">
+              <a:extLst>
+                <a:ext uri="{96DAC541-7B7A-43D3-8B79-37D633B846F1}">
+                  <asvg:svgBlip xmlns:asvg="http://schemas.microsoft.com/office/drawing/2016/SVG/main" r:embed="rId3"/>
+                </a:ext>
+              </a:extLst>
+            </a:blip>
+            <a:stretch>
+              <a:fillRect/>
+            </a:stretch>
+          </a:blipFill>
+          <a:ln cap="sq">
+            <a:noFill/>
+            <a:prstDash val="solid"/>
+            <a:miter/>
+          </a:ln>
+        </p:spPr>
+        <p:txBody>
+          <a:bodyPr/>
+          <a:lstStyle/>
+          <a:p>
+            <a:endParaRPr lang="es-CL"/>
+          </a:p>
+        </p:txBody>
+      </p:sp>
+      <p:sp>
+        <p:nvSpPr>
+          <p:cNvPr id="3" name="Freeform 3"/>
+          <p:cNvSpPr/>
+          <p:nvPr/>
+        </p:nvSpPr>
+        <p:spPr>
+          <a:xfrm rot="-10151301">
+            <a:off x="11164674" y="6546853"/>
+            <a:ext cx="8535602" cy="7976908"/>
+          </a:xfrm>
+          <a:custGeom>
+            <a:avLst/>
+            <a:gdLst/>
+            <a:ahLst/>
+            <a:cxnLst/>
+            <a:rect l="l" t="t" r="r" b="b"/>
+            <a:pathLst>
+              <a:path w="8535602" h="7976908">
+                <a:moveTo>
+                  <a:pt x="0" y="0"/>
+                </a:moveTo>
+                <a:lnTo>
+                  <a:pt x="8535602" y="0"/>
+                </a:lnTo>
+                <a:lnTo>
+                  <a:pt x="8535602" y="7976908"/>
+                </a:lnTo>
+                <a:lnTo>
+                  <a:pt x="0" y="7976908"/>
+                </a:lnTo>
+                <a:lnTo>
+                  <a:pt x="0" y="0"/>
+                </a:lnTo>
+                <a:close/>
+              </a:path>
+            </a:pathLst>
+          </a:custGeom>
+          <a:blipFill>
+            <a:blip r:embed="rId2">
+              <a:extLst>
+                <a:ext uri="{96DAC541-7B7A-43D3-8B79-37D633B846F1}">
+                  <asvg:svgBlip xmlns:asvg="http://schemas.microsoft.com/office/drawing/2016/SVG/main" r:embed="rId3"/>
+                </a:ext>
+              </a:extLst>
+            </a:blip>
+            <a:stretch>
+              <a:fillRect/>
+            </a:stretch>
+          </a:blipFill>
+          <a:ln cap="sq">
+            <a:noFill/>
+            <a:prstDash val="solid"/>
+            <a:miter/>
+          </a:ln>
+        </p:spPr>
+        <p:txBody>
+          <a:bodyPr/>
+          <a:lstStyle/>
+          <a:p>
+            <a:endParaRPr lang="es-CL"/>
+          </a:p>
+        </p:txBody>
+      </p:sp>
+      <p:sp>
+        <p:nvSpPr>
+          <p:cNvPr id="4" name="Freeform 4"/>
+          <p:cNvSpPr/>
+          <p:nvPr/>
+        </p:nvSpPr>
+        <p:spPr>
+          <a:xfrm>
+            <a:off x="-1446812" y="7841762"/>
+            <a:ext cx="5482705" cy="4884592"/>
+          </a:xfrm>
+          <a:custGeom>
+            <a:avLst/>
+            <a:gdLst/>
+            <a:ahLst/>
+            <a:cxnLst/>
+            <a:rect l="l" t="t" r="r" b="b"/>
+            <a:pathLst>
+              <a:path w="5482705" h="4884592">
+                <a:moveTo>
+                  <a:pt x="0" y="0"/>
+                </a:moveTo>
+                <a:lnTo>
+                  <a:pt x="5482705" y="0"/>
+                </a:lnTo>
+                <a:lnTo>
+                  <a:pt x="5482705" y="4884591"/>
+                </a:lnTo>
+                <a:lnTo>
+                  <a:pt x="0" y="4884591"/>
+                </a:lnTo>
+                <a:lnTo>
+                  <a:pt x="0" y="0"/>
+                </a:lnTo>
+                <a:close/>
+              </a:path>
+            </a:pathLst>
+          </a:custGeom>
+          <a:blipFill>
+            <a:blip r:embed="rId4">
+              <a:extLst>
+                <a:ext uri="{96DAC541-7B7A-43D3-8B79-37D633B846F1}">
+                  <asvg:svgBlip xmlns:asvg="http://schemas.microsoft.com/office/drawing/2016/SVG/main" r:embed="rId5"/>
+                </a:ext>
+              </a:extLst>
+            </a:blip>
+            <a:stretch>
+              <a:fillRect/>
+            </a:stretch>
+          </a:blipFill>
+          <a:ln cap="sq">
+            <a:noFill/>
+            <a:prstDash val="solid"/>
+            <a:miter/>
+          </a:ln>
+        </p:spPr>
+        <p:txBody>
+          <a:bodyPr/>
+          <a:lstStyle/>
+          <a:p>
+            <a:endParaRPr lang="es-CL"/>
+          </a:p>
+        </p:txBody>
+      </p:sp>
+      <p:sp>
+        <p:nvSpPr>
+          <p:cNvPr id="5" name="Freeform 5"/>
+          <p:cNvSpPr/>
+          <p:nvPr/>
+        </p:nvSpPr>
+        <p:spPr>
+          <a:xfrm rot="10452176">
+            <a:off x="15012576" y="-2759682"/>
+            <a:ext cx="5482705" cy="4884592"/>
+          </a:xfrm>
+          <a:custGeom>
+            <a:avLst/>
+            <a:gdLst/>
+            <a:ahLst/>
+            <a:cxnLst/>
+            <a:rect l="l" t="t" r="r" b="b"/>
+            <a:pathLst>
+              <a:path w="5482705" h="4884592">
+                <a:moveTo>
+                  <a:pt x="0" y="0"/>
+                </a:moveTo>
+                <a:lnTo>
+                  <a:pt x="5482705" y="0"/>
+                </a:lnTo>
+                <a:lnTo>
+                  <a:pt x="5482705" y="4884591"/>
+                </a:lnTo>
+                <a:lnTo>
+                  <a:pt x="0" y="4884591"/>
+                </a:lnTo>
+                <a:lnTo>
+                  <a:pt x="0" y="0"/>
+                </a:lnTo>
+                <a:close/>
+              </a:path>
+            </a:pathLst>
+          </a:custGeom>
+          <a:blipFill>
+            <a:blip r:embed="rId4">
+              <a:extLst>
+                <a:ext uri="{96DAC541-7B7A-43D3-8B79-37D633B846F1}">
+                  <asvg:svgBlip xmlns:asvg="http://schemas.microsoft.com/office/drawing/2016/SVG/main" r:embed="rId5"/>
+                </a:ext>
+              </a:extLst>
+            </a:blip>
+            <a:stretch>
+              <a:fillRect/>
+            </a:stretch>
+          </a:blipFill>
+          <a:ln cap="sq">
+            <a:noFill/>
+            <a:prstDash val="solid"/>
+            <a:miter/>
+          </a:ln>
+        </p:spPr>
+        <p:txBody>
+          <a:bodyPr/>
+          <a:lstStyle/>
+          <a:p>
+            <a:endParaRPr lang="es-CL"/>
+          </a:p>
+        </p:txBody>
+      </p:sp>
+      <p:sp>
+        <p:nvSpPr>
+          <p:cNvPr id="6" name="Freeform 6"/>
+          <p:cNvSpPr/>
+          <p:nvPr/>
+        </p:nvSpPr>
+        <p:spPr>
+          <a:xfrm>
+            <a:off x="0" y="48586"/>
+            <a:ext cx="3279385" cy="806182"/>
+          </a:xfrm>
+          <a:custGeom>
+            <a:avLst/>
+            <a:gdLst/>
+            <a:ahLst/>
+            <a:cxnLst/>
+            <a:rect l="l" t="t" r="r" b="b"/>
+            <a:pathLst>
+              <a:path w="3279385" h="806182">
+                <a:moveTo>
+                  <a:pt x="0" y="0"/>
+                </a:moveTo>
+                <a:lnTo>
+                  <a:pt x="3279385" y="0"/>
+                </a:lnTo>
+                <a:lnTo>
+                  <a:pt x="3279385" y="806182"/>
+                </a:lnTo>
+                <a:lnTo>
+                  <a:pt x="0" y="806182"/>
+                </a:lnTo>
+                <a:lnTo>
+                  <a:pt x="0" y="0"/>
+                </a:lnTo>
+                <a:close/>
+              </a:path>
+            </a:pathLst>
+          </a:custGeom>
+          <a:blipFill>
+            <a:blip r:embed="rId6"/>
+            <a:stretch>
+              <a:fillRect/>
+            </a:stretch>
+          </a:blipFill>
+        </p:spPr>
+        <p:txBody>
+          <a:bodyPr/>
+          <a:lstStyle/>
+          <a:p>
+            <a:endParaRPr lang="es-CL"/>
+          </a:p>
+        </p:txBody>
+      </p:sp>
+      <p:sp>
+        <p:nvSpPr>
+          <p:cNvPr id="7" name="Freeform 7"/>
+          <p:cNvSpPr/>
+          <p:nvPr/>
+        </p:nvSpPr>
+        <p:spPr>
+          <a:xfrm>
+            <a:off x="2967241" y="1366327"/>
+            <a:ext cx="12353518" cy="8132733"/>
+          </a:xfrm>
+          <a:custGeom>
+            <a:avLst/>
+            <a:gdLst/>
+            <a:ahLst/>
+            <a:cxnLst/>
+            <a:rect l="l" t="t" r="r" b="b"/>
+            <a:pathLst>
+              <a:path w="12353518" h="8132733">
+                <a:moveTo>
+                  <a:pt x="0" y="0"/>
+                </a:moveTo>
+                <a:lnTo>
+                  <a:pt x="12353518" y="0"/>
+                </a:lnTo>
+                <a:lnTo>
+                  <a:pt x="12353518" y="8132733"/>
+                </a:lnTo>
+                <a:lnTo>
+                  <a:pt x="0" y="8132733"/>
+                </a:lnTo>
+                <a:lnTo>
+                  <a:pt x="0" y="0"/>
+                </a:lnTo>
+                <a:close/>
+              </a:path>
+            </a:pathLst>
+          </a:custGeom>
+          <a:blipFill>
+            <a:blip r:embed="rId7"/>
+            <a:stretch>
+              <a:fillRect l="-1874" r="-1874"/>
+            </a:stretch>
+          </a:blipFill>
+        </p:spPr>
+        <p:txBody>
+          <a:bodyPr/>
+          <a:lstStyle/>
+          <a:p>
+            <a:endParaRPr lang="es-CL"/>
+          </a:p>
+        </p:txBody>
+      </p:sp>
+      <p:sp>
+        <p:nvSpPr>
+          <p:cNvPr id="8" name="TextBox 8"/>
+          <p:cNvSpPr txBox="1"/>
+          <p:nvPr/>
+        </p:nvSpPr>
+        <p:spPr>
+          <a:xfrm>
+            <a:off x="6475840" y="327852"/>
+            <a:ext cx="11278089" cy="1074355"/>
+          </a:xfrm>
+          <a:prstGeom prst="rect">
+            <a:avLst/>
+          </a:prstGeom>
+        </p:spPr>
+        <p:txBody>
+          <a:bodyPr lIns="0" tIns="0" rIns="0" bIns="0" rtlCol="0" anchor="t">
+            <a:spAutoFit/>
+          </a:bodyPr>
+          <a:lstStyle/>
+          <a:p>
+            <a:pPr algn="ctr">
+              <a:lnSpc>
+                <a:spcPts val="8789"/>
+              </a:lnSpc>
+            </a:pPr>
+            <a:r>
+              <a:rPr lang="en-US" sz="6278" b="1" spc="590">
+                <a:solidFill>
+                  <a:srgbClr val="EDE8E4"/>
+                </a:solidFill>
+                <a:latin typeface="Glacial Indifference Bold"/>
+                <a:ea typeface="Glacial Indifference Bold"/>
+                <a:cs typeface="Glacial Indifference Bold"/>
+                <a:sym typeface="Glacial Indifference Bold"/>
+              </a:rPr>
+              <a:t>DIAGRAMA CASO DE USO</a:t>
+            </a:r>
+          </a:p>
+        </p:txBody>
+      </p:sp>
+    </p:spTree>
+  </p:cSld>
+  <p:clrMapOvr>
+    <a:masterClrMapping/>
+  </p:clrMapOvr>
+  <mc:AlternateContent xmlns:mc="http://schemas.openxmlformats.org/markup-compatibility/2006">
+    <mc:Choice xmlns:p14="http://schemas.microsoft.com/office/powerpoint/2010/main" Requires="p14">
+      <p:transition spd="med" p14:dur="700">
+        <p:fade/>
+      </p:transition>
+    </mc:Choice>
+    <mc:Fallback>
+      <p:transition spd="med">
+        <p:fade/>
+      </p:transition>
+    </mc:Fallback>
+  </mc:AlternateContent>
 </p:sld>
 </file>
 
@@ -12622,142 +10784,9 @@
           <a:chExt cx="0" cy="0"/>
         </a:xfrm>
       </p:grpSpPr>
-      <p:grpSp>
-        <p:nvGrpSpPr>
-          <p:cNvPr id="2" name="Group 2"/>
-          <p:cNvGrpSpPr/>
-          <p:nvPr/>
-        </p:nvGrpSpPr>
-        <p:grpSpPr>
-          <a:xfrm>
-            <a:off x="241138" y="3012985"/>
-            <a:ext cx="14822094" cy="7108760"/>
-            <a:chOff x="0" y="0"/>
-            <a:chExt cx="4803064" cy="2303576"/>
-          </a:xfrm>
-        </p:grpSpPr>
-        <p:sp>
-          <p:nvSpPr>
-            <p:cNvPr id="3" name="Freeform 3"/>
-            <p:cNvSpPr/>
-            <p:nvPr/>
-          </p:nvSpPr>
-          <p:spPr>
-            <a:xfrm>
-              <a:off x="0" y="0"/>
-              <a:ext cx="4803063" cy="2303576"/>
-            </a:xfrm>
-            <a:custGeom>
-              <a:avLst/>
-              <a:gdLst/>
-              <a:ahLst/>
-              <a:cxnLst/>
-              <a:rect l="l" t="t" r="r" b="b"/>
-              <a:pathLst>
-                <a:path w="4803063" h="2303576">
-                  <a:moveTo>
-                    <a:pt x="20371" y="0"/>
-                  </a:moveTo>
-                  <a:lnTo>
-                    <a:pt x="4782693" y="0"/>
-                  </a:lnTo>
-                  <a:cubicBezTo>
-                    <a:pt x="4788095" y="0"/>
-                    <a:pt x="4793277" y="2146"/>
-                    <a:pt x="4797097" y="5966"/>
-                  </a:cubicBezTo>
-                  <a:cubicBezTo>
-                    <a:pt x="4800917" y="9787"/>
-                    <a:pt x="4803063" y="14968"/>
-                    <a:pt x="4803063" y="20371"/>
-                  </a:cubicBezTo>
-                  <a:lnTo>
-                    <a:pt x="4803063" y="2283206"/>
-                  </a:lnTo>
-                  <a:cubicBezTo>
-                    <a:pt x="4803063" y="2294456"/>
-                    <a:pt x="4793943" y="2303576"/>
-                    <a:pt x="4782693" y="2303576"/>
-                  </a:cubicBezTo>
-                  <a:lnTo>
-                    <a:pt x="20371" y="2303576"/>
-                  </a:lnTo>
-                  <a:cubicBezTo>
-                    <a:pt x="14968" y="2303576"/>
-                    <a:pt x="9787" y="2301430"/>
-                    <a:pt x="5966" y="2297610"/>
-                  </a:cubicBezTo>
-                  <a:cubicBezTo>
-                    <a:pt x="2146" y="2293790"/>
-                    <a:pt x="0" y="2288608"/>
-                    <a:pt x="0" y="2283206"/>
-                  </a:cubicBezTo>
-                  <a:lnTo>
-                    <a:pt x="0" y="20371"/>
-                  </a:lnTo>
-                  <a:cubicBezTo>
-                    <a:pt x="0" y="14968"/>
-                    <a:pt x="2146" y="9787"/>
-                    <a:pt x="5966" y="5966"/>
-                  </a:cubicBezTo>
-                  <a:cubicBezTo>
-                    <a:pt x="9787" y="2146"/>
-                    <a:pt x="14968" y="0"/>
-                    <a:pt x="20371" y="0"/>
-                  </a:cubicBezTo>
-                  <a:close/>
-                </a:path>
-              </a:pathLst>
-            </a:custGeom>
-            <a:solidFill>
-              <a:srgbClr val="293239"/>
-            </a:solidFill>
-            <a:ln cap="rnd">
-              <a:noFill/>
-              <a:prstDash val="solid"/>
-              <a:round/>
-            </a:ln>
-          </p:spPr>
-          <p:txBody>
-            <a:bodyPr/>
-            <a:lstStyle/>
-            <a:p>
-              <a:endParaRPr lang="es-CL"/>
-            </a:p>
-          </p:txBody>
-        </p:sp>
-        <p:sp>
-          <p:nvSpPr>
-            <p:cNvPr id="4" name="TextBox 4"/>
-            <p:cNvSpPr txBox="1"/>
-            <p:nvPr/>
-          </p:nvSpPr>
-          <p:spPr>
-            <a:xfrm>
-              <a:off x="0" y="9525"/>
-              <a:ext cx="4803064" cy="2294051"/>
-            </a:xfrm>
-            <a:prstGeom prst="rect">
-              <a:avLst/>
-            </a:prstGeom>
-          </p:spPr>
-          <p:txBody>
-            <a:bodyPr lIns="50800" tIns="50800" rIns="50800" bIns="50800" rtlCol="0" anchor="ctr"/>
-            <a:lstStyle/>
-            <a:p>
-              <a:pPr algn="ctr">
-                <a:lnSpc>
-                  <a:spcPts val="2121"/>
-                </a:lnSpc>
-              </a:pPr>
-              <a:endParaRPr/>
-            </a:p>
-          </p:txBody>
-        </p:sp>
-      </p:grpSp>
-      <p:sp>
-        <p:nvSpPr>
-          <p:cNvPr id="5" name="Freeform 5"/>
+      <p:sp>
+        <p:nvSpPr>
+          <p:cNvPr id="2" name="Freeform 2"/>
           <p:cNvSpPr/>
           <p:nvPr/>
         </p:nvSpPr>
@@ -12821,7 +10850,7 @@
       </p:sp>
       <p:sp>
         <p:nvSpPr>
-          <p:cNvPr id="6" name="Freeform 6"/>
+          <p:cNvPr id="3" name="Freeform 3"/>
           <p:cNvSpPr/>
           <p:nvPr/>
         </p:nvSpPr>
@@ -12885,7 +10914,7 @@
       </p:sp>
       <p:sp>
         <p:nvSpPr>
-          <p:cNvPr id="7" name="Freeform 7"/>
+          <p:cNvPr id="4" name="Freeform 4"/>
           <p:cNvSpPr/>
           <p:nvPr/>
         </p:nvSpPr>
@@ -12949,7 +10978,7 @@
       </p:sp>
       <p:sp>
         <p:nvSpPr>
-          <p:cNvPr id="8" name="Freeform 8"/>
+          <p:cNvPr id="5" name="Freeform 5"/>
           <p:cNvSpPr/>
           <p:nvPr/>
         </p:nvSpPr>
@@ -13013,13 +11042,13 @@
       </p:sp>
       <p:grpSp>
         <p:nvGrpSpPr>
-          <p:cNvPr id="9" name="Group 9"/>
+          <p:cNvPr id="6" name="Group 6"/>
           <p:cNvGrpSpPr/>
           <p:nvPr/>
         </p:nvGrpSpPr>
         <p:grpSpPr>
           <a:xfrm>
-            <a:off x="10662906" y="165255"/>
+            <a:off x="10350238" y="165255"/>
             <a:ext cx="6232665" cy="9956491"/>
             <a:chOff x="0" y="0"/>
             <a:chExt cx="2019680" cy="3226377"/>
@@ -13027,7 +11056,7 @@
         </p:grpSpPr>
         <p:sp>
           <p:nvSpPr>
-            <p:cNvPr id="10" name="Freeform 10"/>
+            <p:cNvPr id="7" name="Freeform 7"/>
             <p:cNvSpPr/>
             <p:nvPr/>
           </p:nvSpPr>
@@ -13107,7 +11136,7 @@
         </p:sp>
         <p:sp>
           <p:nvSpPr>
-            <p:cNvPr id="11" name="TextBox 11"/>
+            <p:cNvPr id="8" name="TextBox 8"/>
             <p:cNvSpPr txBox="1"/>
             <p:nvPr/>
           </p:nvSpPr>
@@ -13136,7 +11165,7 @@
       </p:grpSp>
       <p:sp>
         <p:nvSpPr>
-          <p:cNvPr id="12" name="Freeform 12"/>
+          <p:cNvPr id="9" name="Freeform 9"/>
           <p:cNvSpPr/>
           <p:nvPr/>
         </p:nvSpPr>
@@ -13200,7 +11229,7 @@
       </p:sp>
       <p:sp>
         <p:nvSpPr>
-          <p:cNvPr id="13" name="Freeform 13"/>
+          <p:cNvPr id="10" name="Freeform 10"/>
           <p:cNvSpPr/>
           <p:nvPr/>
         </p:nvSpPr>
@@ -13264,7 +11293,7 @@
       </p:sp>
       <p:sp>
         <p:nvSpPr>
-          <p:cNvPr id="14" name="Freeform 14"/>
+          <p:cNvPr id="11" name="Freeform 11"/>
           <p:cNvSpPr/>
           <p:nvPr/>
         </p:nvSpPr>
@@ -13317,13 +11346,13 @@
       </p:sp>
       <p:sp>
         <p:nvSpPr>
-          <p:cNvPr id="15" name="Freeform 15"/>
+          <p:cNvPr id="12" name="Freeform 12"/>
           <p:cNvSpPr/>
           <p:nvPr/>
         </p:nvSpPr>
         <p:spPr>
           <a:xfrm>
-            <a:off x="11052658" y="454899"/>
+            <a:off x="10739990" y="454899"/>
             <a:ext cx="5394331" cy="9366136"/>
           </a:xfrm>
           <a:custGeom>
@@ -13368,6 +11397,134 @@
           </a:p>
         </p:txBody>
       </p:sp>
+      <p:grpSp>
+        <p:nvGrpSpPr>
+          <p:cNvPr id="13" name="Group 13"/>
+          <p:cNvGrpSpPr/>
+          <p:nvPr/>
+        </p:nvGrpSpPr>
+        <p:grpSpPr>
+          <a:xfrm>
+            <a:off x="1111618" y="3912462"/>
+            <a:ext cx="9456025" cy="4842312"/>
+            <a:chOff x="0" y="0"/>
+            <a:chExt cx="3064202" cy="1569139"/>
+          </a:xfrm>
+        </p:grpSpPr>
+        <p:sp>
+          <p:nvSpPr>
+            <p:cNvPr id="14" name="Freeform 14"/>
+            <p:cNvSpPr/>
+            <p:nvPr/>
+          </p:nvSpPr>
+          <p:spPr>
+            <a:xfrm>
+              <a:off x="0" y="0"/>
+              <a:ext cx="3064202" cy="1569139"/>
+            </a:xfrm>
+            <a:custGeom>
+              <a:avLst/>
+              <a:gdLst/>
+              <a:ahLst/>
+              <a:cxnLst/>
+              <a:rect l="l" t="t" r="r" b="b"/>
+              <a:pathLst>
+                <a:path w="3064202" h="1569139">
+                  <a:moveTo>
+                    <a:pt x="31930" y="0"/>
+                  </a:moveTo>
+                  <a:lnTo>
+                    <a:pt x="3032272" y="0"/>
+                  </a:lnTo>
+                  <a:cubicBezTo>
+                    <a:pt x="3040740" y="0"/>
+                    <a:pt x="3048862" y="3364"/>
+                    <a:pt x="3054850" y="9352"/>
+                  </a:cubicBezTo>
+                  <a:cubicBezTo>
+                    <a:pt x="3060838" y="15340"/>
+                    <a:pt x="3064202" y="23462"/>
+                    <a:pt x="3064202" y="31930"/>
+                  </a:cubicBezTo>
+                  <a:lnTo>
+                    <a:pt x="3064202" y="1537209"/>
+                  </a:lnTo>
+                  <a:cubicBezTo>
+                    <a:pt x="3064202" y="1554844"/>
+                    <a:pt x="3049906" y="1569139"/>
+                    <a:pt x="3032272" y="1569139"/>
+                  </a:cubicBezTo>
+                  <a:lnTo>
+                    <a:pt x="31930" y="1569139"/>
+                  </a:lnTo>
+                  <a:cubicBezTo>
+                    <a:pt x="23462" y="1569139"/>
+                    <a:pt x="15340" y="1565775"/>
+                    <a:pt x="9352" y="1559787"/>
+                  </a:cubicBezTo>
+                  <a:cubicBezTo>
+                    <a:pt x="3364" y="1553799"/>
+                    <a:pt x="0" y="1545677"/>
+                    <a:pt x="0" y="1537209"/>
+                  </a:cubicBezTo>
+                  <a:lnTo>
+                    <a:pt x="0" y="31930"/>
+                  </a:lnTo>
+                  <a:cubicBezTo>
+                    <a:pt x="0" y="14296"/>
+                    <a:pt x="14296" y="0"/>
+                    <a:pt x="31930" y="0"/>
+                  </a:cubicBezTo>
+                  <a:close/>
+                </a:path>
+              </a:pathLst>
+            </a:custGeom>
+            <a:solidFill>
+              <a:srgbClr val="293239"/>
+            </a:solidFill>
+            <a:ln cap="rnd">
+              <a:noFill/>
+              <a:prstDash val="solid"/>
+              <a:round/>
+            </a:ln>
+          </p:spPr>
+          <p:txBody>
+            <a:bodyPr/>
+            <a:lstStyle/>
+            <a:p>
+              <a:endParaRPr lang="es-CL"/>
+            </a:p>
+          </p:txBody>
+        </p:sp>
+        <p:sp>
+          <p:nvSpPr>
+            <p:cNvPr id="15" name="TextBox 15"/>
+            <p:cNvSpPr txBox="1"/>
+            <p:nvPr/>
+          </p:nvSpPr>
+          <p:spPr>
+            <a:xfrm>
+              <a:off x="0" y="9525"/>
+              <a:ext cx="3064202" cy="1559614"/>
+            </a:xfrm>
+            <a:prstGeom prst="rect">
+              <a:avLst/>
+            </a:prstGeom>
+          </p:spPr>
+          <p:txBody>
+            <a:bodyPr lIns="50800" tIns="50800" rIns="50800" bIns="50800" rtlCol="0" anchor="ctr"/>
+            <a:lstStyle/>
+            <a:p>
+              <a:pPr algn="ctr">
+                <a:lnSpc>
+                  <a:spcPts val="2121"/>
+                </a:lnSpc>
+              </a:pPr>
+              <a:endParaRPr/>
+            </a:p>
+          </p:txBody>
+        </p:sp>
+      </p:grpSp>
       <p:sp>
         <p:nvSpPr>
           <p:cNvPr id="16" name="Freeform 16"/>
@@ -13376,8 +11533,8 @@
         </p:nvSpPr>
         <p:spPr>
           <a:xfrm>
-            <a:off x="438131" y="3210951"/>
-            <a:ext cx="10224775" cy="6646104"/>
+            <a:off x="1277561" y="4051210"/>
+            <a:ext cx="9050522" cy="4581827"/>
           </a:xfrm>
           <a:custGeom>
             <a:avLst/>
@@ -13386,18 +11543,18 @@
             <a:cxnLst/>
             <a:rect l="l" t="t" r="r" b="b"/>
             <a:pathLst>
-              <a:path w="10224775" h="6646104">
+              <a:path w="9050522" h="4581827">
                 <a:moveTo>
                   <a:pt x="0" y="0"/>
                 </a:moveTo>
                 <a:lnTo>
-                  <a:pt x="10224775" y="0"/>
-                </a:lnTo>
-                <a:lnTo>
-                  <a:pt x="10224775" y="6646104"/>
-                </a:lnTo>
-                <a:lnTo>
-                  <a:pt x="0" y="6646104"/>
+                  <a:pt x="9050522" y="0"/>
+                </a:lnTo>
+                <a:lnTo>
+                  <a:pt x="9050522" y="4581827"/>
+                </a:lnTo>
+                <a:lnTo>
+                  <a:pt x="0" y="4581827"/>
                 </a:lnTo>
                 <a:lnTo>
                   <a:pt x="0" y="0"/>
@@ -13409,7 +11566,7 @@
           <a:blipFill>
             <a:blip r:embed="rId10"/>
             <a:stretch>
-              <a:fillRect l="-1181" r="-1181"/>
+              <a:fillRect/>
             </a:stretch>
           </a:blipFill>
         </p:spPr>
@@ -13470,7 +11627,7 @@
         </p:nvSpPr>
         <p:spPr>
           <a:xfrm>
-            <a:off x="438131" y="923925"/>
+            <a:off x="49111" y="923925"/>
             <a:ext cx="6460548" cy="966389"/>
           </a:xfrm>
           <a:prstGeom prst="rect">
@@ -13508,6 +11665,18 @@
   <p:clrMapOvr>
     <a:masterClrMapping/>
   </p:clrMapOvr>
+  <mc:AlternateContent xmlns:mc="http://schemas.openxmlformats.org/markup-compatibility/2006">
+    <mc:Choice xmlns:p14="http://schemas.microsoft.com/office/powerpoint/2010/main" Requires="p14">
+      <p:transition spd="med" p14:dur="700">
+        <p:fade/>
+      </p:transition>
+    </mc:Choice>
+    <mc:Fallback>
+      <p:transition spd="med">
+        <p:fade/>
+      </p:transition>
+    </mc:Fallback>
+  </mc:AlternateContent>
 </p:sld>
 </file>
 
@@ -14157,6 +12326,18 @@
   <p:clrMapOvr>
     <a:masterClrMapping/>
   </p:clrMapOvr>
+  <mc:AlternateContent xmlns:mc="http://schemas.openxmlformats.org/markup-compatibility/2006">
+    <mc:Choice xmlns:p14="http://schemas.microsoft.com/office/powerpoint/2010/main" Requires="p14">
+      <p:transition spd="med" p14:dur="700">
+        <p:fade/>
+      </p:transition>
+    </mc:Choice>
+    <mc:Fallback>
+      <p:transition spd="med">
+        <p:fade/>
+      </p:transition>
+    </mc:Fallback>
+  </mc:AlternateContent>
 </p:sld>
 </file>
 

--- a/Fase 2/Evidencias Proyecto/ServiHos Presentación.pptx
+++ b/Fase 2/Evidencias Proyecto/ServiHos Presentación.pptx
@@ -23,16 +23,23 @@
   <p:notesSz cx="6858000" cy="9144000"/>
   <p:embeddedFontLst>
     <p:embeddedFont>
+      <p:font typeface="Calibri" panose="020F0502020204030204" pitchFamily="34" charset="0"/>
+      <p:regular r:id="rId15"/>
+      <p:bold r:id="rId16"/>
+      <p:italic r:id="rId17"/>
+      <p:boldItalic r:id="rId18"/>
+    </p:embeddedFont>
+    <p:embeddedFont>
       <p:font typeface="Glacial Indifference" panose="020B0604020202020204" charset="0"/>
-      <p:regular r:id="rId15"/>
+      <p:regular r:id="rId19"/>
     </p:embeddedFont>
     <p:embeddedFont>
       <p:font typeface="Glacial Indifference Bold" panose="020B0604020202020204" charset="0"/>
-      <p:regular r:id="rId16"/>
+      <p:regular r:id="rId20"/>
     </p:embeddedFont>
     <p:embeddedFont>
       <p:font typeface="Open Sans Bold" panose="020B0604020202020204" charset="0"/>
-      <p:regular r:id="rId17"/>
+      <p:regular r:id="rId21"/>
     </p:embeddedFont>
   </p:embeddedFontLst>
   <p:defaultTextStyle>
@@ -329,7 +336,7 @@
             <a:fld id="{1D8BD707-D9CF-40AE-B4C6-C98DA3205C09}" type="datetimeFigureOut">
               <a:rPr lang="en-US" smtClean="0"/>
               <a:pPr/>
-              <a:t>7/5/2025</a:t>
+              <a:t>7/8/2025</a:t>
             </a:fld>
             <a:endParaRPr lang="en-US"/>
           </a:p>
@@ -494,7 +501,7 @@
             <a:fld id="{1D8BD707-D9CF-40AE-B4C6-C98DA3205C09}" type="datetimeFigureOut">
               <a:rPr lang="en-US" smtClean="0"/>
               <a:pPr/>
-              <a:t>7/5/2025</a:t>
+              <a:t>7/8/2025</a:t>
             </a:fld>
             <a:endParaRPr lang="en-US"/>
           </a:p>
@@ -669,7 +676,7 @@
             <a:fld id="{1D8BD707-D9CF-40AE-B4C6-C98DA3205C09}" type="datetimeFigureOut">
               <a:rPr lang="en-US" smtClean="0"/>
               <a:pPr/>
-              <a:t>7/5/2025</a:t>
+              <a:t>7/8/2025</a:t>
             </a:fld>
             <a:endParaRPr lang="en-US"/>
           </a:p>
@@ -834,7 +841,7 @@
             <a:fld id="{1D8BD707-D9CF-40AE-B4C6-C98DA3205C09}" type="datetimeFigureOut">
               <a:rPr lang="en-US" smtClean="0"/>
               <a:pPr/>
-              <a:t>7/5/2025</a:t>
+              <a:t>7/8/2025</a:t>
             </a:fld>
             <a:endParaRPr lang="en-US"/>
           </a:p>
@@ -1076,7 +1083,7 @@
             <a:fld id="{1D8BD707-D9CF-40AE-B4C6-C98DA3205C09}" type="datetimeFigureOut">
               <a:rPr lang="en-US" smtClean="0"/>
               <a:pPr/>
-              <a:t>7/5/2025</a:t>
+              <a:t>7/8/2025</a:t>
             </a:fld>
             <a:endParaRPr lang="en-US"/>
           </a:p>
@@ -1358,7 +1365,7 @@
             <a:fld id="{1D8BD707-D9CF-40AE-B4C6-C98DA3205C09}" type="datetimeFigureOut">
               <a:rPr lang="en-US" smtClean="0"/>
               <a:pPr/>
-              <a:t>7/5/2025</a:t>
+              <a:t>7/8/2025</a:t>
             </a:fld>
             <a:endParaRPr lang="en-US"/>
           </a:p>
@@ -1774,7 +1781,7 @@
             <a:fld id="{1D8BD707-D9CF-40AE-B4C6-C98DA3205C09}" type="datetimeFigureOut">
               <a:rPr lang="en-US" smtClean="0"/>
               <a:pPr/>
-              <a:t>7/5/2025</a:t>
+              <a:t>7/8/2025</a:t>
             </a:fld>
             <a:endParaRPr lang="en-US"/>
           </a:p>
@@ -1888,7 +1895,7 @@
             <a:fld id="{1D8BD707-D9CF-40AE-B4C6-C98DA3205C09}" type="datetimeFigureOut">
               <a:rPr lang="en-US" smtClean="0"/>
               <a:pPr/>
-              <a:t>7/5/2025</a:t>
+              <a:t>7/8/2025</a:t>
             </a:fld>
             <a:endParaRPr lang="en-US"/>
           </a:p>
@@ -1980,7 +1987,7 @@
             <a:fld id="{1D8BD707-D9CF-40AE-B4C6-C98DA3205C09}" type="datetimeFigureOut">
               <a:rPr lang="en-US" smtClean="0"/>
               <a:pPr/>
-              <a:t>7/5/2025</a:t>
+              <a:t>7/8/2025</a:t>
             </a:fld>
             <a:endParaRPr lang="en-US"/>
           </a:p>
@@ -2252,7 +2259,7 @@
             <a:fld id="{1D8BD707-D9CF-40AE-B4C6-C98DA3205C09}" type="datetimeFigureOut">
               <a:rPr lang="en-US" smtClean="0"/>
               <a:pPr/>
-              <a:t>7/5/2025</a:t>
+              <a:t>7/8/2025</a:t>
             </a:fld>
             <a:endParaRPr lang="en-US"/>
           </a:p>
@@ -2501,7 +2508,7 @@
             <a:fld id="{1D8BD707-D9CF-40AE-B4C6-C98DA3205C09}" type="datetimeFigureOut">
               <a:rPr lang="en-US" smtClean="0"/>
               <a:pPr/>
-              <a:t>7/5/2025</a:t>
+              <a:t>7/8/2025</a:t>
             </a:fld>
             <a:endParaRPr lang="en-US"/>
           </a:p>
@@ -2709,7 +2716,7 @@
             <a:fld id="{1D8BD707-D9CF-40AE-B4C6-C98DA3205C09}" type="datetimeFigureOut">
               <a:rPr lang="en-US" smtClean="0"/>
               <a:pPr/>
-              <a:t>7/5/2025</a:t>
+              <a:t>7/8/2025</a:t>
             </a:fld>
             <a:endParaRPr lang="en-US"/>
           </a:p>
@@ -3637,13 +3644,13 @@
   <p:clrMapOvr>
     <a:masterClrMapping/>
   </p:clrMapOvr>
-  <mc:AlternateContent xmlns:mc="http://schemas.openxmlformats.org/markup-compatibility/2006">
-    <mc:Choice xmlns:p14="http://schemas.microsoft.com/office/powerpoint/2010/main" Requires="p14">
+  <mc:AlternateContent xmlns:mc="http://schemas.openxmlformats.org/markup-compatibility/2006" xmlns:p14="http://schemas.microsoft.com/office/powerpoint/2010/main">
+    <mc:Choice Requires="p14">
       <p:transition spd="med" p14:dur="700">
         <p:fade/>
       </p:transition>
     </mc:Choice>
-    <mc:Fallback>
+    <mc:Fallback xmlns="">
       <p:transition spd="med">
         <p:fade/>
       </p:transition>
@@ -4350,13 +4357,13 @@
   <p:clrMapOvr>
     <a:masterClrMapping/>
   </p:clrMapOvr>
-  <mc:AlternateContent xmlns:mc="http://schemas.openxmlformats.org/markup-compatibility/2006">
-    <mc:Choice xmlns:p14="http://schemas.microsoft.com/office/powerpoint/2010/main" Requires="p14">
+  <mc:AlternateContent xmlns:mc="http://schemas.openxmlformats.org/markup-compatibility/2006" xmlns:p14="http://schemas.microsoft.com/office/powerpoint/2010/main">
+    <mc:Choice Requires="p14">
       <p:transition spd="med" p14:dur="700">
         <p:fade/>
       </p:transition>
     </mc:Choice>
-    <mc:Fallback>
+    <mc:Fallback xmlns="">
       <p:transition spd="med">
         <p:fade/>
       </p:transition>
@@ -4830,13 +4837,13 @@
   <p:clrMapOvr>
     <a:masterClrMapping/>
   </p:clrMapOvr>
-  <mc:AlternateContent xmlns:mc="http://schemas.openxmlformats.org/markup-compatibility/2006">
-    <mc:Choice xmlns:p14="http://schemas.microsoft.com/office/powerpoint/2010/main" Requires="p14">
+  <mc:AlternateContent xmlns:mc="http://schemas.openxmlformats.org/markup-compatibility/2006" xmlns:p14="http://schemas.microsoft.com/office/powerpoint/2010/main">
+    <mc:Choice Requires="p14">
       <p:transition spd="med" p14:dur="700">
         <p:fade/>
       </p:transition>
     </mc:Choice>
-    <mc:Fallback>
+    <mc:Fallback xmlns="">
       <p:transition spd="med">
         <p:fade/>
       </p:transition>
@@ -5266,13 +5273,13 @@
   <p:clrMapOvr>
     <a:masterClrMapping/>
   </p:clrMapOvr>
-  <mc:AlternateContent xmlns:mc="http://schemas.openxmlformats.org/markup-compatibility/2006">
-    <mc:Choice xmlns:p14="http://schemas.microsoft.com/office/powerpoint/2010/main" Requires="p14">
+  <mc:AlternateContent xmlns:mc="http://schemas.openxmlformats.org/markup-compatibility/2006" xmlns:p14="http://schemas.microsoft.com/office/powerpoint/2010/main">
+    <mc:Choice Requires="p14">
       <p:transition spd="med" p14:dur="700">
         <p:fade/>
       </p:transition>
     </mc:Choice>
-    <mc:Fallback>
+    <mc:Fallback xmlns="">
       <p:transition spd="med">
         <p:fade/>
       </p:transition>
@@ -5500,13 +5507,13 @@
   <p:clrMapOvr>
     <a:masterClrMapping/>
   </p:clrMapOvr>
-  <mc:AlternateContent xmlns:mc="http://schemas.openxmlformats.org/markup-compatibility/2006">
-    <mc:Choice xmlns:p14="http://schemas.microsoft.com/office/powerpoint/2010/main" Requires="p14">
+  <mc:AlternateContent xmlns:mc="http://schemas.openxmlformats.org/markup-compatibility/2006" xmlns:p14="http://schemas.microsoft.com/office/powerpoint/2010/main">
+    <mc:Choice Requires="p14">
       <p:transition spd="med" p14:dur="700">
         <p:fade/>
       </p:transition>
     </mc:Choice>
-    <mc:Fallback>
+    <mc:Fallback xmlns="">
       <p:transition spd="med">
         <p:fade/>
       </p:transition>
@@ -6108,13 +6115,13 @@
   <p:clrMapOvr>
     <a:masterClrMapping/>
   </p:clrMapOvr>
-  <mc:AlternateContent xmlns:mc="http://schemas.openxmlformats.org/markup-compatibility/2006">
-    <mc:Choice xmlns:p14="http://schemas.microsoft.com/office/powerpoint/2010/main" Requires="p14">
+  <mc:AlternateContent xmlns:mc="http://schemas.openxmlformats.org/markup-compatibility/2006" xmlns:p14="http://schemas.microsoft.com/office/powerpoint/2010/main">
+    <mc:Choice Requires="p14">
       <p:transition spd="med" p14:dur="700">
         <p:fade/>
       </p:transition>
     </mc:Choice>
-    <mc:Fallback>
+    <mc:Fallback xmlns="">
       <p:transition spd="med">
         <p:fade/>
       </p:transition>
@@ -7251,13 +7258,13 @@
   <p:clrMapOvr>
     <a:masterClrMapping/>
   </p:clrMapOvr>
-  <mc:AlternateContent xmlns:mc="http://schemas.openxmlformats.org/markup-compatibility/2006">
-    <mc:Choice xmlns:p14="http://schemas.microsoft.com/office/powerpoint/2010/main" Requires="p14">
+  <mc:AlternateContent xmlns:mc="http://schemas.openxmlformats.org/markup-compatibility/2006" xmlns:p14="http://schemas.microsoft.com/office/powerpoint/2010/main">
+    <mc:Choice Requires="p14">
       <p:transition spd="med" p14:dur="700">
         <p:fade/>
       </p:transition>
     </mc:Choice>
-    <mc:Fallback>
+    <mc:Fallback xmlns="">
       <p:transition spd="med">
         <p:fade/>
       </p:transition>
@@ -8377,13 +8384,13 @@
   <p:clrMapOvr>
     <a:masterClrMapping/>
   </p:clrMapOvr>
-  <mc:AlternateContent xmlns:mc="http://schemas.openxmlformats.org/markup-compatibility/2006">
-    <mc:Choice xmlns:p14="http://schemas.microsoft.com/office/powerpoint/2010/main" Requires="p14">
+  <mc:AlternateContent xmlns:mc="http://schemas.openxmlformats.org/markup-compatibility/2006" xmlns:p14="http://schemas.microsoft.com/office/powerpoint/2010/main">
+    <mc:Choice Requires="p14">
       <p:transition spd="med" p14:dur="700">
         <p:fade/>
       </p:transition>
     </mc:Choice>
-    <mc:Fallback>
+    <mc:Fallback xmlns="">
       <p:transition spd="med">
         <p:fade/>
       </p:transition>
@@ -9635,13 +9642,13 @@
   <p:clrMapOvr>
     <a:masterClrMapping/>
   </p:clrMapOvr>
-  <mc:AlternateContent xmlns:mc="http://schemas.openxmlformats.org/markup-compatibility/2006">
-    <mc:Choice xmlns:p14="http://schemas.microsoft.com/office/powerpoint/2010/main" Requires="p14">
+  <mc:AlternateContent xmlns:mc="http://schemas.openxmlformats.org/markup-compatibility/2006" xmlns:p14="http://schemas.microsoft.com/office/powerpoint/2010/main">
+    <mc:Choice Requires="p14">
       <p:transition spd="med" p14:dur="700">
         <p:fade/>
       </p:transition>
     </mc:Choice>
-    <mc:Fallback>
+    <mc:Fallback xmlns="">
       <p:transition spd="med">
         <p:fade/>
       </p:transition>
@@ -10296,13 +10303,13 @@
   <p:clrMapOvr>
     <a:masterClrMapping/>
   </p:clrMapOvr>
-  <mc:AlternateContent xmlns:mc="http://schemas.openxmlformats.org/markup-compatibility/2006">
-    <mc:Choice xmlns:p14="http://schemas.microsoft.com/office/powerpoint/2010/main" Requires="p14">
+  <mc:AlternateContent xmlns:mc="http://schemas.openxmlformats.org/markup-compatibility/2006" xmlns:p14="http://schemas.microsoft.com/office/powerpoint/2010/main">
+    <mc:Choice Requires="p14">
       <p:transition spd="med" p14:dur="700">
         <p:fade/>
       </p:transition>
     </mc:Choice>
-    <mc:Fallback>
+    <mc:Fallback xmlns="">
       <p:transition spd="med">
         <p:fade/>
       </p:transition>
@@ -10744,13 +10751,13 @@
   <p:clrMapOvr>
     <a:masterClrMapping/>
   </p:clrMapOvr>
-  <mc:AlternateContent xmlns:mc="http://schemas.openxmlformats.org/markup-compatibility/2006">
-    <mc:Choice xmlns:p14="http://schemas.microsoft.com/office/powerpoint/2010/main" Requires="p14">
+  <mc:AlternateContent xmlns:mc="http://schemas.openxmlformats.org/markup-compatibility/2006" xmlns:p14="http://schemas.microsoft.com/office/powerpoint/2010/main">
+    <mc:Choice Requires="p14">
       <p:transition spd="med" p14:dur="700">
         <p:fade/>
       </p:transition>
     </mc:Choice>
-    <mc:Fallback>
+    <mc:Fallback xmlns="">
       <p:transition spd="med">
         <p:fade/>
       </p:transition>
@@ -11665,13 +11672,13 @@
   <p:clrMapOvr>
     <a:masterClrMapping/>
   </p:clrMapOvr>
-  <mc:AlternateContent xmlns:mc="http://schemas.openxmlformats.org/markup-compatibility/2006">
-    <mc:Choice xmlns:p14="http://schemas.microsoft.com/office/powerpoint/2010/main" Requires="p14">
+  <mc:AlternateContent xmlns:mc="http://schemas.openxmlformats.org/markup-compatibility/2006" xmlns:p14="http://schemas.microsoft.com/office/powerpoint/2010/main">
+    <mc:Choice Requires="p14">
       <p:transition spd="med" p14:dur="700">
         <p:fade/>
       </p:transition>
     </mc:Choice>
-    <mc:Fallback>
+    <mc:Fallback xmlns="">
       <p:transition spd="med">
         <p:fade/>
       </p:transition>
@@ -12054,8 +12061,8 @@
         </p:nvGrpSpPr>
         <p:grpSpPr>
           <a:xfrm>
-            <a:off x="1260576" y="2312017"/>
-            <a:ext cx="15766847" cy="7264556"/>
+            <a:off x="744452" y="1866900"/>
+            <a:ext cx="16282971" cy="8382000"/>
             <a:chOff x="0" y="0"/>
             <a:chExt cx="4152585" cy="1913299"/>
           </a:xfrm>
@@ -12229,59 +12236,6 @@
       </p:sp>
       <p:sp>
         <p:nvSpPr>
-          <p:cNvPr id="13" name="Freeform 13"/>
-          <p:cNvSpPr/>
-          <p:nvPr/>
-        </p:nvSpPr>
-        <p:spPr>
-          <a:xfrm>
-            <a:off x="1426221" y="2459566"/>
-            <a:ext cx="15453963" cy="6954283"/>
-          </a:xfrm>
-          <a:custGeom>
-            <a:avLst/>
-            <a:gdLst/>
-            <a:ahLst/>
-            <a:cxnLst/>
-            <a:rect l="l" t="t" r="r" b="b"/>
-            <a:pathLst>
-              <a:path w="15453963" h="6954283">
-                <a:moveTo>
-                  <a:pt x="0" y="0"/>
-                </a:moveTo>
-                <a:lnTo>
-                  <a:pt x="15453963" y="0"/>
-                </a:lnTo>
-                <a:lnTo>
-                  <a:pt x="15453963" y="6954283"/>
-                </a:lnTo>
-                <a:lnTo>
-                  <a:pt x="0" y="6954283"/>
-                </a:lnTo>
-                <a:lnTo>
-                  <a:pt x="0" y="0"/>
-                </a:lnTo>
-                <a:close/>
-              </a:path>
-            </a:pathLst>
-          </a:custGeom>
-          <a:blipFill>
-            <a:blip r:embed="rId9"/>
-            <a:stretch>
-              <a:fillRect t="-694" b="-694"/>
-            </a:stretch>
-          </a:blipFill>
-        </p:spPr>
-        <p:txBody>
-          <a:bodyPr/>
-          <a:lstStyle/>
-          <a:p>
-            <a:endParaRPr lang="es-CL"/>
-          </a:p>
-        </p:txBody>
-      </p:sp>
-      <p:sp>
-        <p:nvSpPr>
           <p:cNvPr id="14" name="TextBox 14"/>
           <p:cNvSpPr txBox="1"/>
           <p:nvPr/>
@@ -12321,18 +12275,93 @@
           </a:p>
         </p:txBody>
       </p:sp>
+      <p:sp>
+        <p:nvSpPr>
+          <p:cNvPr id="16" name="AutoShape 4">
+            <a:extLst>
+              <a:ext uri="{FF2B5EF4-FFF2-40B4-BE49-F238E27FC236}">
+                <a16:creationId xmlns:a16="http://schemas.microsoft.com/office/drawing/2014/main" id="{7DA6A32B-D3DC-4497-A02B-6461FACC6FDE}"/>
+              </a:ext>
+            </a:extLst>
+          </p:cNvPr>
+          <p:cNvSpPr>
+            <a:spLocks noChangeAspect="1" noChangeArrowheads="1"/>
+          </p:cNvSpPr>
+          <p:nvPr/>
+        </p:nvSpPr>
+        <p:spPr bwMode="auto">
+          <a:xfrm>
+            <a:off x="8991600" y="4991100"/>
+            <a:ext cx="304800" cy="304800"/>
+          </a:xfrm>
+          <a:prstGeom prst="rect">
+            <a:avLst/>
+          </a:prstGeom>
+          <a:noFill/>
+          <a:extLst>
+            <a:ext uri="{909E8E84-426E-40DD-AFC4-6F175D3DCCD1}">
+              <a14:hiddenFill xmlns:a14="http://schemas.microsoft.com/office/drawing/2010/main">
+                <a:solidFill>
+                  <a:srgbClr val="FFFFFF"/>
+                </a:solidFill>
+              </a14:hiddenFill>
+            </a:ext>
+          </a:extLst>
+        </p:spPr>
+        <p:txBody>
+          <a:bodyPr vert="horz" wrap="square" lIns="91440" tIns="45720" rIns="91440" bIns="45720" numCol="1" anchor="t" anchorCtr="0" compatLnSpc="1">
+            <a:prstTxWarp prst="textNoShape">
+              <a:avLst/>
+            </a:prstTxWarp>
+          </a:bodyPr>
+          <a:lstStyle/>
+          <a:p>
+            <a:endParaRPr lang="es-MX"/>
+          </a:p>
+        </p:txBody>
+      </p:sp>
+      <p:pic>
+        <p:nvPicPr>
+          <p:cNvPr id="18" name="Imagen 17">
+            <a:extLst>
+              <a:ext uri="{FF2B5EF4-FFF2-40B4-BE49-F238E27FC236}">
+                <a16:creationId xmlns:a16="http://schemas.microsoft.com/office/drawing/2014/main" id="{96387DAA-40E1-4957-A488-6194289E3A09}"/>
+              </a:ext>
+            </a:extLst>
+          </p:cNvPr>
+          <p:cNvPicPr>
+            <a:picLocks noChangeAspect="1"/>
+          </p:cNvPicPr>
+          <p:nvPr/>
+        </p:nvPicPr>
+        <p:blipFill>
+          <a:blip r:embed="rId9"/>
+          <a:stretch>
+            <a:fillRect/>
+          </a:stretch>
+        </p:blipFill>
+        <p:spPr>
+          <a:xfrm>
+            <a:off x="1008822" y="2096908"/>
+            <a:ext cx="15865645" cy="7836442"/>
+          </a:xfrm>
+          <a:prstGeom prst="rect">
+            <a:avLst/>
+          </a:prstGeom>
+        </p:spPr>
+      </p:pic>
     </p:spTree>
   </p:cSld>
   <p:clrMapOvr>
     <a:masterClrMapping/>
   </p:clrMapOvr>
-  <mc:AlternateContent xmlns:mc="http://schemas.openxmlformats.org/markup-compatibility/2006">
-    <mc:Choice xmlns:p14="http://schemas.microsoft.com/office/powerpoint/2010/main" Requires="p14">
+  <mc:AlternateContent xmlns:mc="http://schemas.openxmlformats.org/markup-compatibility/2006" xmlns:p14="http://schemas.microsoft.com/office/powerpoint/2010/main">
+    <mc:Choice Requires="p14">
       <p:transition spd="med" p14:dur="700">
         <p:fade/>
       </p:transition>
     </mc:Choice>
-    <mc:Fallback>
+    <mc:Fallback xmlns="">
       <p:transition spd="med">
         <p:fade/>
       </p:transition>

--- a/Fase 2/Evidencias Proyecto/ServiHos Presentación.pptx
+++ b/Fase 2/Evidencias Proyecto/ServiHos Presentación.pptx
@@ -10206,59 +10206,6 @@
       </p:sp>
       <p:sp>
         <p:nvSpPr>
-          <p:cNvPr id="13" name="Freeform 13"/>
-          <p:cNvSpPr/>
-          <p:nvPr/>
-        </p:nvSpPr>
-        <p:spPr>
-          <a:xfrm>
-            <a:off x="5052626" y="1110910"/>
-            <a:ext cx="7708416" cy="8963274"/>
-          </a:xfrm>
-          <a:custGeom>
-            <a:avLst/>
-            <a:gdLst/>
-            <a:ahLst/>
-            <a:cxnLst/>
-            <a:rect l="l" t="t" r="r" b="b"/>
-            <a:pathLst>
-              <a:path w="7708416" h="8963274">
-                <a:moveTo>
-                  <a:pt x="0" y="0"/>
-                </a:moveTo>
-                <a:lnTo>
-                  <a:pt x="7708416" y="0"/>
-                </a:lnTo>
-                <a:lnTo>
-                  <a:pt x="7708416" y="8963274"/>
-                </a:lnTo>
-                <a:lnTo>
-                  <a:pt x="0" y="8963274"/>
-                </a:lnTo>
-                <a:lnTo>
-                  <a:pt x="0" y="0"/>
-                </a:lnTo>
-                <a:close/>
-              </a:path>
-            </a:pathLst>
-          </a:custGeom>
-          <a:blipFill>
-            <a:blip r:embed="rId9"/>
-            <a:stretch>
-              <a:fillRect/>
-            </a:stretch>
-          </a:blipFill>
-        </p:spPr>
-        <p:txBody>
-          <a:bodyPr/>
-          <a:lstStyle/>
-          <a:p>
-            <a:endParaRPr lang="es-CL"/>
-          </a:p>
-        </p:txBody>
-      </p:sp>
-      <p:sp>
-        <p:nvSpPr>
           <p:cNvPr id="14" name="TextBox 14"/>
           <p:cNvSpPr txBox="1"/>
           <p:nvPr/>
@@ -10298,6 +10245,36 @@
           </a:p>
         </p:txBody>
       </p:sp>
+      <p:pic>
+        <p:nvPicPr>
+          <p:cNvPr id="16" name="Imagen 15">
+            <a:extLst>
+              <a:ext uri="{FF2B5EF4-FFF2-40B4-BE49-F238E27FC236}">
+                <a16:creationId xmlns:a16="http://schemas.microsoft.com/office/drawing/2014/main" id="{D7405145-8A38-4402-B21A-19C0633062CC}"/>
+              </a:ext>
+            </a:extLst>
+          </p:cNvPr>
+          <p:cNvPicPr>
+            <a:picLocks noChangeAspect="1"/>
+          </p:cNvPicPr>
+          <p:nvPr/>
+        </p:nvPicPr>
+        <p:blipFill>
+          <a:blip r:embed="rId9"/>
+          <a:stretch>
+            <a:fillRect/>
+          </a:stretch>
+        </p:blipFill>
+        <p:spPr>
+          <a:xfrm>
+            <a:off x="5121226" y="1152690"/>
+            <a:ext cx="7591345" cy="8889865"/>
+          </a:xfrm>
+          <a:prstGeom prst="rect">
+            <a:avLst/>
+          </a:prstGeom>
+        </p:spPr>
+      </p:pic>
     </p:spTree>
   </p:cSld>
   <p:clrMapOvr>

--- a/Fase 2/Evidencias Proyecto/ServiHos Presentación.pptx
+++ b/Fase 2/Evidencias Proyecto/ServiHos Presentación.pptx
@@ -336,7 +336,7 @@
             <a:fld id="{1D8BD707-D9CF-40AE-B4C6-C98DA3205C09}" type="datetimeFigureOut">
               <a:rPr lang="en-US" smtClean="0"/>
               <a:pPr/>
-              <a:t>7/8/2025</a:t>
+              <a:t>7/9/2025</a:t>
             </a:fld>
             <a:endParaRPr lang="en-US"/>
           </a:p>
@@ -501,7 +501,7 @@
             <a:fld id="{1D8BD707-D9CF-40AE-B4C6-C98DA3205C09}" type="datetimeFigureOut">
               <a:rPr lang="en-US" smtClean="0"/>
               <a:pPr/>
-              <a:t>7/8/2025</a:t>
+              <a:t>7/9/2025</a:t>
             </a:fld>
             <a:endParaRPr lang="en-US"/>
           </a:p>
@@ -676,7 +676,7 @@
             <a:fld id="{1D8BD707-D9CF-40AE-B4C6-C98DA3205C09}" type="datetimeFigureOut">
               <a:rPr lang="en-US" smtClean="0"/>
               <a:pPr/>
-              <a:t>7/8/2025</a:t>
+              <a:t>7/9/2025</a:t>
             </a:fld>
             <a:endParaRPr lang="en-US"/>
           </a:p>
@@ -841,7 +841,7 @@
             <a:fld id="{1D8BD707-D9CF-40AE-B4C6-C98DA3205C09}" type="datetimeFigureOut">
               <a:rPr lang="en-US" smtClean="0"/>
               <a:pPr/>
-              <a:t>7/8/2025</a:t>
+              <a:t>7/9/2025</a:t>
             </a:fld>
             <a:endParaRPr lang="en-US"/>
           </a:p>
@@ -1083,7 +1083,7 @@
             <a:fld id="{1D8BD707-D9CF-40AE-B4C6-C98DA3205C09}" type="datetimeFigureOut">
               <a:rPr lang="en-US" smtClean="0"/>
               <a:pPr/>
-              <a:t>7/8/2025</a:t>
+              <a:t>7/9/2025</a:t>
             </a:fld>
             <a:endParaRPr lang="en-US"/>
           </a:p>
@@ -1365,7 +1365,7 @@
             <a:fld id="{1D8BD707-D9CF-40AE-B4C6-C98DA3205C09}" type="datetimeFigureOut">
               <a:rPr lang="en-US" smtClean="0"/>
               <a:pPr/>
-              <a:t>7/8/2025</a:t>
+              <a:t>7/9/2025</a:t>
             </a:fld>
             <a:endParaRPr lang="en-US"/>
           </a:p>
@@ -1781,7 +1781,7 @@
             <a:fld id="{1D8BD707-D9CF-40AE-B4C6-C98DA3205C09}" type="datetimeFigureOut">
               <a:rPr lang="en-US" smtClean="0"/>
               <a:pPr/>
-              <a:t>7/8/2025</a:t>
+              <a:t>7/9/2025</a:t>
             </a:fld>
             <a:endParaRPr lang="en-US"/>
           </a:p>
@@ -1895,7 +1895,7 @@
             <a:fld id="{1D8BD707-D9CF-40AE-B4C6-C98DA3205C09}" type="datetimeFigureOut">
               <a:rPr lang="en-US" smtClean="0"/>
               <a:pPr/>
-              <a:t>7/8/2025</a:t>
+              <a:t>7/9/2025</a:t>
             </a:fld>
             <a:endParaRPr lang="en-US"/>
           </a:p>
@@ -1987,7 +1987,7 @@
             <a:fld id="{1D8BD707-D9CF-40AE-B4C6-C98DA3205C09}" type="datetimeFigureOut">
               <a:rPr lang="en-US" smtClean="0"/>
               <a:pPr/>
-              <a:t>7/8/2025</a:t>
+              <a:t>7/9/2025</a:t>
             </a:fld>
             <a:endParaRPr lang="en-US"/>
           </a:p>
@@ -2259,7 +2259,7 @@
             <a:fld id="{1D8BD707-D9CF-40AE-B4C6-C98DA3205C09}" type="datetimeFigureOut">
               <a:rPr lang="en-US" smtClean="0"/>
               <a:pPr/>
-              <a:t>7/8/2025</a:t>
+              <a:t>7/9/2025</a:t>
             </a:fld>
             <a:endParaRPr lang="en-US"/>
           </a:p>
@@ -2508,7 +2508,7 @@
             <a:fld id="{1D8BD707-D9CF-40AE-B4C6-C98DA3205C09}" type="datetimeFigureOut">
               <a:rPr lang="en-US" smtClean="0"/>
               <a:pPr/>
-              <a:t>7/8/2025</a:t>
+              <a:t>7/9/2025</a:t>
             </a:fld>
             <a:endParaRPr lang="en-US"/>
           </a:p>
@@ -2716,7 +2716,7 @@
             <a:fld id="{1D8BD707-D9CF-40AE-B4C6-C98DA3205C09}" type="datetimeFigureOut">
               <a:rPr lang="en-US" smtClean="0"/>
               <a:pPr/>
-              <a:t>7/8/2025</a:t>
+              <a:t>7/9/2025</a:t>
             </a:fld>
             <a:endParaRPr lang="en-US"/>
           </a:p>
@@ -10631,59 +10631,6 @@
       </p:sp>
       <p:sp>
         <p:nvSpPr>
-          <p:cNvPr id="7" name="Freeform 7"/>
-          <p:cNvSpPr/>
-          <p:nvPr/>
-        </p:nvSpPr>
-        <p:spPr>
-          <a:xfrm>
-            <a:off x="2967241" y="1366327"/>
-            <a:ext cx="12353518" cy="8132733"/>
-          </a:xfrm>
-          <a:custGeom>
-            <a:avLst/>
-            <a:gdLst/>
-            <a:ahLst/>
-            <a:cxnLst/>
-            <a:rect l="l" t="t" r="r" b="b"/>
-            <a:pathLst>
-              <a:path w="12353518" h="8132733">
-                <a:moveTo>
-                  <a:pt x="0" y="0"/>
-                </a:moveTo>
-                <a:lnTo>
-                  <a:pt x="12353518" y="0"/>
-                </a:lnTo>
-                <a:lnTo>
-                  <a:pt x="12353518" y="8132733"/>
-                </a:lnTo>
-                <a:lnTo>
-                  <a:pt x="0" y="8132733"/>
-                </a:lnTo>
-                <a:lnTo>
-                  <a:pt x="0" y="0"/>
-                </a:lnTo>
-                <a:close/>
-              </a:path>
-            </a:pathLst>
-          </a:custGeom>
-          <a:blipFill>
-            <a:blip r:embed="rId7"/>
-            <a:stretch>
-              <a:fillRect l="-1874" r="-1874"/>
-            </a:stretch>
-          </a:blipFill>
-        </p:spPr>
-        <p:txBody>
-          <a:bodyPr/>
-          <a:lstStyle/>
-          <a:p>
-            <a:endParaRPr lang="es-CL"/>
-          </a:p>
-        </p:txBody>
-      </p:sp>
-      <p:sp>
-        <p:nvSpPr>
           <p:cNvPr id="8" name="TextBox 8"/>
           <p:cNvSpPr txBox="1"/>
           <p:nvPr/>
@@ -10723,6 +10670,42 @@
           </a:p>
         </p:txBody>
       </p:sp>
+      <p:pic>
+        <p:nvPicPr>
+          <p:cNvPr id="10" name="Imagen 9">
+            <a:extLst>
+              <a:ext uri="{FF2B5EF4-FFF2-40B4-BE49-F238E27FC236}">
+                <a16:creationId xmlns:a16="http://schemas.microsoft.com/office/drawing/2014/main" id="{48C93B56-0533-4BBA-9ED3-9801205B9C53}"/>
+              </a:ext>
+            </a:extLst>
+          </p:cNvPr>
+          <p:cNvPicPr>
+            <a:picLocks noChangeAspect="1"/>
+          </p:cNvPicPr>
+          <p:nvPr/>
+        </p:nvPicPr>
+        <p:blipFill>
+          <a:blip r:embed="rId7">
+            <a:extLst>
+              <a:ext uri="{28A0092B-C50C-407E-A947-70E740481C1C}">
+                <a14:useLocalDpi xmlns:a14="http://schemas.microsoft.com/office/drawing/2010/main" val="0"/>
+              </a:ext>
+            </a:extLst>
+          </a:blip>
+          <a:stretch>
+            <a:fillRect/>
+          </a:stretch>
+        </p:blipFill>
+        <p:spPr>
+          <a:xfrm>
+            <a:off x="2968216" y="1671815"/>
+            <a:ext cx="12351567" cy="8138865"/>
+          </a:xfrm>
+          <a:prstGeom prst="rect">
+            <a:avLst/>
+          </a:prstGeom>
+        </p:spPr>
+      </p:pic>
     </p:spTree>
   </p:cSld>
   <p:clrMapOvr>
